--- a/mesh_bioplastics_CI_Report.pptx
+++ b/mesh_bioplastics_CI_Report.pptx
@@ -4909,7 +4909,7 @@
                 <a:ea typeface="Arial" pitchFamily="34" charset="-122"/>
                 <a:cs typeface="Arial" pitchFamily="34" charset="-120"/>
               </a:rPr>
-              <a:t>Material Innovation vs. Process Equipment</a:t>
+              <a:t>Material Sustainability Integration</a:t>
             </a:r>
             <a:endParaRPr lang="en-US" sz="900" dirty="0"/>
           </a:p>
@@ -4987,7 +4987,7 @@
                 <a:ea typeface="Arial" pitchFamily="34" charset="-122"/>
                 <a:cs typeface="Arial" pitchFamily="34" charset="-120"/>
               </a:rPr>
-              <a:t>Integrated Intelligence vs. Standalone Tooling</a:t>
+              <a:t>Process Intelligence Automation</a:t>
             </a:r>
             <a:endParaRPr lang="en-US" sz="900" dirty="0"/>
           </a:p>
@@ -8270,7 +8270,7 @@
                 <a:ea typeface="Arial" pitchFamily="34" charset="-122"/>
                 <a:cs typeface="Arial" pitchFamily="34" charset="-120"/>
               </a:rPr>
-              <a:t>Emeryville, United States | https://www.rjg.com</a:t>
+              <a:t>Emeryville, California, United States | https://www.rjg.com</a:t>
             </a:r>
             <a:endParaRPr lang="en-US" sz="900" dirty="0"/>
           </a:p>
@@ -8888,7 +8888,7 @@
                 <a:ea typeface="Arial" pitchFamily="34" charset="-122"/>
                 <a:cs typeface="Arial" pitchFamily="34" charset="-120"/>
               </a:rPr>
-              <a:t>Direct contact, reputation-based (Avvo, Martindale-Hubbell ratings)</a:t>
+              <a:t>Direct contact, referrals from other attorneys</a:t>
             </a:r>
             <a:endParaRPr lang="en-US" sz="900" dirty="0"/>
           </a:p>
@@ -8991,7 +8991,7 @@
                 <a:ea typeface="Arial" pitchFamily="34" charset="-122"/>
                 <a:cs typeface="Arial" pitchFamily="34" charset="-120"/>
               </a:rPr>
-              <a:t>Trademark applications, copyright, entertainment law expertise</a:t>
+              <a:t>Trademark, copyright, entertainment law with 500+ applications handled</a:t>
             </a:r>
             <a:endParaRPr lang="en-US" sz="900" dirty="0"/>
           </a:p>
@@ -9094,7 +9094,7 @@
                 <a:ea typeface="Arial" pitchFamily="34" charset="-122"/>
                 <a:cs typeface="Arial" pitchFamily="34" charset="-120"/>
               </a:rPr>
-              <a:t>500+ trademark applications and registrations to credit</a:t>
+              <a:t>Unknown</a:t>
             </a:r>
             <a:endParaRPr lang="en-US" sz="900" dirty="0"/>
           </a:p>
@@ -9403,7 +9403,7 @@
                 <a:ea typeface="Arial" pitchFamily="34" charset="-122"/>
                 <a:cs typeface="Arial" pitchFamily="34" charset="-120"/>
               </a:rPr>
-              <a:t>Entertainment industry producers, directors, actors, musicians</a:t>
+              <a:t>Entertainment producers, directors, musicians, authors, trademark applicants</a:t>
             </a:r>
             <a:endParaRPr lang="en-US" sz="900" dirty="0"/>
           </a:p>
@@ -9506,7 +9506,7 @@
                 <a:ea typeface="Arial" pitchFamily="34" charset="-122"/>
                 <a:cs typeface="Arial" pitchFamily="34" charset="-120"/>
               </a:rPr>
-              <a:t>Intellectual property and entertainment law counsel services</a:t>
+              <a:t>Intellectual property and entertainment law services expertise</a:t>
             </a:r>
             <a:endParaRPr lang="en-US" sz="900" dirty="0"/>
           </a:p>
@@ -9847,7 +9847,7 @@
                 <a:ea typeface="Arial" pitchFamily="34" charset="-122"/>
                 <a:cs typeface="Arial" pitchFamily="34" charset="-120"/>
               </a:rPr>
-              <a:t>Unknown | https://www.kistler.com</a:t>
+              <a:t>Sindelfingen, Germany | https://www.kistler.com</a:t>
             </a:r>
             <a:endParaRPr lang="en-US" sz="900" dirty="0"/>
           </a:p>
@@ -10465,7 +10465,7 @@
                 <a:ea typeface="Arial" pitchFamily="34" charset="-122"/>
                 <a:cs typeface="Arial" pitchFamily="34" charset="-120"/>
               </a:rPr>
-              <a:t>Product finder, online catalog, direct website</a:t>
+              <a:t>Website product finders, industry verticals</a:t>
             </a:r>
             <a:endParaRPr lang="en-US" sz="900" dirty="0"/>
           </a:p>
@@ -10568,7 +10568,7 @@
                 <a:ea typeface="Arial" pitchFamily="34" charset="-122"/>
                 <a:cs typeface="Arial" pitchFamily="34" charset="-120"/>
               </a:rPr>
-              <a:t>IEPE piezoelectric sensors, force sensors, accelerometers</a:t>
+              <a:t>IEPE piezoelectric sensors, force sensors, accelerometers for measurement</a:t>
             </a:r>
             <a:endParaRPr lang="en-US" sz="900" dirty="0"/>
           </a:p>
@@ -10980,7 +10980,7 @@
                 <a:ea typeface="Arial" pitchFamily="34" charset="-122"/>
                 <a:cs typeface="Arial" pitchFamily="34" charset="-120"/>
               </a:rPr>
-              <a:t>Industrial measurement and vibration monitoring applications</a:t>
+              <a:t>Industrial measurement, automotive, vibration monitoring applications</a:t>
             </a:r>
             <a:endParaRPr lang="en-US" sz="900" dirty="0"/>
           </a:p>
@@ -11083,7 +11083,7 @@
                 <a:ea typeface="Arial" pitchFamily="34" charset="-122"/>
                 <a:cs typeface="Arial" pitchFamily="34" charset="-120"/>
               </a:rPr>
-              <a:t>Precision measurement sensors for industrial applications</a:t>
+              <a:t>Advanced sensor measurement technology for industrial applications</a:t>
             </a:r>
             <a:endParaRPr lang="en-US" sz="900" dirty="0"/>
           </a:p>
@@ -12042,7 +12042,7 @@
                 <a:ea typeface="Arial" pitchFamily="34" charset="-122"/>
                 <a:cs typeface="Arial" pitchFamily="34" charset="-120"/>
               </a:rPr>
-              <a:t>Content marketing, product pages, consultative approach</a:t>
+              <a:t>Website content marketing, product demonstrations, consultative sales</a:t>
             </a:r>
             <a:endParaRPr lang="en-US" sz="900" dirty="0"/>
           </a:p>
@@ -12145,7 +12145,7 @@
                 <a:ea typeface="Arial" pitchFamily="34" charset="-122"/>
                 <a:cs typeface="Arial" pitchFamily="34" charset="-120"/>
               </a:rPr>
-              <a:t>Hot runner systems, flow control, IntelliGate digital sensors</a:t>
+              <a:t>Hot runner systems, IntelliGate digital sensor technology, flow control</a:t>
             </a:r>
             <a:endParaRPr lang="en-US" sz="900" dirty="0"/>
           </a:p>
@@ -12248,7 +12248,7 @@
                 <a:ea typeface="Arial" pitchFamily="34" charset="-122"/>
                 <a:cs typeface="Arial" pitchFamily="34" charset="-120"/>
               </a:rPr>
-              <a:t>50+ years experience, long-standing customer relationships</a:t>
+              <a:t>Unknown</a:t>
             </a:r>
             <a:endParaRPr lang="en-US" sz="900" dirty="0"/>
           </a:p>
@@ -12557,7 +12557,7 @@
                 <a:ea typeface="Arial" pitchFamily="34" charset="-122"/>
                 <a:cs typeface="Arial" pitchFamily="34" charset="-120"/>
               </a:rPr>
-              <a:t>Plastics injection molding manufacturers worldwide</a:t>
+              <a:t>Injection molding manufacturers, plastics processors</a:t>
             </a:r>
             <a:endParaRPr lang="en-US" sz="900" dirty="0"/>
           </a:p>
@@ -12660,7 +12660,7 @@
                 <a:ea typeface="Arial" pitchFamily="34" charset="-122"/>
                 <a:cs typeface="Arial" pitchFamily="34" charset="-120"/>
               </a:rPr>
-              <a:t>Hot runner solutions to improve injection molding efficiency</a:t>
+              <a:t>Sophisticated hot runner solutions for injection molding innovation</a:t>
             </a:r>
             <a:endParaRPr lang="en-US" sz="900" dirty="0"/>
           </a:p>
@@ -12763,7 +12763,7 @@
                 <a:ea typeface="Arial" pitchFamily="34" charset="-122"/>
                 <a:cs typeface="Arial" pitchFamily="34" charset="-120"/>
               </a:rPr>
-              <a:t>New IntelliGate Hot Runner with digital sensor technology launched</a:t>
+              <a:t>IntelliGate Hot Runner product launch with digital sensor technology</a:t>
             </a:r>
             <a:endParaRPr lang="en-US" sz="900" dirty="0"/>
           </a:p>
@@ -14548,7 +14548,7 @@
                           <a:ea typeface="Arial" pitchFamily="34" charset="-122"/>
                           <a:cs typeface="Arial" pitchFamily="34" charset="-120"/>
                         </a:rPr>
-                        <a:t>Product finder</a:t>
+                        <a:t>Website product finders</a:t>
                       </a:r>
                       <a:endParaRPr lang="en-US" sz="800" dirty="0">
                         <a:latin typeface="Arial" charset="0"/>
@@ -14616,7 +14616,7 @@
                           <a:ea typeface="Arial" pitchFamily="34" charset="-122"/>
                           <a:cs typeface="Arial" pitchFamily="34" charset="-120"/>
                         </a:rPr>
-                        <a:t>Content marketing</a:t>
+                        <a:t>Website content marketing</a:t>
                       </a:r>
                       <a:endParaRPr lang="en-US" sz="800" dirty="0">
                         <a:latin typeface="Arial" charset="0"/>
@@ -14822,7 +14822,7 @@
                           <a:ea typeface="Arial" pitchFamily="34" charset="-122"/>
                           <a:cs typeface="Arial" pitchFamily="34" charset="-120"/>
                         </a:rPr>
-                        <a:t>Trademark applications</a:t>
+                        <a:t>Trademark</a:t>
                       </a:r>
                       <a:endParaRPr lang="en-US" sz="800" dirty="0">
                         <a:latin typeface="Arial" charset="0"/>
@@ -15164,7 +15164,7 @@
                           <a:ea typeface="Arial" pitchFamily="34" charset="-122"/>
                           <a:cs typeface="Arial" pitchFamily="34" charset="-120"/>
                         </a:rPr>
-                        <a:t>500+ trademark applications and registrations to credit</a:t>
+                        <a:t>Unknown</a:t>
                       </a:r>
                       <a:endParaRPr lang="en-US" sz="800" dirty="0">
                         <a:latin typeface="Arial" charset="0"/>
@@ -15300,7 +15300,7 @@
                           <a:ea typeface="Arial" pitchFamily="34" charset="-122"/>
                           <a:cs typeface="Arial" pitchFamily="34" charset="-120"/>
                         </a:rPr>
-                        <a:t>50+ years experience</a:t>
+                        <a:t>Unknown</a:t>
                       </a:r>
                       <a:endParaRPr lang="en-US" sz="800" dirty="0">
                         <a:latin typeface="Arial" charset="0"/>
@@ -16190,7 +16190,7 @@
                           <a:ea typeface="Arial" pitchFamily="34" charset="-122"/>
                           <a:cs typeface="Arial" pitchFamily="34" charset="-120"/>
                         </a:rPr>
-                        <a:t>Entertainment industry producers</a:t>
+                        <a:t>Entertainment producers</a:t>
                       </a:r>
                       <a:endParaRPr lang="en-US" sz="800" dirty="0">
                         <a:latin typeface="Arial" charset="0"/>
@@ -16258,7 +16258,7 @@
                           <a:ea typeface="Arial" pitchFamily="34" charset="-122"/>
                           <a:cs typeface="Arial" pitchFamily="34" charset="-120"/>
                         </a:rPr>
-                        <a:t>Industrial measurement and vibration monitoring applications</a:t>
+                        <a:t>Industrial measurement</a:t>
                       </a:r>
                       <a:endParaRPr lang="en-US" sz="800" dirty="0">
                         <a:latin typeface="Arial" charset="0"/>
@@ -16326,7 +16326,7 @@
                           <a:ea typeface="Arial" pitchFamily="34" charset="-122"/>
                           <a:cs typeface="Arial" pitchFamily="34" charset="-120"/>
                         </a:rPr>
-                        <a:t>Plastics injection molding manufacturers worldwide</a:t>
+                        <a:t>Injection molding manufacturers</a:t>
                       </a:r>
                       <a:endParaRPr lang="en-US" sz="800" dirty="0">
                         <a:latin typeface="Arial" charset="0"/>
@@ -16532,7 +16532,7 @@
                           <a:ea typeface="Arial" pitchFamily="34" charset="-122"/>
                           <a:cs typeface="Arial" pitchFamily="34" charset="-120"/>
                         </a:rPr>
-                        <a:t>Intellectual property and entertainment law counsel services</a:t>
+                        <a:t>Intellectual property and entertainment law services expertise</a:t>
                       </a:r>
                       <a:endParaRPr lang="en-US" sz="800" dirty="0">
                         <a:latin typeface="Arial" charset="0"/>
@@ -16600,7 +16600,7 @@
                           <a:ea typeface="Arial" pitchFamily="34" charset="-122"/>
                           <a:cs typeface="Arial" pitchFamily="34" charset="-120"/>
                         </a:rPr>
-                        <a:t>Precision measurement sensors for industrial applications</a:t>
+                        <a:t>Advanced sensor measurement technology for industrial applications</a:t>
                       </a:r>
                       <a:endParaRPr lang="en-US" sz="800" dirty="0">
                         <a:latin typeface="Arial" charset="0"/>
@@ -16668,7 +16668,7 @@
                           <a:ea typeface="Arial" pitchFamily="34" charset="-122"/>
                           <a:cs typeface="Arial" pitchFamily="34" charset="-120"/>
                         </a:rPr>
-                        <a:t>Hot runner solutions to improve injection molding efficiency</a:t>
+                        <a:t>Sophisticated hot runner solutions for injection molding innovation</a:t>
                       </a:r>
                       <a:endParaRPr lang="en-US" sz="800" dirty="0">
                         <a:latin typeface="Arial" charset="0"/>
@@ -17010,7 +17010,7 @@
                           <a:ea typeface="Arial" pitchFamily="34" charset="-122"/>
                           <a:cs typeface="Arial" pitchFamily="34" charset="-120"/>
                         </a:rPr>
-                        <a:t>New IntelliGate Hot Runner with digital sensor technology launched</a:t>
+                        <a:t>IntelliGate Hot Runner product launch with digital sensor technology</a:t>
                       </a:r>
                       <a:endParaRPr lang="en-US" sz="800" dirty="0">
                         <a:latin typeface="Arial" charset="0"/>

--- a/mesh_bioplastics_CI_Report.pptx
+++ b/mesh_bioplastics_CI_Report.pptx
@@ -4909,7 +4909,7 @@
                 <a:ea typeface="Arial" pitchFamily="34" charset="-122"/>
                 <a:cs typeface="Arial" pitchFamily="34" charset="-120"/>
               </a:rPr>
-              <a:t>Material Sustainability Integration</a:t>
+              <a:t>Material Innovation vs. Process Equipment</a:t>
             </a:r>
             <a:endParaRPr lang="en-US" sz="900" dirty="0"/>
           </a:p>
@@ -4987,7 +4987,7 @@
                 <a:ea typeface="Arial" pitchFamily="34" charset="-122"/>
                 <a:cs typeface="Arial" pitchFamily="34" charset="-120"/>
               </a:rPr>
-              <a:t>Process Intelligence Automation</a:t>
+              <a:t>Sustainability Integration vs. Performance Specialization</a:t>
             </a:r>
             <a:endParaRPr lang="en-US" sz="900" dirty="0"/>
           </a:p>
@@ -8270,7 +8270,7 @@
                 <a:ea typeface="Arial" pitchFamily="34" charset="-122"/>
                 <a:cs typeface="Arial" pitchFamily="34" charset="-120"/>
               </a:rPr>
-              <a:t>Emeryville, California, United States | https://www.rjg.com</a:t>
+              <a:t>Emeryville, California, USA | https://www.rjg.com</a:t>
             </a:r>
             <a:endParaRPr lang="en-US" sz="900" dirty="0"/>
           </a:p>
@@ -8888,7 +8888,7 @@
                 <a:ea typeface="Arial" pitchFamily="34" charset="-122"/>
                 <a:cs typeface="Arial" pitchFamily="34" charset="-120"/>
               </a:rPr>
-              <a:t>Direct contact, referrals from other attorneys</a:t>
+              <a:t>Direct contact, professional referrals</a:t>
             </a:r>
             <a:endParaRPr lang="en-US" sz="900" dirty="0"/>
           </a:p>
@@ -8991,7 +8991,7 @@
                 <a:ea typeface="Arial" pitchFamily="34" charset="-122"/>
                 <a:cs typeface="Arial" pitchFamily="34" charset="-120"/>
               </a:rPr>
-              <a:t>Trademark, copyright, entertainment law with 500+ applications handled</a:t>
+              <a:t>Trademark applications, copyright, entertainment law expertise</a:t>
             </a:r>
             <a:endParaRPr lang="en-US" sz="900" dirty="0"/>
           </a:p>
@@ -9094,7 +9094,7 @@
                 <a:ea typeface="Arial" pitchFamily="34" charset="-122"/>
                 <a:cs typeface="Arial" pitchFamily="34" charset="-120"/>
               </a:rPr>
-              <a:t>Unknown</a:t>
+              <a:t>500+ trademark applications and registrations credited</a:t>
             </a:r>
             <a:endParaRPr lang="en-US" sz="900" dirty="0"/>
           </a:p>
@@ -9403,7 +9403,7 @@
                 <a:ea typeface="Arial" pitchFamily="34" charset="-122"/>
                 <a:cs typeface="Arial" pitchFamily="34" charset="-120"/>
               </a:rPr>
-              <a:t>Entertainment producers, directors, musicians, authors, trademark applicants</a:t>
+              <a:t>Entertainment industry, musicians, producers, trademark holders</a:t>
             </a:r>
             <a:endParaRPr lang="en-US" sz="900" dirty="0"/>
           </a:p>
@@ -9506,7 +9506,7 @@
                 <a:ea typeface="Arial" pitchFamily="34" charset="-122"/>
                 <a:cs typeface="Arial" pitchFamily="34" charset="-120"/>
               </a:rPr>
-              <a:t>Intellectual property and entertainment law services expertise</a:t>
+              <a:t>Intellectual property law and entertainment legal services</a:t>
             </a:r>
             <a:endParaRPr lang="en-US" sz="900" dirty="0"/>
           </a:p>
@@ -9847,7 +9847,7 @@
                 <a:ea typeface="Arial" pitchFamily="34" charset="-122"/>
                 <a:cs typeface="Arial" pitchFamily="34" charset="-120"/>
               </a:rPr>
-              <a:t>Sindelfingen, Germany | https://www.kistler.com</a:t>
+              <a:t>Unknown | https://www.kistler.com</a:t>
             </a:r>
             <a:endParaRPr lang="en-US" sz="900" dirty="0"/>
           </a:p>
@@ -10465,7 +10465,7 @@
                 <a:ea typeface="Arial" pitchFamily="34" charset="-122"/>
                 <a:cs typeface="Arial" pitchFamily="34" charset="-120"/>
               </a:rPr>
-              <a:t>Website product finders, industry verticals</a:t>
+              <a:t>Product finder, technical documentation, B2B marketing</a:t>
             </a:r>
             <a:endParaRPr lang="en-US" sz="900" dirty="0"/>
           </a:p>
@@ -10568,7 +10568,7 @@
                 <a:ea typeface="Arial" pitchFamily="34" charset="-122"/>
                 <a:cs typeface="Arial" pitchFamily="34" charset="-120"/>
               </a:rPr>
-              <a:t>IEPE piezoelectric sensors, force sensors, accelerometers for measurement</a:t>
+              <a:t>IEPE piezoelectric sensors, force sensors, accelerometers</a:t>
             </a:r>
             <a:endParaRPr lang="en-US" sz="900" dirty="0"/>
           </a:p>
@@ -10980,7 +10980,7 @@
                 <a:ea typeface="Arial" pitchFamily="34" charset="-122"/>
                 <a:cs typeface="Arial" pitchFamily="34" charset="-120"/>
               </a:rPr>
-              <a:t>Industrial measurement, automotive, vibration monitoring applications</a:t>
+              <a:t>Industrial measurement and vibration monitoring applications</a:t>
             </a:r>
             <a:endParaRPr lang="en-US" sz="900" dirty="0"/>
           </a:p>
@@ -11083,7 +11083,7 @@
                 <a:ea typeface="Arial" pitchFamily="34" charset="-122"/>
                 <a:cs typeface="Arial" pitchFamily="34" charset="-120"/>
               </a:rPr>
-              <a:t>Advanced sensor measurement technology for industrial applications</a:t>
+              <a:t>Precision measurement technology for industrial applications</a:t>
             </a:r>
             <a:endParaRPr lang="en-US" sz="900" dirty="0"/>
           </a:p>
@@ -12042,7 +12042,7 @@
                 <a:ea typeface="Arial" pitchFamily="34" charset="-122"/>
                 <a:cs typeface="Arial" pitchFamily="34" charset="-120"/>
               </a:rPr>
-              <a:t>Website content marketing, product demonstrations, consultative sales</a:t>
+              <a:t>Product marketing, technical solutions, case studies</a:t>
             </a:r>
             <a:endParaRPr lang="en-US" sz="900" dirty="0"/>
           </a:p>
@@ -12145,7 +12145,7 @@
                 <a:ea typeface="Arial" pitchFamily="34" charset="-122"/>
                 <a:cs typeface="Arial" pitchFamily="34" charset="-120"/>
               </a:rPr>
-              <a:t>Hot runner systems, IntelliGate digital sensor technology, flow control</a:t>
+              <a:t>Hot runner systems, flow control, IntelliGate technology</a:t>
             </a:r>
             <a:endParaRPr lang="en-US" sz="900" dirty="0"/>
           </a:p>
@@ -12248,7 +12248,7 @@
                 <a:ea typeface="Arial" pitchFamily="34" charset="-122"/>
                 <a:cs typeface="Arial" pitchFamily="34" charset="-120"/>
               </a:rPr>
-              <a:t>Unknown</a:t>
+              <a:t>50+ years of customer relationships, consultative approach</a:t>
             </a:r>
             <a:endParaRPr lang="en-US" sz="900" dirty="0"/>
           </a:p>
@@ -12557,7 +12557,7 @@
                 <a:ea typeface="Arial" pitchFamily="34" charset="-122"/>
                 <a:cs typeface="Arial" pitchFamily="34" charset="-120"/>
               </a:rPr>
-              <a:t>Injection molding manufacturers, plastics processors</a:t>
+              <a:t>Injection molding manufacturers seeking efficiency improvements</a:t>
             </a:r>
             <a:endParaRPr lang="en-US" sz="900" dirty="0"/>
           </a:p>
@@ -12660,7 +12660,7 @@
                 <a:ea typeface="Arial" pitchFamily="34" charset="-122"/>
                 <a:cs typeface="Arial" pitchFamily="34" charset="-120"/>
               </a:rPr>
-              <a:t>Sophisticated hot runner solutions for injection molding innovation</a:t>
+              <a:t>Advanced hot runner solutions for injection molding innovation</a:t>
             </a:r>
             <a:endParaRPr lang="en-US" sz="900" dirty="0"/>
           </a:p>
@@ -12763,7 +12763,7 @@
                 <a:ea typeface="Arial" pitchFamily="34" charset="-122"/>
                 <a:cs typeface="Arial" pitchFamily="34" charset="-120"/>
               </a:rPr>
-              <a:t>IntelliGate Hot Runner product launch with digital sensor technology</a:t>
+              <a:t>Launched new IntelliGate Hot Runner with digital sensor technology</a:t>
             </a:r>
             <a:endParaRPr lang="en-US" sz="900" dirty="0"/>
           </a:p>
@@ -14548,7 +14548,7 @@
                           <a:ea typeface="Arial" pitchFamily="34" charset="-122"/>
                           <a:cs typeface="Arial" pitchFamily="34" charset="-120"/>
                         </a:rPr>
-                        <a:t>Website product finders</a:t>
+                        <a:t>Product finder</a:t>
                       </a:r>
                       <a:endParaRPr lang="en-US" sz="800" dirty="0">
                         <a:latin typeface="Arial" charset="0"/>
@@ -14616,7 +14616,7 @@
                           <a:ea typeface="Arial" pitchFamily="34" charset="-122"/>
                           <a:cs typeface="Arial" pitchFamily="34" charset="-120"/>
                         </a:rPr>
-                        <a:t>Website content marketing</a:t>
+                        <a:t>Product marketing</a:t>
                       </a:r>
                       <a:endParaRPr lang="en-US" sz="800" dirty="0">
                         <a:latin typeface="Arial" charset="0"/>
@@ -14822,7 +14822,7 @@
                           <a:ea typeface="Arial" pitchFamily="34" charset="-122"/>
                           <a:cs typeface="Arial" pitchFamily="34" charset="-120"/>
                         </a:rPr>
-                        <a:t>Trademark</a:t>
+                        <a:t>Trademark applications</a:t>
                       </a:r>
                       <a:endParaRPr lang="en-US" sz="800" dirty="0">
                         <a:latin typeface="Arial" charset="0"/>
@@ -15164,7 +15164,7 @@
                           <a:ea typeface="Arial" pitchFamily="34" charset="-122"/>
                           <a:cs typeface="Arial" pitchFamily="34" charset="-120"/>
                         </a:rPr>
-                        <a:t>Unknown</a:t>
+                        <a:t>500+ trademark applications and registrations credited</a:t>
                       </a:r>
                       <a:endParaRPr lang="en-US" sz="800" dirty="0">
                         <a:latin typeface="Arial" charset="0"/>
@@ -15300,7 +15300,7 @@
                           <a:ea typeface="Arial" pitchFamily="34" charset="-122"/>
                           <a:cs typeface="Arial" pitchFamily="34" charset="-120"/>
                         </a:rPr>
-                        <a:t>Unknown</a:t>
+                        <a:t>50+ years of customer relationships</a:t>
                       </a:r>
                       <a:endParaRPr lang="en-US" sz="800" dirty="0">
                         <a:latin typeface="Arial" charset="0"/>
@@ -16190,7 +16190,7 @@
                           <a:ea typeface="Arial" pitchFamily="34" charset="-122"/>
                           <a:cs typeface="Arial" pitchFamily="34" charset="-120"/>
                         </a:rPr>
-                        <a:t>Entertainment producers</a:t>
+                        <a:t>Entertainment industry</a:t>
                       </a:r>
                       <a:endParaRPr lang="en-US" sz="800" dirty="0">
                         <a:latin typeface="Arial" charset="0"/>
@@ -16258,7 +16258,7 @@
                           <a:ea typeface="Arial" pitchFamily="34" charset="-122"/>
                           <a:cs typeface="Arial" pitchFamily="34" charset="-120"/>
                         </a:rPr>
-                        <a:t>Industrial measurement</a:t>
+                        <a:t>Industrial measurement and vibration monitoring applications</a:t>
                       </a:r>
                       <a:endParaRPr lang="en-US" sz="800" dirty="0">
                         <a:latin typeface="Arial" charset="0"/>
@@ -16326,7 +16326,7 @@
                           <a:ea typeface="Arial" pitchFamily="34" charset="-122"/>
                           <a:cs typeface="Arial" pitchFamily="34" charset="-120"/>
                         </a:rPr>
-                        <a:t>Injection molding manufacturers</a:t>
+                        <a:t>Injection molding manufacturers seeking efficiency improvements</a:t>
                       </a:r>
                       <a:endParaRPr lang="en-US" sz="800" dirty="0">
                         <a:latin typeface="Arial" charset="0"/>
@@ -16532,7 +16532,7 @@
                           <a:ea typeface="Arial" pitchFamily="34" charset="-122"/>
                           <a:cs typeface="Arial" pitchFamily="34" charset="-120"/>
                         </a:rPr>
-                        <a:t>Intellectual property and entertainment law services expertise</a:t>
+                        <a:t>Intellectual property law and entertainment legal services</a:t>
                       </a:r>
                       <a:endParaRPr lang="en-US" sz="800" dirty="0">
                         <a:latin typeface="Arial" charset="0"/>
@@ -16600,7 +16600,7 @@
                           <a:ea typeface="Arial" pitchFamily="34" charset="-122"/>
                           <a:cs typeface="Arial" pitchFamily="34" charset="-120"/>
                         </a:rPr>
-                        <a:t>Advanced sensor measurement technology for industrial applications</a:t>
+                        <a:t>Precision measurement technology for industrial applications</a:t>
                       </a:r>
                       <a:endParaRPr lang="en-US" sz="800" dirty="0">
                         <a:latin typeface="Arial" charset="0"/>
@@ -16668,7 +16668,7 @@
                           <a:ea typeface="Arial" pitchFamily="34" charset="-122"/>
                           <a:cs typeface="Arial" pitchFamily="34" charset="-120"/>
                         </a:rPr>
-                        <a:t>Sophisticated hot runner solutions for injection molding innovation</a:t>
+                        <a:t>Advanced hot runner solutions for injection molding innovation</a:t>
                       </a:r>
                       <a:endParaRPr lang="en-US" sz="800" dirty="0">
                         <a:latin typeface="Arial" charset="0"/>
@@ -17010,7 +17010,7 @@
                           <a:ea typeface="Arial" pitchFamily="34" charset="-122"/>
                           <a:cs typeface="Arial" pitchFamily="34" charset="-120"/>
                         </a:rPr>
-                        <a:t>IntelliGate Hot Runner product launch with digital sensor technology</a:t>
+                        <a:t>Launched new IntelliGate Hot Runner with digital sensor technology</a:t>
                       </a:r>
                       <a:endParaRPr lang="en-US" sz="800" dirty="0">
                         <a:latin typeface="Arial" charset="0"/>

--- a/mesh_bioplastics_CI_Report.pptx
+++ b/mesh_bioplastics_CI_Report.pptx
@@ -4909,7 +4909,7 @@
                 <a:ea typeface="Arial" pitchFamily="34" charset="-122"/>
                 <a:cs typeface="Arial" pitchFamily="34" charset="-120"/>
               </a:rPr>
-              <a:t>Material Innovation vs. Process Equipment</a:t>
+              <a:t>Material Sustainability Integration</a:t>
             </a:r>
             <a:endParaRPr lang="en-US" sz="900" dirty="0"/>
           </a:p>
@@ -4987,7 +4987,7 @@
                 <a:ea typeface="Arial" pitchFamily="34" charset="-122"/>
                 <a:cs typeface="Arial" pitchFamily="34" charset="-120"/>
               </a:rPr>
-              <a:t>Sustainability Integration vs. Performance Specialization</a:t>
+              <a:t>Manufacturing Intelligence Autonomy</a:t>
             </a:r>
             <a:endParaRPr lang="en-US" sz="900" dirty="0"/>
           </a:p>
@@ -8270,7 +8270,7 @@
                 <a:ea typeface="Arial" pitchFamily="34" charset="-122"/>
                 <a:cs typeface="Arial" pitchFamily="34" charset="-120"/>
               </a:rPr>
-              <a:t>Emeryville, California, USA | https://www.rjg.com</a:t>
+              <a:t>Emeryville, California, United States | https://www.rjg.com</a:t>
             </a:r>
             <a:endParaRPr lang="en-US" sz="900" dirty="0"/>
           </a:p>
@@ -8888,7 +8888,7 @@
                 <a:ea typeface="Arial" pitchFamily="34" charset="-122"/>
                 <a:cs typeface="Arial" pitchFamily="34" charset="-120"/>
               </a:rPr>
-              <a:t>Direct contact, professional referrals</a:t>
+              <a:t>Direct client relationships, referrals from other attorneys</a:t>
             </a:r>
             <a:endParaRPr lang="en-US" sz="900" dirty="0"/>
           </a:p>
@@ -8991,7 +8991,7 @@
                 <a:ea typeface="Arial" pitchFamily="34" charset="-122"/>
                 <a:cs typeface="Arial" pitchFamily="34" charset="-120"/>
               </a:rPr>
-              <a:t>Trademark applications, copyright, entertainment law expertise</a:t>
+              <a:t>Trademark registration with 500+ applications and registrations</a:t>
             </a:r>
             <a:endParaRPr lang="en-US" sz="900" dirty="0"/>
           </a:p>
@@ -9094,7 +9094,7 @@
                 <a:ea typeface="Arial" pitchFamily="34" charset="-122"/>
                 <a:cs typeface="Arial" pitchFamily="34" charset="-120"/>
               </a:rPr>
-              <a:t>500+ trademark applications and registrations credited</a:t>
+              <a:t>10.0 Avvo Rating, AV Preeminent Martindale-Hubbell rating</a:t>
             </a:r>
             <a:endParaRPr lang="en-US" sz="900" dirty="0"/>
           </a:p>
@@ -9403,7 +9403,7 @@
                 <a:ea typeface="Arial" pitchFamily="34" charset="-122"/>
                 <a:cs typeface="Arial" pitchFamily="34" charset="-120"/>
               </a:rPr>
-              <a:t>Entertainment industry, musicians, producers, trademark holders</a:t>
+              <a:t>Entertainment industry producers, directors, actors, musicians</a:t>
             </a:r>
             <a:endParaRPr lang="en-US" sz="900" dirty="0"/>
           </a:p>
@@ -9506,7 +9506,7 @@
                 <a:ea typeface="Arial" pitchFamily="34" charset="-122"/>
                 <a:cs typeface="Arial" pitchFamily="34" charset="-120"/>
               </a:rPr>
-              <a:t>Intellectual property law and entertainment legal services</a:t>
+              <a:t>Expert trademark and entertainment law practice</a:t>
             </a:r>
             <a:endParaRPr lang="en-US" sz="900" dirty="0"/>
           </a:p>
@@ -9847,7 +9847,7 @@
                 <a:ea typeface="Arial" pitchFamily="34" charset="-122"/>
                 <a:cs typeface="Arial" pitchFamily="34" charset="-120"/>
               </a:rPr>
-              <a:t>Unknown | https://www.kistler.com</a:t>
+              <a:t>Sindelfingen, Germany | https://www.kistler.com</a:t>
             </a:r>
             <a:endParaRPr lang="en-US" sz="900" dirty="0"/>
           </a:p>
@@ -10465,7 +10465,7 @@
                 <a:ea typeface="Arial" pitchFamily="34" charset="-122"/>
                 <a:cs typeface="Arial" pitchFamily="34" charset="-120"/>
               </a:rPr>
-              <a:t>Product finder, technical documentation, B2B marketing</a:t>
+              <a:t>Product finder, glossary content marketing</a:t>
             </a:r>
             <a:endParaRPr lang="en-US" sz="900" dirty="0"/>
           </a:p>
@@ -10980,7 +10980,7 @@
                 <a:ea typeface="Arial" pitchFamily="34" charset="-122"/>
                 <a:cs typeface="Arial" pitchFamily="34" charset="-120"/>
               </a:rPr>
-              <a:t>Industrial measurement and vibration monitoring applications</a:t>
+              <a:t>Industrial measurement applications requiring force and acceleration sensors</a:t>
             </a:r>
             <a:endParaRPr lang="en-US" sz="900" dirty="0"/>
           </a:p>
@@ -11186,7 +11186,7 @@
                 <a:ea typeface="Arial" pitchFamily="34" charset="-122"/>
                 <a:cs typeface="Arial" pitchFamily="34" charset="-120"/>
               </a:rPr>
-              <a:t>eso GmbH merged with Kistler Instrumente GmbH in March 2021</a:t>
+              <a:t>Merged eso GmbH into Kistler Instrumente GmbH in March 2021</a:t>
             </a:r>
             <a:endParaRPr lang="en-US" sz="900" dirty="0"/>
           </a:p>
@@ -12042,7 +12042,7 @@
                 <a:ea typeface="Arial" pitchFamily="34" charset="-122"/>
                 <a:cs typeface="Arial" pitchFamily="34" charset="-120"/>
               </a:rPr>
-              <a:t>Product marketing, technical solutions, case studies</a:t>
+              <a:t>Content marketing, product education, consultative sales</a:t>
             </a:r>
             <a:endParaRPr lang="en-US" sz="900" dirty="0"/>
           </a:p>
@@ -12145,7 +12145,7 @@
                 <a:ea typeface="Arial" pitchFamily="34" charset="-122"/>
                 <a:cs typeface="Arial" pitchFamily="34" charset="-120"/>
               </a:rPr>
-              <a:t>Hot runner systems, flow control, IntelliGate technology</a:t>
+              <a:t>Hot runner systems with IntelliGate sensor technology, flow control</a:t>
             </a:r>
             <a:endParaRPr lang="en-US" sz="900" dirty="0"/>
           </a:p>
@@ -12248,7 +12248,7 @@
                 <a:ea typeface="Arial" pitchFamily="34" charset="-122"/>
                 <a:cs typeface="Arial" pitchFamily="34" charset="-120"/>
               </a:rPr>
-              <a:t>50+ years of customer relationships, consultative approach</a:t>
+              <a:t>Unknown</a:t>
             </a:r>
             <a:endParaRPr lang="en-US" sz="900" dirty="0"/>
           </a:p>
@@ -12557,7 +12557,7 @@
                 <a:ea typeface="Arial" pitchFamily="34" charset="-122"/>
                 <a:cs typeface="Arial" pitchFamily="34" charset="-120"/>
               </a:rPr>
-              <a:t>Injection molding manufacturers seeking efficiency improvements</a:t>
+              <a:t>Plastic injection molding manufacturers seeking efficiency gains</a:t>
             </a:r>
             <a:endParaRPr lang="en-US" sz="900" dirty="0"/>
           </a:p>
@@ -12660,7 +12660,7 @@
                 <a:ea typeface="Arial" pitchFamily="34" charset="-122"/>
                 <a:cs typeface="Arial" pitchFamily="34" charset="-120"/>
               </a:rPr>
-              <a:t>Advanced hot runner solutions for injection molding innovation</a:t>
+              <a:t>Mold a better tomorrow with advanced hot runner technology</a:t>
             </a:r>
             <a:endParaRPr lang="en-US" sz="900" dirty="0"/>
           </a:p>
@@ -12763,7 +12763,7 @@
                 <a:ea typeface="Arial" pitchFamily="34" charset="-122"/>
                 <a:cs typeface="Arial" pitchFamily="34" charset="-120"/>
               </a:rPr>
-              <a:t>Launched new IntelliGate Hot Runner with digital sensor technology</a:t>
+              <a:t>New IntelliGate Hot Runner with digital sensor technology launched</a:t>
             </a:r>
             <a:endParaRPr lang="en-US" sz="900" dirty="0"/>
           </a:p>
@@ -14480,7 +14480,7 @@
                           <a:ea typeface="Arial" pitchFamily="34" charset="-122"/>
                           <a:cs typeface="Arial" pitchFamily="34" charset="-120"/>
                         </a:rPr>
-                        <a:t>Direct contact</a:t>
+                        <a:t>Direct client relationships</a:t>
                       </a:r>
                       <a:endParaRPr lang="en-US" sz="800" dirty="0">
                         <a:latin typeface="Arial" charset="0"/>
@@ -14616,7 +14616,7 @@
                           <a:ea typeface="Arial" pitchFamily="34" charset="-122"/>
                           <a:cs typeface="Arial" pitchFamily="34" charset="-120"/>
                         </a:rPr>
-                        <a:t>Product marketing</a:t>
+                        <a:t>Content marketing</a:t>
                       </a:r>
                       <a:endParaRPr lang="en-US" sz="800" dirty="0">
                         <a:latin typeface="Arial" charset="0"/>
@@ -14822,7 +14822,7 @@
                           <a:ea typeface="Arial" pitchFamily="34" charset="-122"/>
                           <a:cs typeface="Arial" pitchFamily="34" charset="-120"/>
                         </a:rPr>
-                        <a:t>Trademark applications</a:t>
+                        <a:t>Trademark registration with 500+ applications and registrations</a:t>
                       </a:r>
                       <a:endParaRPr lang="en-US" sz="800" dirty="0">
                         <a:latin typeface="Arial" charset="0"/>
@@ -14958,7 +14958,7 @@
                           <a:ea typeface="Arial" pitchFamily="34" charset="-122"/>
                           <a:cs typeface="Arial" pitchFamily="34" charset="-120"/>
                         </a:rPr>
-                        <a:t>Hot runner systems</a:t>
+                        <a:t>Hot runner systems with IntelliGate sensor technology</a:t>
                       </a:r>
                       <a:endParaRPr lang="en-US" sz="800" dirty="0">
                         <a:latin typeface="Arial" charset="0"/>
@@ -15164,7 +15164,7 @@
                           <a:ea typeface="Arial" pitchFamily="34" charset="-122"/>
                           <a:cs typeface="Arial" pitchFamily="34" charset="-120"/>
                         </a:rPr>
-                        <a:t>500+ trademark applications and registrations credited</a:t>
+                        <a:t>10.0 Avvo Rating</a:t>
                       </a:r>
                       <a:endParaRPr lang="en-US" sz="800" dirty="0">
                         <a:latin typeface="Arial" charset="0"/>
@@ -15300,7 +15300,7 @@
                           <a:ea typeface="Arial" pitchFamily="34" charset="-122"/>
                           <a:cs typeface="Arial" pitchFamily="34" charset="-120"/>
                         </a:rPr>
-                        <a:t>50+ years of customer relationships</a:t>
+                        <a:t>Unknown</a:t>
                       </a:r>
                       <a:endParaRPr lang="en-US" sz="800" dirty="0">
                         <a:latin typeface="Arial" charset="0"/>
@@ -16190,7 +16190,7 @@
                           <a:ea typeface="Arial" pitchFamily="34" charset="-122"/>
                           <a:cs typeface="Arial" pitchFamily="34" charset="-120"/>
                         </a:rPr>
-                        <a:t>Entertainment industry</a:t>
+                        <a:t>Entertainment industry producers</a:t>
                       </a:r>
                       <a:endParaRPr lang="en-US" sz="800" dirty="0">
                         <a:latin typeface="Arial" charset="0"/>
@@ -16258,7 +16258,7 @@
                           <a:ea typeface="Arial" pitchFamily="34" charset="-122"/>
                           <a:cs typeface="Arial" pitchFamily="34" charset="-120"/>
                         </a:rPr>
-                        <a:t>Industrial measurement and vibration monitoring applications</a:t>
+                        <a:t>Industrial measurement applications requiring force and acceleration sensors</a:t>
                       </a:r>
                       <a:endParaRPr lang="en-US" sz="800" dirty="0">
                         <a:latin typeface="Arial" charset="0"/>
@@ -16326,7 +16326,7 @@
                           <a:ea typeface="Arial" pitchFamily="34" charset="-122"/>
                           <a:cs typeface="Arial" pitchFamily="34" charset="-120"/>
                         </a:rPr>
-                        <a:t>Injection molding manufacturers seeking efficiency improvements</a:t>
+                        <a:t>Plastic injection molding manufacturers seeking efficiency gains</a:t>
                       </a:r>
                       <a:endParaRPr lang="en-US" sz="800" dirty="0">
                         <a:latin typeface="Arial" charset="0"/>
@@ -16532,7 +16532,7 @@
                           <a:ea typeface="Arial" pitchFamily="34" charset="-122"/>
                           <a:cs typeface="Arial" pitchFamily="34" charset="-120"/>
                         </a:rPr>
-                        <a:t>Intellectual property law and entertainment legal services</a:t>
+                        <a:t>Expert trademark and entertainment law practice</a:t>
                       </a:r>
                       <a:endParaRPr lang="en-US" sz="800" dirty="0">
                         <a:latin typeface="Arial" charset="0"/>
@@ -16668,7 +16668,7 @@
                           <a:ea typeface="Arial" pitchFamily="34" charset="-122"/>
                           <a:cs typeface="Arial" pitchFamily="34" charset="-120"/>
                         </a:rPr>
-                        <a:t>Advanced hot runner solutions for injection molding innovation</a:t>
+                        <a:t>Mold a better tomorrow with advanced hot runner technology</a:t>
                       </a:r>
                       <a:endParaRPr lang="en-US" sz="800" dirty="0">
                         <a:latin typeface="Arial" charset="0"/>
@@ -16942,7 +16942,7 @@
                           <a:ea typeface="Arial" pitchFamily="34" charset="-122"/>
                           <a:cs typeface="Arial" pitchFamily="34" charset="-120"/>
                         </a:rPr>
-                        <a:t>eso GmbH merged with Kistler Instrumente GmbH in March 2021</a:t>
+                        <a:t>Merged eso GmbH into Kistler Instrumente GmbH in March 2021</a:t>
                       </a:r>
                       <a:endParaRPr lang="en-US" sz="800" dirty="0">
                         <a:latin typeface="Arial" charset="0"/>
@@ -17010,7 +17010,7 @@
                           <a:ea typeface="Arial" pitchFamily="34" charset="-122"/>
                           <a:cs typeface="Arial" pitchFamily="34" charset="-120"/>
                         </a:rPr>
-                        <a:t>Launched new IntelliGate Hot Runner with digital sensor technology</a:t>
+                        <a:t>New IntelliGate Hot Runner with digital sensor technology launched</a:t>
                       </a:r>
                       <a:endParaRPr lang="en-US" sz="800" dirty="0">
                         <a:latin typeface="Arial" charset="0"/>

--- a/mesh_bioplastics_CI_Report.pptx
+++ b/mesh_bioplastics_CI_Report.pptx
@@ -4987,7 +4987,7 @@
                 <a:ea typeface="Arial" pitchFamily="34" charset="-122"/>
                 <a:cs typeface="Arial" pitchFamily="34" charset="-120"/>
               </a:rPr>
-              <a:t>Manufacturing Intelligence Autonomy</a:t>
+              <a:t>Manufacturing Process Intelligence</a:t>
             </a:r>
             <a:endParaRPr lang="en-US" sz="900" dirty="0"/>
           </a:p>
@@ -8888,7 +8888,7 @@
                 <a:ea typeface="Arial" pitchFamily="34" charset="-122"/>
                 <a:cs typeface="Arial" pitchFamily="34" charset="-120"/>
               </a:rPr>
-              <a:t>Direct client relationships, referrals from other attorneys</a:t>
+              <a:t>Direct contact, professional referrals</a:t>
             </a:r>
             <a:endParaRPr lang="en-US" sz="900" dirty="0"/>
           </a:p>
@@ -8991,7 +8991,7 @@
                 <a:ea typeface="Arial" pitchFamily="34" charset="-122"/>
                 <a:cs typeface="Arial" pitchFamily="34" charset="-120"/>
               </a:rPr>
-              <a:t>Trademark registration with 500+ applications and registrations</a:t>
+              <a:t>Trademark applications, copyright, entertainment law expertise</a:t>
             </a:r>
             <a:endParaRPr lang="en-US" sz="900" dirty="0"/>
           </a:p>
@@ -9094,7 +9094,7 @@
                 <a:ea typeface="Arial" pitchFamily="34" charset="-122"/>
                 <a:cs typeface="Arial" pitchFamily="34" charset="-120"/>
               </a:rPr>
-              <a:t>10.0 Avvo Rating, AV Preeminent Martindale-Hubbell rating</a:t>
+              <a:t>500+ trademark applications and registrations completed</a:t>
             </a:r>
             <a:endParaRPr lang="en-US" sz="900" dirty="0"/>
           </a:p>
@@ -9403,7 +9403,7 @@
                 <a:ea typeface="Arial" pitchFamily="34" charset="-122"/>
                 <a:cs typeface="Arial" pitchFamily="34" charset="-120"/>
               </a:rPr>
-              <a:t>Entertainment industry producers, directors, actors, musicians</a:t>
+              <a:t>Entertainment producers, musicians, trademark portfolio holders</a:t>
             </a:r>
             <a:endParaRPr lang="en-US" sz="900" dirty="0"/>
           </a:p>
@@ -9506,7 +9506,7 @@
                 <a:ea typeface="Arial" pitchFamily="34" charset="-122"/>
                 <a:cs typeface="Arial" pitchFamily="34" charset="-120"/>
               </a:rPr>
-              <a:t>Expert trademark and entertainment law practice</a:t>
+              <a:t>Intellectual property and entertainment law counsel</a:t>
             </a:r>
             <a:endParaRPr lang="en-US" sz="900" dirty="0"/>
           </a:p>
@@ -10465,7 +10465,7 @@
                 <a:ea typeface="Arial" pitchFamily="34" charset="-122"/>
                 <a:cs typeface="Arial" pitchFamily="34" charset="-120"/>
               </a:rPr>
-              <a:t>Product finder, glossary content marketing</a:t>
+              <a:t>Product finder, direct product sales</a:t>
             </a:r>
             <a:endParaRPr lang="en-US" sz="900" dirty="0"/>
           </a:p>
@@ -10671,7 +10671,7 @@
                 <a:ea typeface="Arial" pitchFamily="34" charset="-122"/>
                 <a:cs typeface="Arial" pitchFamily="34" charset="-120"/>
               </a:rPr>
-              <a:t>Unknown</a:t>
+              <a:t>Acquired eso GmbH in 2017, merged March 2021</a:t>
             </a:r>
             <a:endParaRPr lang="en-US" sz="900" dirty="0"/>
           </a:p>
@@ -10980,7 +10980,7 @@
                 <a:ea typeface="Arial" pitchFamily="34" charset="-122"/>
                 <a:cs typeface="Arial" pitchFamily="34" charset="-120"/>
               </a:rPr>
-              <a:t>Industrial measurement applications requiring force and acceleration sensors</a:t>
+              <a:t>Industrial measurement technology users, automotive, manufacturing</a:t>
             </a:r>
             <a:endParaRPr lang="en-US" sz="900" dirty="0"/>
           </a:p>
@@ -11083,7 +11083,7 @@
                 <a:ea typeface="Arial" pitchFamily="34" charset="-122"/>
                 <a:cs typeface="Arial" pitchFamily="34" charset="-120"/>
               </a:rPr>
-              <a:t>Precision measurement technology for industrial applications</a:t>
+              <a:t>Precision measurement sensors for industrial applications</a:t>
             </a:r>
             <a:endParaRPr lang="en-US" sz="900" dirty="0"/>
           </a:p>
@@ -11186,7 +11186,7 @@
                 <a:ea typeface="Arial" pitchFamily="34" charset="-122"/>
                 <a:cs typeface="Arial" pitchFamily="34" charset="-120"/>
               </a:rPr>
-              <a:t>Merged eso GmbH into Kistler Instrumente GmbH in March 2021</a:t>
+              <a:t>Merged eso GmbH fully with Kistler Instrumente GmbH in March 2021</a:t>
             </a:r>
             <a:endParaRPr lang="en-US" sz="900" dirty="0"/>
           </a:p>
@@ -12042,7 +12042,7 @@
                 <a:ea typeface="Arial" pitchFamily="34" charset="-122"/>
                 <a:cs typeface="Arial" pitchFamily="34" charset="-120"/>
               </a:rPr>
-              <a:t>Content marketing, product education, consultative sales</a:t>
+              <a:t>Product education, hot runner solutions consultation</a:t>
             </a:r>
             <a:endParaRPr lang="en-US" sz="900" dirty="0"/>
           </a:p>
@@ -12145,7 +12145,7 @@
                 <a:ea typeface="Arial" pitchFamily="34" charset="-122"/>
                 <a:cs typeface="Arial" pitchFamily="34" charset="-120"/>
               </a:rPr>
-              <a:t>Hot runner systems with IntelliGate sensor technology, flow control</a:t>
+              <a:t>Hot runner systems, IntelliGate digital sensors, flow control</a:t>
             </a:r>
             <a:endParaRPr lang="en-US" sz="900" dirty="0"/>
           </a:p>
@@ -12248,7 +12248,7 @@
                 <a:ea typeface="Arial" pitchFamily="34" charset="-122"/>
                 <a:cs typeface="Arial" pitchFamily="34" charset="-120"/>
               </a:rPr>
-              <a:t>Unknown</a:t>
+              <a:t>50+ years developing hot runner technology, long-standing relationships</a:t>
             </a:r>
             <a:endParaRPr lang="en-US" sz="900" dirty="0"/>
           </a:p>
@@ -12557,7 +12557,7 @@
                 <a:ea typeface="Arial" pitchFamily="34" charset="-122"/>
                 <a:cs typeface="Arial" pitchFamily="34" charset="-120"/>
               </a:rPr>
-              <a:t>Plastic injection molding manufacturers seeking efficiency gains</a:t>
+              <a:t>Injection molding manufacturers, plastic part producers</a:t>
             </a:r>
             <a:endParaRPr lang="en-US" sz="900" dirty="0"/>
           </a:p>
@@ -12660,7 +12660,7 @@
                 <a:ea typeface="Arial" pitchFamily="34" charset="-122"/>
                 <a:cs typeface="Arial" pitchFamily="34" charset="-120"/>
               </a:rPr>
-              <a:t>Mold a better tomorrow with advanced hot runner technology</a:t>
+              <a:t>Hot runner solutions and flow control technology innovation</a:t>
             </a:r>
             <a:endParaRPr lang="en-US" sz="900" dirty="0"/>
           </a:p>
@@ -12763,7 +12763,7 @@
                 <a:ea typeface="Arial" pitchFamily="34" charset="-122"/>
                 <a:cs typeface="Arial" pitchFamily="34" charset="-120"/>
               </a:rPr>
-              <a:t>New IntelliGate Hot Runner with digital sensor technology launched</a:t>
+              <a:t>Launched NEW IntelliGate Hot Runner with digital sensor technology</a:t>
             </a:r>
             <a:endParaRPr lang="en-US" sz="900" dirty="0"/>
           </a:p>
@@ -14480,7 +14480,7 @@
                           <a:ea typeface="Arial" pitchFamily="34" charset="-122"/>
                           <a:cs typeface="Arial" pitchFamily="34" charset="-120"/>
                         </a:rPr>
-                        <a:t>Direct client relationships</a:t>
+                        <a:t>Direct contact</a:t>
                       </a:r>
                       <a:endParaRPr lang="en-US" sz="800" dirty="0">
                         <a:latin typeface="Arial" charset="0"/>
@@ -14616,7 +14616,7 @@
                           <a:ea typeface="Arial" pitchFamily="34" charset="-122"/>
                           <a:cs typeface="Arial" pitchFamily="34" charset="-120"/>
                         </a:rPr>
-                        <a:t>Content marketing</a:t>
+                        <a:t>Product education</a:t>
                       </a:r>
                       <a:endParaRPr lang="en-US" sz="800" dirty="0">
                         <a:latin typeface="Arial" charset="0"/>
@@ -14822,7 +14822,7 @@
                           <a:ea typeface="Arial" pitchFamily="34" charset="-122"/>
                           <a:cs typeface="Arial" pitchFamily="34" charset="-120"/>
                         </a:rPr>
-                        <a:t>Trademark registration with 500+ applications and registrations</a:t>
+                        <a:t>Trademark applications</a:t>
                       </a:r>
                       <a:endParaRPr lang="en-US" sz="800" dirty="0">
                         <a:latin typeface="Arial" charset="0"/>
@@ -14958,7 +14958,7 @@
                           <a:ea typeface="Arial" pitchFamily="34" charset="-122"/>
                           <a:cs typeface="Arial" pitchFamily="34" charset="-120"/>
                         </a:rPr>
-                        <a:t>Hot runner systems with IntelliGate sensor technology</a:t>
+                        <a:t>Hot runner systems</a:t>
                       </a:r>
                       <a:endParaRPr lang="en-US" sz="800" dirty="0">
                         <a:latin typeface="Arial" charset="0"/>
@@ -15164,7 +15164,7 @@
                           <a:ea typeface="Arial" pitchFamily="34" charset="-122"/>
                           <a:cs typeface="Arial" pitchFamily="34" charset="-120"/>
                         </a:rPr>
-                        <a:t>10.0 Avvo Rating</a:t>
+                        <a:t>500+ trademark applications and registrations completed</a:t>
                       </a:r>
                       <a:endParaRPr lang="en-US" sz="800" dirty="0">
                         <a:latin typeface="Arial" charset="0"/>
@@ -15232,7 +15232,7 @@
                           <a:ea typeface="Arial" pitchFamily="34" charset="-122"/>
                           <a:cs typeface="Arial" pitchFamily="34" charset="-120"/>
                         </a:rPr>
-                        <a:t>Unknown</a:t>
+                        <a:t>Acquired eso GmbH in 2017</a:t>
                       </a:r>
                       <a:endParaRPr lang="en-US" sz="800" dirty="0">
                         <a:latin typeface="Arial" charset="0"/>
@@ -15300,7 +15300,7 @@
                           <a:ea typeface="Arial" pitchFamily="34" charset="-122"/>
                           <a:cs typeface="Arial" pitchFamily="34" charset="-120"/>
                         </a:rPr>
-                        <a:t>Unknown</a:t>
+                        <a:t>50+ years developing hot runner technology</a:t>
                       </a:r>
                       <a:endParaRPr lang="en-US" sz="800" dirty="0">
                         <a:latin typeface="Arial" charset="0"/>
@@ -16190,7 +16190,7 @@
                           <a:ea typeface="Arial" pitchFamily="34" charset="-122"/>
                           <a:cs typeface="Arial" pitchFamily="34" charset="-120"/>
                         </a:rPr>
-                        <a:t>Entertainment industry producers</a:t>
+                        <a:t>Entertainment producers</a:t>
                       </a:r>
                       <a:endParaRPr lang="en-US" sz="800" dirty="0">
                         <a:latin typeface="Arial" charset="0"/>
@@ -16258,7 +16258,7 @@
                           <a:ea typeface="Arial" pitchFamily="34" charset="-122"/>
                           <a:cs typeface="Arial" pitchFamily="34" charset="-120"/>
                         </a:rPr>
-                        <a:t>Industrial measurement applications requiring force and acceleration sensors</a:t>
+                        <a:t>Industrial measurement technology users</a:t>
                       </a:r>
                       <a:endParaRPr lang="en-US" sz="800" dirty="0">
                         <a:latin typeface="Arial" charset="0"/>
@@ -16326,7 +16326,7 @@
                           <a:ea typeface="Arial" pitchFamily="34" charset="-122"/>
                           <a:cs typeface="Arial" pitchFamily="34" charset="-120"/>
                         </a:rPr>
-                        <a:t>Plastic injection molding manufacturers seeking efficiency gains</a:t>
+                        <a:t>Injection molding manufacturers</a:t>
                       </a:r>
                       <a:endParaRPr lang="en-US" sz="800" dirty="0">
                         <a:latin typeface="Arial" charset="0"/>
@@ -16532,7 +16532,7 @@
                           <a:ea typeface="Arial" pitchFamily="34" charset="-122"/>
                           <a:cs typeface="Arial" pitchFamily="34" charset="-120"/>
                         </a:rPr>
-                        <a:t>Expert trademark and entertainment law practice</a:t>
+                        <a:t>Intellectual property and entertainment law counsel</a:t>
                       </a:r>
                       <a:endParaRPr lang="en-US" sz="800" dirty="0">
                         <a:latin typeface="Arial" charset="0"/>
@@ -16600,7 +16600,7 @@
                           <a:ea typeface="Arial" pitchFamily="34" charset="-122"/>
                           <a:cs typeface="Arial" pitchFamily="34" charset="-120"/>
                         </a:rPr>
-                        <a:t>Precision measurement technology for industrial applications</a:t>
+                        <a:t>Precision measurement sensors for industrial applications</a:t>
                       </a:r>
                       <a:endParaRPr lang="en-US" sz="800" dirty="0">
                         <a:latin typeface="Arial" charset="0"/>
@@ -16668,7 +16668,7 @@
                           <a:ea typeface="Arial" pitchFamily="34" charset="-122"/>
                           <a:cs typeface="Arial" pitchFamily="34" charset="-120"/>
                         </a:rPr>
-                        <a:t>Mold a better tomorrow with advanced hot runner technology</a:t>
+                        <a:t>Hot runner solutions and flow control technology innovation</a:t>
                       </a:r>
                       <a:endParaRPr lang="en-US" sz="800" dirty="0">
                         <a:latin typeface="Arial" charset="0"/>
@@ -16942,7 +16942,7 @@
                           <a:ea typeface="Arial" pitchFamily="34" charset="-122"/>
                           <a:cs typeface="Arial" pitchFamily="34" charset="-120"/>
                         </a:rPr>
-                        <a:t>Merged eso GmbH into Kistler Instrumente GmbH in March 2021</a:t>
+                        <a:t>Merged eso GmbH fully with Kistler Instrumente GmbH in March 2021</a:t>
                       </a:r>
                       <a:endParaRPr lang="en-US" sz="800" dirty="0">
                         <a:latin typeface="Arial" charset="0"/>
@@ -17010,7 +17010,7 @@
                           <a:ea typeface="Arial" pitchFamily="34" charset="-122"/>
                           <a:cs typeface="Arial" pitchFamily="34" charset="-120"/>
                         </a:rPr>
-                        <a:t>New IntelliGate Hot Runner with digital sensor technology launched</a:t>
+                        <a:t>Launched NEW IntelliGate Hot Runner with digital sensor technology</a:t>
                       </a:r>
                       <a:endParaRPr lang="en-US" sz="800" dirty="0">
                         <a:latin typeface="Arial" charset="0"/>

--- a/mesh_bioplastics_CI_Report.pptx
+++ b/mesh_bioplastics_CI_Report.pptx
@@ -4909,7 +4909,7 @@
                 <a:ea typeface="Arial" pitchFamily="34" charset="-122"/>
                 <a:cs typeface="Arial" pitchFamily="34" charset="-120"/>
               </a:rPr>
-              <a:t>Material Sustainability Integration</a:t>
+              <a:t>Material Innovation vs. Process Control</a:t>
             </a:r>
             <a:endParaRPr lang="en-US" sz="900" dirty="0"/>
           </a:p>
@@ -4987,7 +4987,7 @@
                 <a:ea typeface="Arial" pitchFamily="34" charset="-122"/>
                 <a:cs typeface="Arial" pitchFamily="34" charset="-120"/>
               </a:rPr>
-              <a:t>Manufacturing Process Intelligence</a:t>
+              <a:t>End-to-End Integration vs. Point Solutions</a:t>
             </a:r>
             <a:endParaRPr lang="en-US" sz="900" dirty="0"/>
           </a:p>
@@ -8270,7 +8270,7 @@
                 <a:ea typeface="Arial" pitchFamily="34" charset="-122"/>
                 <a:cs typeface="Arial" pitchFamily="34" charset="-120"/>
               </a:rPr>
-              <a:t>Emeryville, California, United States | https://www.rjg.com</a:t>
+              <a:t>Emeryville, California, USA | https://www.rjg.com</a:t>
             </a:r>
             <a:endParaRPr lang="en-US" sz="900" dirty="0"/>
           </a:p>
@@ -8888,7 +8888,7 @@
                 <a:ea typeface="Arial" pitchFamily="34" charset="-122"/>
                 <a:cs typeface="Arial" pitchFamily="34" charset="-120"/>
               </a:rPr>
-              <a:t>Direct contact, professional referrals</a:t>
+              <a:t>Direct contact, referrals from other attorneys</a:t>
             </a:r>
             <a:endParaRPr lang="en-US" sz="900" dirty="0"/>
           </a:p>
@@ -8991,7 +8991,7 @@
                 <a:ea typeface="Arial" pitchFamily="34" charset="-122"/>
                 <a:cs typeface="Arial" pitchFamily="34" charset="-120"/>
               </a:rPr>
-              <a:t>Trademark applications, copyright, entertainment law expertise</a:t>
+              <a:t>Trademark applications and registrations with 500+ portfolio management</a:t>
             </a:r>
             <a:endParaRPr lang="en-US" sz="900" dirty="0"/>
           </a:p>
@@ -9094,7 +9094,7 @@
                 <a:ea typeface="Arial" pitchFamily="34" charset="-122"/>
                 <a:cs typeface="Arial" pitchFamily="34" charset="-120"/>
               </a:rPr>
-              <a:t>500+ trademark applications and registrations completed</a:t>
+              <a:t>Avvo 10.0 rating, Martindale-Hubbell AV Preeminent rating</a:t>
             </a:r>
             <a:endParaRPr lang="en-US" sz="900" dirty="0"/>
           </a:p>
@@ -9403,7 +9403,7 @@
                 <a:ea typeface="Arial" pitchFamily="34" charset="-122"/>
                 <a:cs typeface="Arial" pitchFamily="34" charset="-120"/>
               </a:rPr>
-              <a:t>Entertainment producers, musicians, trademark portfolio holders</a:t>
+              <a:t>Entertainment industry producers, directors, actors, musicians</a:t>
             </a:r>
             <a:endParaRPr lang="en-US" sz="900" dirty="0"/>
           </a:p>
@@ -9506,7 +9506,7 @@
                 <a:ea typeface="Arial" pitchFamily="34" charset="-122"/>
                 <a:cs typeface="Arial" pitchFamily="34" charset="-120"/>
               </a:rPr>
-              <a:t>Intellectual property and entertainment law counsel</a:t>
+              <a:t>Intellectual property law and entertainment legal counsel</a:t>
             </a:r>
             <a:endParaRPr lang="en-US" sz="900" dirty="0"/>
           </a:p>
@@ -10465,7 +10465,7 @@
                 <a:ea typeface="Arial" pitchFamily="34" charset="-122"/>
                 <a:cs typeface="Arial" pitchFamily="34" charset="-120"/>
               </a:rPr>
-              <a:t>Product finder, direct product sales</a:t>
+              <a:t>Product finder, industry partnerships</a:t>
             </a:r>
             <a:endParaRPr lang="en-US" sz="900" dirty="0"/>
           </a:p>
@@ -10568,7 +10568,7 @@
                 <a:ea typeface="Arial" pitchFamily="34" charset="-122"/>
                 <a:cs typeface="Arial" pitchFamily="34" charset="-120"/>
               </a:rPr>
-              <a:t>IEPE piezoelectric sensors, force sensors, accelerometers</a:t>
+              <a:t>IEPE piezoelectric sensors, force sensors, accelerometers, speed measurement</a:t>
             </a:r>
             <a:endParaRPr lang="en-US" sz="900" dirty="0"/>
           </a:p>
@@ -10671,7 +10671,7 @@
                 <a:ea typeface="Arial" pitchFamily="34" charset="-122"/>
                 <a:cs typeface="Arial" pitchFamily="34" charset="-120"/>
               </a:rPr>
-              <a:t>Acquired eso GmbH in 2017, merged March 2021</a:t>
+              <a:t>Unknown</a:t>
             </a:r>
             <a:endParaRPr lang="en-US" sz="900" dirty="0"/>
           </a:p>
@@ -10980,7 +10980,7 @@
                 <a:ea typeface="Arial" pitchFamily="34" charset="-122"/>
                 <a:cs typeface="Arial" pitchFamily="34" charset="-120"/>
               </a:rPr>
-              <a:t>Industrial measurement technology users, automotive, manufacturing</a:t>
+              <a:t>Industrial measurement and vibration monitoring applications</a:t>
             </a:r>
             <a:endParaRPr lang="en-US" sz="900" dirty="0"/>
           </a:p>
@@ -11083,7 +11083,7 @@
                 <a:ea typeface="Arial" pitchFamily="34" charset="-122"/>
                 <a:cs typeface="Arial" pitchFamily="34" charset="-120"/>
               </a:rPr>
-              <a:t>Precision measurement sensors for industrial applications</a:t>
+              <a:t>Precision measurement technology for force, pressure, acceleration</a:t>
             </a:r>
             <a:endParaRPr lang="en-US" sz="900" dirty="0"/>
           </a:p>
@@ -11186,7 +11186,7 @@
                 <a:ea typeface="Arial" pitchFamily="34" charset="-122"/>
                 <a:cs typeface="Arial" pitchFamily="34" charset="-120"/>
               </a:rPr>
-              <a:t>Merged eso GmbH fully with Kistler Instrumente GmbH in March 2021</a:t>
+              <a:t>eso GmbH fully merged with Kistler Instrumente GmbH in March 2021</a:t>
             </a:r>
             <a:endParaRPr lang="en-US" sz="900" dirty="0"/>
           </a:p>
@@ -12042,7 +12042,7 @@
                 <a:ea typeface="Arial" pitchFamily="34" charset="-122"/>
                 <a:cs typeface="Arial" pitchFamily="34" charset="-120"/>
               </a:rPr>
-              <a:t>Product education, hot runner solutions consultation</a:t>
+              <a:t>Direct consultative approach, product demonstrations</a:t>
             </a:r>
             <a:endParaRPr lang="en-US" sz="900" dirty="0"/>
           </a:p>
@@ -12145,7 +12145,7 @@
                 <a:ea typeface="Arial" pitchFamily="34" charset="-122"/>
                 <a:cs typeface="Arial" pitchFamily="34" charset="-120"/>
               </a:rPr>
-              <a:t>Hot runner systems, IntelliGate digital sensors, flow control</a:t>
+              <a:t>Hot runner systems, IntelliGate sensor technology, flow control</a:t>
             </a:r>
             <a:endParaRPr lang="en-US" sz="900" dirty="0"/>
           </a:p>
@@ -12248,7 +12248,7 @@
                 <a:ea typeface="Arial" pitchFamily="34" charset="-122"/>
                 <a:cs typeface="Arial" pitchFamily="34" charset="-120"/>
               </a:rPr>
-              <a:t>50+ years developing hot runner technology, long-standing relationships</a:t>
+              <a:t>Unknown</a:t>
             </a:r>
             <a:endParaRPr lang="en-US" sz="900" dirty="0"/>
           </a:p>
@@ -12557,7 +12557,7 @@
                 <a:ea typeface="Arial" pitchFamily="34" charset="-122"/>
                 <a:cs typeface="Arial" pitchFamily="34" charset="-120"/>
               </a:rPr>
-              <a:t>Injection molding manufacturers, plastic part producers</a:t>
+              <a:t>Plastics injection molding manufacturers seeking efficiency</a:t>
             </a:r>
             <a:endParaRPr lang="en-US" sz="900" dirty="0"/>
           </a:p>
@@ -12660,7 +12660,7 @@
                 <a:ea typeface="Arial" pitchFamily="34" charset="-122"/>
                 <a:cs typeface="Arial" pitchFamily="34" charset="-120"/>
               </a:rPr>
-              <a:t>Hot runner solutions and flow control technology innovation</a:t>
+              <a:t>Mold a better tomorrow with hot runner innovation</a:t>
             </a:r>
             <a:endParaRPr lang="en-US" sz="900" dirty="0"/>
           </a:p>
@@ -12763,7 +12763,7 @@
                 <a:ea typeface="Arial" pitchFamily="34" charset="-122"/>
                 <a:cs typeface="Arial" pitchFamily="34" charset="-120"/>
               </a:rPr>
-              <a:t>Launched NEW IntelliGate Hot Runner with digital sensor technology</a:t>
+              <a:t>New IntelliGate Hot Runner with digital sensor technology launched</a:t>
             </a:r>
             <a:endParaRPr lang="en-US" sz="900" dirty="0"/>
           </a:p>
@@ -14616,7 +14616,7 @@
                           <a:ea typeface="Arial" pitchFamily="34" charset="-122"/>
                           <a:cs typeface="Arial" pitchFamily="34" charset="-120"/>
                         </a:rPr>
-                        <a:t>Product education</a:t>
+                        <a:t>Direct consultative approach</a:t>
                       </a:r>
                       <a:endParaRPr lang="en-US" sz="800" dirty="0">
                         <a:latin typeface="Arial" charset="0"/>
@@ -14822,7 +14822,7 @@
                           <a:ea typeface="Arial" pitchFamily="34" charset="-122"/>
                           <a:cs typeface="Arial" pitchFamily="34" charset="-120"/>
                         </a:rPr>
-                        <a:t>Trademark applications</a:t>
+                        <a:t>Trademark applications and registrations with 500+ portfolio management</a:t>
                       </a:r>
                       <a:endParaRPr lang="en-US" sz="800" dirty="0">
                         <a:latin typeface="Arial" charset="0"/>
@@ -15164,7 +15164,7 @@
                           <a:ea typeface="Arial" pitchFamily="34" charset="-122"/>
                           <a:cs typeface="Arial" pitchFamily="34" charset="-120"/>
                         </a:rPr>
-                        <a:t>500+ trademark applications and registrations completed</a:t>
+                        <a:t>Avvo 10.0 rating</a:t>
                       </a:r>
                       <a:endParaRPr lang="en-US" sz="800" dirty="0">
                         <a:latin typeface="Arial" charset="0"/>
@@ -15232,7 +15232,7 @@
                           <a:ea typeface="Arial" pitchFamily="34" charset="-122"/>
                           <a:cs typeface="Arial" pitchFamily="34" charset="-120"/>
                         </a:rPr>
-                        <a:t>Acquired eso GmbH in 2017</a:t>
+                        <a:t>Unknown</a:t>
                       </a:r>
                       <a:endParaRPr lang="en-US" sz="800" dirty="0">
                         <a:latin typeface="Arial" charset="0"/>
@@ -15300,7 +15300,7 @@
                           <a:ea typeface="Arial" pitchFamily="34" charset="-122"/>
                           <a:cs typeface="Arial" pitchFamily="34" charset="-120"/>
                         </a:rPr>
-                        <a:t>50+ years developing hot runner technology</a:t>
+                        <a:t>Unknown</a:t>
                       </a:r>
                       <a:endParaRPr lang="en-US" sz="800" dirty="0">
                         <a:latin typeface="Arial" charset="0"/>
@@ -16190,7 +16190,7 @@
                           <a:ea typeface="Arial" pitchFamily="34" charset="-122"/>
                           <a:cs typeface="Arial" pitchFamily="34" charset="-120"/>
                         </a:rPr>
-                        <a:t>Entertainment producers</a:t>
+                        <a:t>Entertainment industry producers</a:t>
                       </a:r>
                       <a:endParaRPr lang="en-US" sz="800" dirty="0">
                         <a:latin typeface="Arial" charset="0"/>
@@ -16258,7 +16258,7 @@
                           <a:ea typeface="Arial" pitchFamily="34" charset="-122"/>
                           <a:cs typeface="Arial" pitchFamily="34" charset="-120"/>
                         </a:rPr>
-                        <a:t>Industrial measurement technology users</a:t>
+                        <a:t>Industrial measurement and vibration monitoring applications</a:t>
                       </a:r>
                       <a:endParaRPr lang="en-US" sz="800" dirty="0">
                         <a:latin typeface="Arial" charset="0"/>
@@ -16326,7 +16326,7 @@
                           <a:ea typeface="Arial" pitchFamily="34" charset="-122"/>
                           <a:cs typeface="Arial" pitchFamily="34" charset="-120"/>
                         </a:rPr>
-                        <a:t>Injection molding manufacturers</a:t>
+                        <a:t>Plastics injection molding manufacturers seeking efficiency</a:t>
                       </a:r>
                       <a:endParaRPr lang="en-US" sz="800" dirty="0">
                         <a:latin typeface="Arial" charset="0"/>
@@ -16532,7 +16532,7 @@
                           <a:ea typeface="Arial" pitchFamily="34" charset="-122"/>
                           <a:cs typeface="Arial" pitchFamily="34" charset="-120"/>
                         </a:rPr>
-                        <a:t>Intellectual property and entertainment law counsel</a:t>
+                        <a:t>Intellectual property law and entertainment legal counsel</a:t>
                       </a:r>
                       <a:endParaRPr lang="en-US" sz="800" dirty="0">
                         <a:latin typeface="Arial" charset="0"/>
@@ -16600,7 +16600,7 @@
                           <a:ea typeface="Arial" pitchFamily="34" charset="-122"/>
                           <a:cs typeface="Arial" pitchFamily="34" charset="-120"/>
                         </a:rPr>
-                        <a:t>Precision measurement sensors for industrial applications</a:t>
+                        <a:t>Precision measurement technology for force</a:t>
                       </a:r>
                       <a:endParaRPr lang="en-US" sz="800" dirty="0">
                         <a:latin typeface="Arial" charset="0"/>
@@ -16668,7 +16668,7 @@
                           <a:ea typeface="Arial" pitchFamily="34" charset="-122"/>
                           <a:cs typeface="Arial" pitchFamily="34" charset="-120"/>
                         </a:rPr>
-                        <a:t>Hot runner solutions and flow control technology innovation</a:t>
+                        <a:t>Mold a better tomorrow with hot runner innovation</a:t>
                       </a:r>
                       <a:endParaRPr lang="en-US" sz="800" dirty="0">
                         <a:latin typeface="Arial" charset="0"/>
@@ -16942,7 +16942,7 @@
                           <a:ea typeface="Arial" pitchFamily="34" charset="-122"/>
                           <a:cs typeface="Arial" pitchFamily="34" charset="-120"/>
                         </a:rPr>
-                        <a:t>Merged eso GmbH fully with Kistler Instrumente GmbH in March 2021</a:t>
+                        <a:t>eso GmbH fully merged with Kistler Instrumente GmbH in March 2021</a:t>
                       </a:r>
                       <a:endParaRPr lang="en-US" sz="800" dirty="0">
                         <a:latin typeface="Arial" charset="0"/>
@@ -17010,7 +17010,7 @@
                           <a:ea typeface="Arial" pitchFamily="34" charset="-122"/>
                           <a:cs typeface="Arial" pitchFamily="34" charset="-120"/>
                         </a:rPr>
-                        <a:t>Launched NEW IntelliGate Hot Runner with digital sensor technology</a:t>
+                        <a:t>New IntelliGate Hot Runner with digital sensor technology launched</a:t>
                       </a:r>
                       <a:endParaRPr lang="en-US" sz="800" dirty="0">
                         <a:latin typeface="Arial" charset="0"/>

--- a/mesh_bioplastics_CI_Report.pptx
+++ b/mesh_bioplastics_CI_Report.pptx
@@ -4909,7 +4909,7 @@
                 <a:ea typeface="Arial" pitchFamily="34" charset="-122"/>
                 <a:cs typeface="Arial" pitchFamily="34" charset="-120"/>
               </a:rPr>
-              <a:t>Material Innovation vs. Process Control</a:t>
+              <a:t>Material Sustainability Integration</a:t>
             </a:r>
             <a:endParaRPr lang="en-US" sz="900" dirty="0"/>
           </a:p>
@@ -4987,7 +4987,7 @@
                 <a:ea typeface="Arial" pitchFamily="34" charset="-122"/>
                 <a:cs typeface="Arial" pitchFamily="34" charset="-120"/>
               </a:rPr>
-              <a:t>End-to-End Integration vs. Point Solutions</a:t>
+              <a:t>Process Intelligence Automation</a:t>
             </a:r>
             <a:endParaRPr lang="en-US" sz="900" dirty="0"/>
           </a:p>
@@ -8270,7 +8270,7 @@
                 <a:ea typeface="Arial" pitchFamily="34" charset="-122"/>
                 <a:cs typeface="Arial" pitchFamily="34" charset="-120"/>
               </a:rPr>
-              <a:t>Emeryville, California, USA | https://www.rjg.com</a:t>
+              <a:t>Emeryville, California, United States | https://www.rjg.com</a:t>
             </a:r>
             <a:endParaRPr lang="en-US" sz="900" dirty="0"/>
           </a:p>
@@ -8991,7 +8991,7 @@
                 <a:ea typeface="Arial" pitchFamily="34" charset="-122"/>
                 <a:cs typeface="Arial" pitchFamily="34" charset="-120"/>
               </a:rPr>
-              <a:t>Trademark applications and registrations with 500+ portfolio management</a:t>
+              <a:t>Trademark applications, copyright, entertainment law expertise</a:t>
             </a:r>
             <a:endParaRPr lang="en-US" sz="900" dirty="0"/>
           </a:p>
@@ -9094,7 +9094,7 @@
                 <a:ea typeface="Arial" pitchFamily="34" charset="-122"/>
                 <a:cs typeface="Arial" pitchFamily="34" charset="-120"/>
               </a:rPr>
-              <a:t>Avvo 10.0 rating, Martindale-Hubbell AV Preeminent rating</a:t>
+              <a:t>500+ trademark applications and registrations credited</a:t>
             </a:r>
             <a:endParaRPr lang="en-US" sz="900" dirty="0"/>
           </a:p>
@@ -9403,7 +9403,7 @@
                 <a:ea typeface="Arial" pitchFamily="34" charset="-122"/>
                 <a:cs typeface="Arial" pitchFamily="34" charset="-120"/>
               </a:rPr>
-              <a:t>Entertainment industry producers, directors, actors, musicians</a:t>
+              <a:t>Entertainment producers, directors, actors, musicians, trademark clients</a:t>
             </a:r>
             <a:endParaRPr lang="en-US" sz="900" dirty="0"/>
           </a:p>
@@ -9506,7 +9506,7 @@
                 <a:ea typeface="Arial" pitchFamily="34" charset="-122"/>
                 <a:cs typeface="Arial" pitchFamily="34" charset="-120"/>
               </a:rPr>
-              <a:t>Intellectual property law and entertainment legal counsel</a:t>
+              <a:t>Intellectual property and entertainment law counsel</a:t>
             </a:r>
             <a:endParaRPr lang="en-US" sz="900" dirty="0"/>
           </a:p>
@@ -9847,7 +9847,7 @@
                 <a:ea typeface="Arial" pitchFamily="34" charset="-122"/>
                 <a:cs typeface="Arial" pitchFamily="34" charset="-120"/>
               </a:rPr>
-              <a:t>Sindelfingen, Germany | https://www.kistler.com</a:t>
+              <a:t>Unknown | https://www.kistler.com</a:t>
             </a:r>
             <a:endParaRPr lang="en-US" sz="900" dirty="0"/>
           </a:p>
@@ -10465,7 +10465,7 @@
                 <a:ea typeface="Arial" pitchFamily="34" charset="-122"/>
                 <a:cs typeface="Arial" pitchFamily="34" charset="-120"/>
               </a:rPr>
-              <a:t>Product finder, industry partnerships</a:t>
+              <a:t>Product finder, website content marketing</a:t>
             </a:r>
             <a:endParaRPr lang="en-US" sz="900" dirty="0"/>
           </a:p>
@@ -10980,7 +10980,7 @@
                 <a:ea typeface="Arial" pitchFamily="34" charset="-122"/>
                 <a:cs typeface="Arial" pitchFamily="34" charset="-120"/>
               </a:rPr>
-              <a:t>Industrial measurement and vibration monitoring applications</a:t>
+              <a:t>Industrial manufacturers needing force, pressure, acceleration measurement</a:t>
             </a:r>
             <a:endParaRPr lang="en-US" sz="900" dirty="0"/>
           </a:p>
@@ -11083,7 +11083,7 @@
                 <a:ea typeface="Arial" pitchFamily="34" charset="-122"/>
                 <a:cs typeface="Arial" pitchFamily="34" charset="-120"/>
               </a:rPr>
-              <a:t>Precision measurement technology for force, pressure, acceleration</a:t>
+              <a:t>Advanced measurement technology and sensor solutions</a:t>
             </a:r>
             <a:endParaRPr lang="en-US" sz="900" dirty="0"/>
           </a:p>
@@ -11186,7 +11186,7 @@
                 <a:ea typeface="Arial" pitchFamily="34" charset="-122"/>
                 <a:cs typeface="Arial" pitchFamily="34" charset="-120"/>
               </a:rPr>
-              <a:t>eso GmbH fully merged with Kistler Instrumente GmbH in March 2021</a:t>
+              <a:t>eso GmbH acquired 2017, merged with Kistler Instrumente GmbH March 2021</a:t>
             </a:r>
             <a:endParaRPr lang="en-US" sz="900" dirty="0"/>
           </a:p>
@@ -12042,7 +12042,7 @@
                 <a:ea typeface="Arial" pitchFamily="34" charset="-122"/>
                 <a:cs typeface="Arial" pitchFamily="34" charset="-120"/>
               </a:rPr>
-              <a:t>Direct consultative approach, product demonstrations</a:t>
+              <a:t>Website content, product education pages, case studies</a:t>
             </a:r>
             <a:endParaRPr lang="en-US" sz="900" dirty="0"/>
           </a:p>
@@ -12145,7 +12145,7 @@
                 <a:ea typeface="Arial" pitchFamily="34" charset="-122"/>
                 <a:cs typeface="Arial" pitchFamily="34" charset="-120"/>
               </a:rPr>
-              <a:t>Hot runner systems, IntelliGate sensor technology, flow control</a:t>
+              <a:t>Hot runner systems, intelligent flow control, IntelliGate sensor technology</a:t>
             </a:r>
             <a:endParaRPr lang="en-US" sz="900" dirty="0"/>
           </a:p>
@@ -12557,7 +12557,7 @@
                 <a:ea typeface="Arial" pitchFamily="34" charset="-122"/>
                 <a:cs typeface="Arial" pitchFamily="34" charset="-120"/>
               </a:rPr>
-              <a:t>Plastics injection molding manufacturers seeking efficiency</a:t>
+              <a:t>Injection molding manufacturers seeking efficiency and quality improvement</a:t>
             </a:r>
             <a:endParaRPr lang="en-US" sz="900" dirty="0"/>
           </a:p>
@@ -12660,7 +12660,7 @@
                 <a:ea typeface="Arial" pitchFamily="34" charset="-122"/>
                 <a:cs typeface="Arial" pitchFamily="34" charset="-120"/>
               </a:rPr>
-              <a:t>Mold a better tomorrow with hot runner innovation</a:t>
+              <a:t>Hot runner solutions and flow control for injection molding</a:t>
             </a:r>
             <a:endParaRPr lang="en-US" sz="900" dirty="0"/>
           </a:p>
@@ -12763,7 +12763,7 @@
                 <a:ea typeface="Arial" pitchFamily="34" charset="-122"/>
                 <a:cs typeface="Arial" pitchFamily="34" charset="-120"/>
               </a:rPr>
-              <a:t>New IntelliGate Hot Runner with digital sensor technology launched</a:t>
+              <a:t>New IntelliGate Hot Runner product launch with digital sensor technology</a:t>
             </a:r>
             <a:endParaRPr lang="en-US" sz="900" dirty="0"/>
           </a:p>
@@ -14616,7 +14616,7 @@
                           <a:ea typeface="Arial" pitchFamily="34" charset="-122"/>
                           <a:cs typeface="Arial" pitchFamily="34" charset="-120"/>
                         </a:rPr>
-                        <a:t>Direct consultative approach</a:t>
+                        <a:t>Website content</a:t>
                       </a:r>
                       <a:endParaRPr lang="en-US" sz="800" dirty="0">
                         <a:latin typeface="Arial" charset="0"/>
@@ -14822,7 +14822,7 @@
                           <a:ea typeface="Arial" pitchFamily="34" charset="-122"/>
                           <a:cs typeface="Arial" pitchFamily="34" charset="-120"/>
                         </a:rPr>
-                        <a:t>Trademark applications and registrations with 500+ portfolio management</a:t>
+                        <a:t>Trademark applications</a:t>
                       </a:r>
                       <a:endParaRPr lang="en-US" sz="800" dirty="0">
                         <a:latin typeface="Arial" charset="0"/>
@@ -15164,7 +15164,7 @@
                           <a:ea typeface="Arial" pitchFamily="34" charset="-122"/>
                           <a:cs typeface="Arial" pitchFamily="34" charset="-120"/>
                         </a:rPr>
-                        <a:t>Avvo 10.0 rating</a:t>
+                        <a:t>500+ trademark applications and registrations credited</a:t>
                       </a:r>
                       <a:endParaRPr lang="en-US" sz="800" dirty="0">
                         <a:latin typeface="Arial" charset="0"/>
@@ -16190,7 +16190,7 @@
                           <a:ea typeface="Arial" pitchFamily="34" charset="-122"/>
                           <a:cs typeface="Arial" pitchFamily="34" charset="-120"/>
                         </a:rPr>
-                        <a:t>Entertainment industry producers</a:t>
+                        <a:t>Entertainment producers</a:t>
                       </a:r>
                       <a:endParaRPr lang="en-US" sz="800" dirty="0">
                         <a:latin typeface="Arial" charset="0"/>
@@ -16258,7 +16258,7 @@
                           <a:ea typeface="Arial" pitchFamily="34" charset="-122"/>
                           <a:cs typeface="Arial" pitchFamily="34" charset="-120"/>
                         </a:rPr>
-                        <a:t>Industrial measurement and vibration monitoring applications</a:t>
+                        <a:t>Industrial manufacturers needing force</a:t>
                       </a:r>
                       <a:endParaRPr lang="en-US" sz="800" dirty="0">
                         <a:latin typeface="Arial" charset="0"/>
@@ -16326,7 +16326,7 @@
                           <a:ea typeface="Arial" pitchFamily="34" charset="-122"/>
                           <a:cs typeface="Arial" pitchFamily="34" charset="-120"/>
                         </a:rPr>
-                        <a:t>Plastics injection molding manufacturers seeking efficiency</a:t>
+                        <a:t>Injection molding manufacturers seeking efficiency and quality improvement</a:t>
                       </a:r>
                       <a:endParaRPr lang="en-US" sz="800" dirty="0">
                         <a:latin typeface="Arial" charset="0"/>
@@ -16532,7 +16532,7 @@
                           <a:ea typeface="Arial" pitchFamily="34" charset="-122"/>
                           <a:cs typeface="Arial" pitchFamily="34" charset="-120"/>
                         </a:rPr>
-                        <a:t>Intellectual property law and entertainment legal counsel</a:t>
+                        <a:t>Intellectual property and entertainment law counsel</a:t>
                       </a:r>
                       <a:endParaRPr lang="en-US" sz="800" dirty="0">
                         <a:latin typeface="Arial" charset="0"/>
@@ -16600,7 +16600,7 @@
                           <a:ea typeface="Arial" pitchFamily="34" charset="-122"/>
                           <a:cs typeface="Arial" pitchFamily="34" charset="-120"/>
                         </a:rPr>
-                        <a:t>Precision measurement technology for force</a:t>
+                        <a:t>Advanced measurement technology and sensor solutions</a:t>
                       </a:r>
                       <a:endParaRPr lang="en-US" sz="800" dirty="0">
                         <a:latin typeface="Arial" charset="0"/>
@@ -16668,7 +16668,7 @@
                           <a:ea typeface="Arial" pitchFamily="34" charset="-122"/>
                           <a:cs typeface="Arial" pitchFamily="34" charset="-120"/>
                         </a:rPr>
-                        <a:t>Mold a better tomorrow with hot runner innovation</a:t>
+                        <a:t>Hot runner solutions and flow control for injection molding</a:t>
                       </a:r>
                       <a:endParaRPr lang="en-US" sz="800" dirty="0">
                         <a:latin typeface="Arial" charset="0"/>
@@ -16942,7 +16942,7 @@
                           <a:ea typeface="Arial" pitchFamily="34" charset="-122"/>
                           <a:cs typeface="Arial" pitchFamily="34" charset="-120"/>
                         </a:rPr>
-                        <a:t>eso GmbH fully merged with Kistler Instrumente GmbH in March 2021</a:t>
+                        <a:t>eso GmbH acquired 2017</a:t>
                       </a:r>
                       <a:endParaRPr lang="en-US" sz="800" dirty="0">
                         <a:latin typeface="Arial" charset="0"/>
@@ -17010,7 +17010,7 @@
                           <a:ea typeface="Arial" pitchFamily="34" charset="-122"/>
                           <a:cs typeface="Arial" pitchFamily="34" charset="-120"/>
                         </a:rPr>
-                        <a:t>New IntelliGate Hot Runner with digital sensor technology launched</a:t>
+                        <a:t>New IntelliGate Hot Runner product launch with digital sensor technology</a:t>
                       </a:r>
                       <a:endParaRPr lang="en-US" sz="800" dirty="0">
                         <a:latin typeface="Arial" charset="0"/>

--- a/mesh_bioplastics_CI_Report.pptx
+++ b/mesh_bioplastics_CI_Report.pptx
@@ -4909,7 +4909,7 @@
                 <a:ea typeface="Arial" pitchFamily="34" charset="-122"/>
                 <a:cs typeface="Arial" pitchFamily="34" charset="-120"/>
               </a:rPr>
-              <a:t>Material Sustainability Integration</a:t>
+              <a:t>Material Innovation vs. Process Equipment</a:t>
             </a:r>
             <a:endParaRPr lang="en-US" sz="900" dirty="0"/>
           </a:p>
@@ -4987,7 +4987,7 @@
                 <a:ea typeface="Arial" pitchFamily="34" charset="-122"/>
                 <a:cs typeface="Arial" pitchFamily="34" charset="-120"/>
               </a:rPr>
-              <a:t>Process Intelligence Automation</a:t>
+              <a:t>Integrated Intelligence Integration</a:t>
             </a:r>
             <a:endParaRPr lang="en-US" sz="900" dirty="0"/>
           </a:p>
@@ -8270,7 +8270,7 @@
                 <a:ea typeface="Arial" pitchFamily="34" charset="-122"/>
                 <a:cs typeface="Arial" pitchFamily="34" charset="-120"/>
               </a:rPr>
-              <a:t>Emeryville, California, United States | https://www.rjg.com</a:t>
+              <a:t>Emeryville, California, USA | https://www.rjg.com</a:t>
             </a:r>
             <a:endParaRPr lang="en-US" sz="900" dirty="0"/>
           </a:p>
@@ -9403,7 +9403,7 @@
                 <a:ea typeface="Arial" pitchFamily="34" charset="-122"/>
                 <a:cs typeface="Arial" pitchFamily="34" charset="-120"/>
               </a:rPr>
-              <a:t>Entertainment producers, directors, actors, musicians, trademark clients</a:t>
+              <a:t>Entertainment industry, music, film, publishing professionals</a:t>
             </a:r>
             <a:endParaRPr lang="en-US" sz="900" dirty="0"/>
           </a:p>
@@ -9506,7 +9506,7 @@
                 <a:ea typeface="Arial" pitchFamily="34" charset="-122"/>
                 <a:cs typeface="Arial" pitchFamily="34" charset="-120"/>
               </a:rPr>
-              <a:t>Intellectual property and entertainment law counsel</a:t>
+              <a:t>Intellectual property law for entertainment and media</a:t>
             </a:r>
             <a:endParaRPr lang="en-US" sz="900" dirty="0"/>
           </a:p>
@@ -9847,7 +9847,7 @@
                 <a:ea typeface="Arial" pitchFamily="34" charset="-122"/>
                 <a:cs typeface="Arial" pitchFamily="34" charset="-120"/>
               </a:rPr>
-              <a:t>Unknown | https://www.kistler.com</a:t>
+              <a:t>Sindelfingen, Germany | https://www.kistler.com</a:t>
             </a:r>
             <a:endParaRPr lang="en-US" sz="900" dirty="0"/>
           </a:p>
@@ -10465,7 +10465,7 @@
                 <a:ea typeface="Arial" pitchFamily="34" charset="-122"/>
                 <a:cs typeface="Arial" pitchFamily="34" charset="-120"/>
               </a:rPr>
-              <a:t>Product finder, website content marketing</a:t>
+              <a:t>Product finder, direct website navigation</a:t>
             </a:r>
             <a:endParaRPr lang="en-US" sz="900" dirty="0"/>
           </a:p>
@@ -10568,7 +10568,7 @@
                 <a:ea typeface="Arial" pitchFamily="34" charset="-122"/>
                 <a:cs typeface="Arial" pitchFamily="34" charset="-120"/>
               </a:rPr>
-              <a:t>IEPE piezoelectric sensors, force sensors, accelerometers, speed measurement</a:t>
+              <a:t>IEPE piezoelectric sensors, force sensors, accelerometers</a:t>
             </a:r>
             <a:endParaRPr lang="en-US" sz="900" dirty="0"/>
           </a:p>
@@ -10671,7 +10671,7 @@
                 <a:ea typeface="Arial" pitchFamily="34" charset="-122"/>
                 <a:cs typeface="Arial" pitchFamily="34" charset="-120"/>
               </a:rPr>
-              <a:t>Unknown</a:t>
+              <a:t>Acquisition of eso GmbH indicates market expansion</a:t>
             </a:r>
             <a:endParaRPr lang="en-US" sz="900" dirty="0"/>
           </a:p>
@@ -10980,7 +10980,7 @@
                 <a:ea typeface="Arial" pitchFamily="34" charset="-122"/>
                 <a:cs typeface="Arial" pitchFamily="34" charset="-120"/>
               </a:rPr>
-              <a:t>Industrial manufacturers needing force, pressure, acceleration measurement</a:t>
+              <a:t>Industrial manufacturers requiring precision measurement technology</a:t>
             </a:r>
             <a:endParaRPr lang="en-US" sz="900" dirty="0"/>
           </a:p>
@@ -11083,7 +11083,7 @@
                 <a:ea typeface="Arial" pitchFamily="34" charset="-122"/>
                 <a:cs typeface="Arial" pitchFamily="34" charset="-120"/>
               </a:rPr>
-              <a:t>Advanced measurement technology and sensor solutions</a:t>
+              <a:t>Advanced measurement technology for industrial applications</a:t>
             </a:r>
             <a:endParaRPr lang="en-US" sz="900" dirty="0"/>
           </a:p>
@@ -11186,7 +11186,7 @@
                 <a:ea typeface="Arial" pitchFamily="34" charset="-122"/>
                 <a:cs typeface="Arial" pitchFamily="34" charset="-120"/>
               </a:rPr>
-              <a:t>eso GmbH acquired 2017, merged with Kistler Instrumente GmbH March 2021</a:t>
+              <a:t>eso GmbH merged with Kistler Instrumente GmbH in March 2021</a:t>
             </a:r>
             <a:endParaRPr lang="en-US" sz="900" dirty="0"/>
           </a:p>
@@ -12042,7 +12042,7 @@
                 <a:ea typeface="Arial" pitchFamily="34" charset="-122"/>
                 <a:cs typeface="Arial" pitchFamily="34" charset="-120"/>
               </a:rPr>
-              <a:t>Website content, product education pages, case studies</a:t>
+              <a:t>Product pages, landing pages, consultative approach</a:t>
             </a:r>
             <a:endParaRPr lang="en-US" sz="900" dirty="0"/>
           </a:p>
@@ -12145,7 +12145,7 @@
                 <a:ea typeface="Arial" pitchFamily="34" charset="-122"/>
                 <a:cs typeface="Arial" pitchFamily="34" charset="-120"/>
               </a:rPr>
-              <a:t>Hot runner systems, intelligent flow control, IntelliGate sensor technology</a:t>
+              <a:t>Hot runner systems, flow control, IntelliGate sensor technology</a:t>
             </a:r>
             <a:endParaRPr lang="en-US" sz="900" dirty="0"/>
           </a:p>
@@ -12248,7 +12248,7 @@
                 <a:ea typeface="Arial" pitchFamily="34" charset="-122"/>
                 <a:cs typeface="Arial" pitchFamily="34" charset="-120"/>
               </a:rPr>
-              <a:t>Unknown</a:t>
+              <a:t>50+ years developing hot runner technology, long-standing customer relationships</a:t>
             </a:r>
             <a:endParaRPr lang="en-US" sz="900" dirty="0"/>
           </a:p>
@@ -12557,7 +12557,7 @@
                 <a:ea typeface="Arial" pitchFamily="34" charset="-122"/>
                 <a:cs typeface="Arial" pitchFamily="34" charset="-120"/>
               </a:rPr>
-              <a:t>Injection molding manufacturers seeking efficiency and quality improvement</a:t>
+              <a:t>Plastics injection molding manufacturers seeking efficiency gains</a:t>
             </a:r>
             <a:endParaRPr lang="en-US" sz="900" dirty="0"/>
           </a:p>
@@ -12660,7 +12660,7 @@
                 <a:ea typeface="Arial" pitchFamily="34" charset="-122"/>
                 <a:cs typeface="Arial" pitchFamily="34" charset="-120"/>
               </a:rPr>
-              <a:t>Hot runner solutions and flow control for injection molding</a:t>
+              <a:t>Hot runner systems and flow control for injection molding</a:t>
             </a:r>
             <a:endParaRPr lang="en-US" sz="900" dirty="0"/>
           </a:p>
@@ -12763,7 +12763,7 @@
                 <a:ea typeface="Arial" pitchFamily="34" charset="-122"/>
                 <a:cs typeface="Arial" pitchFamily="34" charset="-120"/>
               </a:rPr>
-              <a:t>New IntelliGate Hot Runner product launch with digital sensor technology</a:t>
+              <a:t>IntelliGate Hot Runner product launch with digital sensor technology</a:t>
             </a:r>
             <a:endParaRPr lang="en-US" sz="900" dirty="0"/>
           </a:p>
@@ -14616,7 +14616,7 @@
                           <a:ea typeface="Arial" pitchFamily="34" charset="-122"/>
                           <a:cs typeface="Arial" pitchFamily="34" charset="-120"/>
                         </a:rPr>
-                        <a:t>Website content</a:t>
+                        <a:t>Product pages</a:t>
                       </a:r>
                       <a:endParaRPr lang="en-US" sz="800" dirty="0">
                         <a:latin typeface="Arial" charset="0"/>
@@ -15232,7 +15232,7 @@
                           <a:ea typeface="Arial" pitchFamily="34" charset="-122"/>
                           <a:cs typeface="Arial" pitchFamily="34" charset="-120"/>
                         </a:rPr>
-                        <a:t>Unknown</a:t>
+                        <a:t>Acquisition of eso GmbH indicates market expansion</a:t>
                       </a:r>
                       <a:endParaRPr lang="en-US" sz="800" dirty="0">
                         <a:latin typeface="Arial" charset="0"/>
@@ -15300,7 +15300,7 @@
                           <a:ea typeface="Arial" pitchFamily="34" charset="-122"/>
                           <a:cs typeface="Arial" pitchFamily="34" charset="-120"/>
                         </a:rPr>
-                        <a:t>Unknown</a:t>
+                        <a:t>50+ years developing hot runner technology</a:t>
                       </a:r>
                       <a:endParaRPr lang="en-US" sz="800" dirty="0">
                         <a:latin typeface="Arial" charset="0"/>
@@ -16190,7 +16190,7 @@
                           <a:ea typeface="Arial" pitchFamily="34" charset="-122"/>
                           <a:cs typeface="Arial" pitchFamily="34" charset="-120"/>
                         </a:rPr>
-                        <a:t>Entertainment producers</a:t>
+                        <a:t>Entertainment industry</a:t>
                       </a:r>
                       <a:endParaRPr lang="en-US" sz="800" dirty="0">
                         <a:latin typeface="Arial" charset="0"/>
@@ -16258,7 +16258,7 @@
                           <a:ea typeface="Arial" pitchFamily="34" charset="-122"/>
                           <a:cs typeface="Arial" pitchFamily="34" charset="-120"/>
                         </a:rPr>
-                        <a:t>Industrial manufacturers needing force</a:t>
+                        <a:t>Industrial manufacturers requiring precision measurement technology</a:t>
                       </a:r>
                       <a:endParaRPr lang="en-US" sz="800" dirty="0">
                         <a:latin typeface="Arial" charset="0"/>
@@ -16326,7 +16326,7 @@
                           <a:ea typeface="Arial" pitchFamily="34" charset="-122"/>
                           <a:cs typeface="Arial" pitchFamily="34" charset="-120"/>
                         </a:rPr>
-                        <a:t>Injection molding manufacturers seeking efficiency and quality improvement</a:t>
+                        <a:t>Plastics injection molding manufacturers seeking efficiency gains</a:t>
                       </a:r>
                       <a:endParaRPr lang="en-US" sz="800" dirty="0">
                         <a:latin typeface="Arial" charset="0"/>
@@ -16532,7 +16532,7 @@
                           <a:ea typeface="Arial" pitchFamily="34" charset="-122"/>
                           <a:cs typeface="Arial" pitchFamily="34" charset="-120"/>
                         </a:rPr>
-                        <a:t>Intellectual property and entertainment law counsel</a:t>
+                        <a:t>Intellectual property law for entertainment and media</a:t>
                       </a:r>
                       <a:endParaRPr lang="en-US" sz="800" dirty="0">
                         <a:latin typeface="Arial" charset="0"/>
@@ -16600,7 +16600,7 @@
                           <a:ea typeface="Arial" pitchFamily="34" charset="-122"/>
                           <a:cs typeface="Arial" pitchFamily="34" charset="-120"/>
                         </a:rPr>
-                        <a:t>Advanced measurement technology and sensor solutions</a:t>
+                        <a:t>Advanced measurement technology for industrial applications</a:t>
                       </a:r>
                       <a:endParaRPr lang="en-US" sz="800" dirty="0">
                         <a:latin typeface="Arial" charset="0"/>
@@ -16668,7 +16668,7 @@
                           <a:ea typeface="Arial" pitchFamily="34" charset="-122"/>
                           <a:cs typeface="Arial" pitchFamily="34" charset="-120"/>
                         </a:rPr>
-                        <a:t>Hot runner solutions and flow control for injection molding</a:t>
+                        <a:t>Hot runner systems and flow control for injection molding</a:t>
                       </a:r>
                       <a:endParaRPr lang="en-US" sz="800" dirty="0">
                         <a:latin typeface="Arial" charset="0"/>
@@ -16942,7 +16942,7 @@
                           <a:ea typeface="Arial" pitchFamily="34" charset="-122"/>
                           <a:cs typeface="Arial" pitchFamily="34" charset="-120"/>
                         </a:rPr>
-                        <a:t>eso GmbH acquired 2017</a:t>
+                        <a:t>eso GmbH merged with Kistler Instrumente GmbH in March 2021</a:t>
                       </a:r>
                       <a:endParaRPr lang="en-US" sz="800" dirty="0">
                         <a:latin typeface="Arial" charset="0"/>
@@ -17010,7 +17010,7 @@
                           <a:ea typeface="Arial" pitchFamily="34" charset="-122"/>
                           <a:cs typeface="Arial" pitchFamily="34" charset="-120"/>
                         </a:rPr>
-                        <a:t>New IntelliGate Hot Runner product launch with digital sensor technology</a:t>
+                        <a:t>IntelliGate Hot Runner product launch with digital sensor technology</a:t>
                       </a:r>
                       <a:endParaRPr lang="en-US" sz="800" dirty="0">
                         <a:latin typeface="Arial" charset="0"/>

--- a/mesh_bioplastics_CI_Report.pptx
+++ b/mesh_bioplastics_CI_Report.pptx
@@ -4909,7 +4909,7 @@
                 <a:ea typeface="Arial" pitchFamily="34" charset="-122"/>
                 <a:cs typeface="Arial" pitchFamily="34" charset="-120"/>
               </a:rPr>
-              <a:t>Material Innovation vs. Process Equipment</a:t>
+              <a:t>Material Innovation Depth</a:t>
             </a:r>
             <a:endParaRPr lang="en-US" sz="900" dirty="0"/>
           </a:p>
@@ -4987,7 +4987,7 @@
                 <a:ea typeface="Arial" pitchFamily="34" charset="-122"/>
                 <a:cs typeface="Arial" pitchFamily="34" charset="-120"/>
               </a:rPr>
-              <a:t>Integrated Intelligence Integration</a:t>
+              <a:t>Process Automation Integration</a:t>
             </a:r>
             <a:endParaRPr lang="en-US" sz="900" dirty="0"/>
           </a:p>
@@ -8270,7 +8270,7 @@
                 <a:ea typeface="Arial" pitchFamily="34" charset="-122"/>
                 <a:cs typeface="Arial" pitchFamily="34" charset="-120"/>
               </a:rPr>
-              <a:t>Emeryville, California, USA | https://www.rjg.com</a:t>
+              <a:t>Emeryville, United States | https://www.rjg.com</a:t>
             </a:r>
             <a:endParaRPr lang="en-US" sz="900" dirty="0"/>
           </a:p>
@@ -8888,7 +8888,7 @@
                 <a:ea typeface="Arial" pitchFamily="34" charset="-122"/>
                 <a:cs typeface="Arial" pitchFamily="34" charset="-120"/>
               </a:rPr>
-              <a:t>Direct contact, referrals from other attorneys</a:t>
+              <a:t>Direct contact, professional networks</a:t>
             </a:r>
             <a:endParaRPr lang="en-US" sz="900" dirty="0"/>
           </a:p>
@@ -8991,7 +8991,7 @@
                 <a:ea typeface="Arial" pitchFamily="34" charset="-122"/>
                 <a:cs typeface="Arial" pitchFamily="34" charset="-120"/>
               </a:rPr>
-              <a:t>Trademark applications, copyright, entertainment law expertise</a:t>
+              <a:t>Trademark, copyright, entertainment law with 500+ applications credited</a:t>
             </a:r>
             <a:endParaRPr lang="en-US" sz="900" dirty="0"/>
           </a:p>
@@ -9094,7 +9094,7 @@
                 <a:ea typeface="Arial" pitchFamily="34" charset="-122"/>
                 <a:cs typeface="Arial" pitchFamily="34" charset="-120"/>
               </a:rPr>
-              <a:t>500+ trademark applications and registrations credited</a:t>
+              <a:t>Avvo 10.0 rating, Martindale-Hubbell AV Preeminent</a:t>
             </a:r>
             <a:endParaRPr lang="en-US" sz="900" dirty="0"/>
           </a:p>
@@ -9403,7 +9403,7 @@
                 <a:ea typeface="Arial" pitchFamily="34" charset="-122"/>
                 <a:cs typeface="Arial" pitchFamily="34" charset="-120"/>
               </a:rPr>
-              <a:t>Entertainment industry, music, film, publishing professionals</a:t>
+              <a:t>Entertainment industry producers, directors, actors, musicians</a:t>
             </a:r>
             <a:endParaRPr lang="en-US" sz="900" dirty="0"/>
           </a:p>
@@ -9506,7 +9506,7 @@
                 <a:ea typeface="Arial" pitchFamily="34" charset="-122"/>
                 <a:cs typeface="Arial" pitchFamily="34" charset="-120"/>
               </a:rPr>
-              <a:t>Intellectual property law for entertainment and media</a:t>
+              <a:t>Intellectual property and entertainment law expertise</a:t>
             </a:r>
             <a:endParaRPr lang="en-US" sz="900" dirty="0"/>
           </a:p>
@@ -9847,7 +9847,7 @@
                 <a:ea typeface="Arial" pitchFamily="34" charset="-122"/>
                 <a:cs typeface="Arial" pitchFamily="34" charset="-120"/>
               </a:rPr>
-              <a:t>Sindelfingen, Germany | https://www.kistler.com</a:t>
+              <a:t>Unknown | https://www.kistler.com</a:t>
             </a:r>
             <a:endParaRPr lang="en-US" sz="900" dirty="0"/>
           </a:p>
@@ -10465,7 +10465,7 @@
                 <a:ea typeface="Arial" pitchFamily="34" charset="-122"/>
                 <a:cs typeface="Arial" pitchFamily="34" charset="-120"/>
               </a:rPr>
-              <a:t>Product finder, direct website navigation</a:t>
+              <a:t>Product finder, glossary content, website education</a:t>
             </a:r>
             <a:endParaRPr lang="en-US" sz="900" dirty="0"/>
           </a:p>
@@ -10568,7 +10568,7 @@
                 <a:ea typeface="Arial" pitchFamily="34" charset="-122"/>
                 <a:cs typeface="Arial" pitchFamily="34" charset="-120"/>
               </a:rPr>
-              <a:t>IEPE piezoelectric sensors, force sensors, accelerometers</a:t>
+              <a:t>IEPE piezoelectric sensors, force sensors, accelerometers, traffic monitoring</a:t>
             </a:r>
             <a:endParaRPr lang="en-US" sz="900" dirty="0"/>
           </a:p>
@@ -10671,7 +10671,7 @@
                 <a:ea typeface="Arial" pitchFamily="34" charset="-122"/>
                 <a:cs typeface="Arial" pitchFamily="34" charset="-120"/>
               </a:rPr>
-              <a:t>Acquisition of eso GmbH indicates market expansion</a:t>
+              <a:t>Unknown</a:t>
             </a:r>
             <a:endParaRPr lang="en-US" sz="900" dirty="0"/>
           </a:p>
@@ -10980,7 +10980,7 @@
                 <a:ea typeface="Arial" pitchFamily="34" charset="-122"/>
                 <a:cs typeface="Arial" pitchFamily="34" charset="-120"/>
               </a:rPr>
-              <a:t>Industrial manufacturers requiring precision measurement technology</a:t>
+              <a:t>Industrial manufacturers requiring force, pressure, acceleration measurement</a:t>
             </a:r>
             <a:endParaRPr lang="en-US" sz="900" dirty="0"/>
           </a:p>
@@ -11083,7 +11083,7 @@
                 <a:ea typeface="Arial" pitchFamily="34" charset="-122"/>
                 <a:cs typeface="Arial" pitchFamily="34" charset="-120"/>
               </a:rPr>
-              <a:t>Advanced measurement technology for industrial applications</a:t>
+              <a:t>Advanced measurement technology solutions for industrial applications</a:t>
             </a:r>
             <a:endParaRPr lang="en-US" sz="900" dirty="0"/>
           </a:p>
@@ -11186,7 +11186,7 @@
                 <a:ea typeface="Arial" pitchFamily="34" charset="-122"/>
                 <a:cs typeface="Arial" pitchFamily="34" charset="-120"/>
               </a:rPr>
-              <a:t>eso GmbH merged with Kistler Instrumente GmbH in March 2021</a:t>
+              <a:t>eso GmbH fully merged with Kistler in March 2021</a:t>
             </a:r>
             <a:endParaRPr lang="en-US" sz="900" dirty="0"/>
           </a:p>
@@ -12042,7 +12042,7 @@
                 <a:ea typeface="Arial" pitchFamily="34" charset="-122"/>
                 <a:cs typeface="Arial" pitchFamily="34" charset="-120"/>
               </a:rPr>
-              <a:t>Product pages, landing pages, consultative approach</a:t>
+              <a:t>Content marketing, product education, landing pages</a:t>
             </a:r>
             <a:endParaRPr lang="en-US" sz="900" dirty="0"/>
           </a:p>
@@ -12145,7 +12145,7 @@
                 <a:ea typeface="Arial" pitchFamily="34" charset="-122"/>
                 <a:cs typeface="Arial" pitchFamily="34" charset="-120"/>
               </a:rPr>
-              <a:t>Hot runner systems, flow control, IntelliGate sensor technology</a:t>
+              <a:t>Hot runner systems, IntelliGate digital sensor technology, flow control</a:t>
             </a:r>
             <a:endParaRPr lang="en-US" sz="900" dirty="0"/>
           </a:p>
@@ -12248,7 +12248,7 @@
                 <a:ea typeface="Arial" pitchFamily="34" charset="-122"/>
                 <a:cs typeface="Arial" pitchFamily="34" charset="-120"/>
               </a:rPr>
-              <a:t>50+ years developing hot runner technology, long-standing customer relationships</a:t>
+              <a:t>Unknown</a:t>
             </a:r>
             <a:endParaRPr lang="en-US" sz="900" dirty="0"/>
           </a:p>
@@ -12660,7 +12660,7 @@
                 <a:ea typeface="Arial" pitchFamily="34" charset="-122"/>
                 <a:cs typeface="Arial" pitchFamily="34" charset="-120"/>
               </a:rPr>
-              <a:t>Hot runner systems and flow control for injection molding</a:t>
+              <a:t>Mold a better tomorrow with sophisticated hot runner solutions</a:t>
             </a:r>
             <a:endParaRPr lang="en-US" sz="900" dirty="0"/>
           </a:p>
@@ -12763,7 +12763,7 @@
                 <a:ea typeface="Arial" pitchFamily="34" charset="-122"/>
                 <a:cs typeface="Arial" pitchFamily="34" charset="-120"/>
               </a:rPr>
-              <a:t>IntelliGate Hot Runner product launch with digital sensor technology</a:t>
+              <a:t>Launched new IntelliGate Hot Runner with digital sensor technology</a:t>
             </a:r>
             <a:endParaRPr lang="en-US" sz="900" dirty="0"/>
           </a:p>
@@ -14616,7 +14616,7 @@
                           <a:ea typeface="Arial" pitchFamily="34" charset="-122"/>
                           <a:cs typeface="Arial" pitchFamily="34" charset="-120"/>
                         </a:rPr>
-                        <a:t>Product pages</a:t>
+                        <a:t>Content marketing</a:t>
                       </a:r>
                       <a:endParaRPr lang="en-US" sz="800" dirty="0">
                         <a:latin typeface="Arial" charset="0"/>
@@ -14822,7 +14822,7 @@
                           <a:ea typeface="Arial" pitchFamily="34" charset="-122"/>
                           <a:cs typeface="Arial" pitchFamily="34" charset="-120"/>
                         </a:rPr>
-                        <a:t>Trademark applications</a:t>
+                        <a:t>Trademark</a:t>
                       </a:r>
                       <a:endParaRPr lang="en-US" sz="800" dirty="0">
                         <a:latin typeface="Arial" charset="0"/>
@@ -15164,7 +15164,7 @@
                           <a:ea typeface="Arial" pitchFamily="34" charset="-122"/>
                           <a:cs typeface="Arial" pitchFamily="34" charset="-120"/>
                         </a:rPr>
-                        <a:t>500+ trademark applications and registrations credited</a:t>
+                        <a:t>Avvo 10.0 rating</a:t>
                       </a:r>
                       <a:endParaRPr lang="en-US" sz="800" dirty="0">
                         <a:latin typeface="Arial" charset="0"/>
@@ -15232,7 +15232,7 @@
                           <a:ea typeface="Arial" pitchFamily="34" charset="-122"/>
                           <a:cs typeface="Arial" pitchFamily="34" charset="-120"/>
                         </a:rPr>
-                        <a:t>Acquisition of eso GmbH indicates market expansion</a:t>
+                        <a:t>Unknown</a:t>
                       </a:r>
                       <a:endParaRPr lang="en-US" sz="800" dirty="0">
                         <a:latin typeface="Arial" charset="0"/>
@@ -15300,7 +15300,7 @@
                           <a:ea typeface="Arial" pitchFamily="34" charset="-122"/>
                           <a:cs typeface="Arial" pitchFamily="34" charset="-120"/>
                         </a:rPr>
-                        <a:t>50+ years developing hot runner technology</a:t>
+                        <a:t>Unknown</a:t>
                       </a:r>
                       <a:endParaRPr lang="en-US" sz="800" dirty="0">
                         <a:latin typeface="Arial" charset="0"/>
@@ -16190,7 +16190,7 @@
                           <a:ea typeface="Arial" pitchFamily="34" charset="-122"/>
                           <a:cs typeface="Arial" pitchFamily="34" charset="-120"/>
                         </a:rPr>
-                        <a:t>Entertainment industry</a:t>
+                        <a:t>Entertainment industry producers</a:t>
                       </a:r>
                       <a:endParaRPr lang="en-US" sz="800" dirty="0">
                         <a:latin typeface="Arial" charset="0"/>
@@ -16258,7 +16258,7 @@
                           <a:ea typeface="Arial" pitchFamily="34" charset="-122"/>
                           <a:cs typeface="Arial" pitchFamily="34" charset="-120"/>
                         </a:rPr>
-                        <a:t>Industrial manufacturers requiring precision measurement technology</a:t>
+                        <a:t>Industrial manufacturers requiring force</a:t>
                       </a:r>
                       <a:endParaRPr lang="en-US" sz="800" dirty="0">
                         <a:latin typeface="Arial" charset="0"/>
@@ -16532,7 +16532,7 @@
                           <a:ea typeface="Arial" pitchFamily="34" charset="-122"/>
                           <a:cs typeface="Arial" pitchFamily="34" charset="-120"/>
                         </a:rPr>
-                        <a:t>Intellectual property law for entertainment and media</a:t>
+                        <a:t>Intellectual property and entertainment law expertise</a:t>
                       </a:r>
                       <a:endParaRPr lang="en-US" sz="800" dirty="0">
                         <a:latin typeface="Arial" charset="0"/>
@@ -16600,7 +16600,7 @@
                           <a:ea typeface="Arial" pitchFamily="34" charset="-122"/>
                           <a:cs typeface="Arial" pitchFamily="34" charset="-120"/>
                         </a:rPr>
-                        <a:t>Advanced measurement technology for industrial applications</a:t>
+                        <a:t>Advanced measurement technology solutions for industrial applications</a:t>
                       </a:r>
                       <a:endParaRPr lang="en-US" sz="800" dirty="0">
                         <a:latin typeface="Arial" charset="0"/>
@@ -16668,7 +16668,7 @@
                           <a:ea typeface="Arial" pitchFamily="34" charset="-122"/>
                           <a:cs typeface="Arial" pitchFamily="34" charset="-120"/>
                         </a:rPr>
-                        <a:t>Hot runner systems and flow control for injection molding</a:t>
+                        <a:t>Mold a better tomorrow with sophisticated hot runner solutions</a:t>
                       </a:r>
                       <a:endParaRPr lang="en-US" sz="800" dirty="0">
                         <a:latin typeface="Arial" charset="0"/>
@@ -16942,7 +16942,7 @@
                           <a:ea typeface="Arial" pitchFamily="34" charset="-122"/>
                           <a:cs typeface="Arial" pitchFamily="34" charset="-120"/>
                         </a:rPr>
-                        <a:t>eso GmbH merged with Kistler Instrumente GmbH in March 2021</a:t>
+                        <a:t>eso GmbH fully merged with Kistler in March 2021</a:t>
                       </a:r>
                       <a:endParaRPr lang="en-US" sz="800" dirty="0">
                         <a:latin typeface="Arial" charset="0"/>
@@ -17010,7 +17010,7 @@
                           <a:ea typeface="Arial" pitchFamily="34" charset="-122"/>
                           <a:cs typeface="Arial" pitchFamily="34" charset="-120"/>
                         </a:rPr>
-                        <a:t>IntelliGate Hot Runner product launch with digital sensor technology</a:t>
+                        <a:t>Launched new IntelliGate Hot Runner with digital sensor technology</a:t>
                       </a:r>
                       <a:endParaRPr lang="en-US" sz="800" dirty="0">
                         <a:latin typeface="Arial" charset="0"/>

--- a/mesh_bioplastics_CI_Report.pptx
+++ b/mesh_bioplastics_CI_Report.pptx
@@ -4909,7 +4909,7 @@
                 <a:ea typeface="Arial" pitchFamily="34" charset="-122"/>
                 <a:cs typeface="Arial" pitchFamily="34" charset="-120"/>
               </a:rPr>
-              <a:t>Material Innovation Depth</a:t>
+              <a:t>Material Science Innovation (Sustainability Focus)</a:t>
             </a:r>
             <a:endParaRPr lang="en-US" sz="900" dirty="0"/>
           </a:p>
@@ -4987,7 +4987,7 @@
                 <a:ea typeface="Arial" pitchFamily="34" charset="-122"/>
                 <a:cs typeface="Arial" pitchFamily="34" charset="-120"/>
               </a:rPr>
-              <a:t>Process Automation Integration</a:t>
+              <a:t>Manufacturing Process Digitalization (AI Integration)</a:t>
             </a:r>
             <a:endParaRPr lang="en-US" sz="900" dirty="0"/>
           </a:p>
@@ -8270,7 +8270,7 @@
                 <a:ea typeface="Arial" pitchFamily="34" charset="-122"/>
                 <a:cs typeface="Arial" pitchFamily="34" charset="-120"/>
               </a:rPr>
-              <a:t>Emeryville, United States | https://www.rjg.com</a:t>
+              <a:t>Emeryville, California, United States | https://www.rjg.com</a:t>
             </a:r>
             <a:endParaRPr lang="en-US" sz="900" dirty="0"/>
           </a:p>
@@ -8888,7 +8888,7 @@
                 <a:ea typeface="Arial" pitchFamily="34" charset="-122"/>
                 <a:cs typeface="Arial" pitchFamily="34" charset="-120"/>
               </a:rPr>
-              <a:t>Direct contact, professional networks</a:t>
+              <a:t>Direct client relationships, referrals from other attorneys</a:t>
             </a:r>
             <a:endParaRPr lang="en-US" sz="900" dirty="0"/>
           </a:p>
@@ -8991,7 +8991,7 @@
                 <a:ea typeface="Arial" pitchFamily="34" charset="-122"/>
                 <a:cs typeface="Arial" pitchFamily="34" charset="-120"/>
               </a:rPr>
-              <a:t>Trademark, copyright, entertainment law with 500+ applications credited</a:t>
+              <a:t>Trademark portfolio management, entertainment law, music rights clearance expertise</a:t>
             </a:r>
             <a:endParaRPr lang="en-US" sz="900" dirty="0"/>
           </a:p>
@@ -9094,7 +9094,7 @@
                 <a:ea typeface="Arial" pitchFamily="34" charset="-122"/>
                 <a:cs typeface="Arial" pitchFamily="34" charset="-120"/>
               </a:rPr>
-              <a:t>Avvo 10.0 rating, Martindale-Hubbell AV Preeminent</a:t>
+              <a:t>Unknown</a:t>
             </a:r>
             <a:endParaRPr lang="en-US" sz="900" dirty="0"/>
           </a:p>
@@ -9403,7 +9403,7 @@
                 <a:ea typeface="Arial" pitchFamily="34" charset="-122"/>
                 <a:cs typeface="Arial" pitchFamily="34" charset="-120"/>
               </a:rPr>
-              <a:t>Entertainment industry producers, directors, actors, musicians</a:t>
+              <a:t>Entertainment producers, directors, actors, musicians, publishers</a:t>
             </a:r>
             <a:endParaRPr lang="en-US" sz="900" dirty="0"/>
           </a:p>
@@ -9506,7 +9506,7 @@
                 <a:ea typeface="Arial" pitchFamily="34" charset="-122"/>
                 <a:cs typeface="Arial" pitchFamily="34" charset="-120"/>
               </a:rPr>
-              <a:t>Intellectual property and entertainment law expertise</a:t>
+              <a:t>Intellectual property law and entertainment law expertise</a:t>
             </a:r>
             <a:endParaRPr lang="en-US" sz="900" dirty="0"/>
           </a:p>
@@ -9847,7 +9847,7 @@
                 <a:ea typeface="Arial" pitchFamily="34" charset="-122"/>
                 <a:cs typeface="Arial" pitchFamily="34" charset="-120"/>
               </a:rPr>
-              <a:t>Unknown | https://www.kistler.com</a:t>
+              <a:t>Sindelfingen, Germany | https://www.kistler.com</a:t>
             </a:r>
             <a:endParaRPr lang="en-US" sz="900" dirty="0"/>
           </a:p>
@@ -10465,7 +10465,7 @@
                 <a:ea typeface="Arial" pitchFamily="34" charset="-122"/>
                 <a:cs typeface="Arial" pitchFamily="34" charset="-120"/>
               </a:rPr>
-              <a:t>Product finder, glossary content, website education</a:t>
+              <a:t>Product finder tools, industry partnerships</a:t>
             </a:r>
             <a:endParaRPr lang="en-US" sz="900" dirty="0"/>
           </a:p>
@@ -10568,7 +10568,7 @@
                 <a:ea typeface="Arial" pitchFamily="34" charset="-122"/>
                 <a:cs typeface="Arial" pitchFamily="34" charset="-120"/>
               </a:rPr>
-              <a:t>IEPE piezoelectric sensors, force sensors, accelerometers, traffic monitoring</a:t>
+              <a:t>IEPE piezoelectric sensors, force/pressure/acceleration measurement technology</a:t>
             </a:r>
             <a:endParaRPr lang="en-US" sz="900" dirty="0"/>
           </a:p>
@@ -10980,7 +10980,7 @@
                 <a:ea typeface="Arial" pitchFamily="34" charset="-122"/>
                 <a:cs typeface="Arial" pitchFamily="34" charset="-120"/>
               </a:rPr>
-              <a:t>Industrial manufacturers requiring force, pressure, acceleration measurement</a:t>
+              <a:t>Industrial measurement applications, traffic monitoring, vibration/shock measurement</a:t>
             </a:r>
             <a:endParaRPr lang="en-US" sz="900" dirty="0"/>
           </a:p>
@@ -11186,7 +11186,7 @@
                 <a:ea typeface="Arial" pitchFamily="34" charset="-122"/>
                 <a:cs typeface="Arial" pitchFamily="34" charset="-120"/>
               </a:rPr>
-              <a:t>eso GmbH fully merged with Kistler in March 2021</a:t>
+              <a:t>March 2021 eso GmbH merged with Kistler Instrumente GmbH</a:t>
             </a:r>
             <a:endParaRPr lang="en-US" sz="900" dirty="0"/>
           </a:p>
@@ -12042,7 +12042,7 @@
                 <a:ea typeface="Arial" pitchFamily="34" charset="-122"/>
                 <a:cs typeface="Arial" pitchFamily="34" charset="-120"/>
               </a:rPr>
-              <a:t>Content marketing, product education, landing pages</a:t>
+              <a:t>Educational content on lighting and injection molding optimization</a:t>
             </a:r>
             <a:endParaRPr lang="en-US" sz="900" dirty="0"/>
           </a:p>
@@ -12145,7 +12145,7 @@
                 <a:ea typeface="Arial" pitchFamily="34" charset="-122"/>
                 <a:cs typeface="Arial" pitchFamily="34" charset="-120"/>
               </a:rPr>
-              <a:t>Hot runner systems, IntelliGate digital sensor technology, flow control</a:t>
+              <a:t>Hot runner systems, IntelliGate digital sensor technology, flow control for injection molding</a:t>
             </a:r>
             <a:endParaRPr lang="en-US" sz="900" dirty="0"/>
           </a:p>
@@ -12557,7 +12557,7 @@
                 <a:ea typeface="Arial" pitchFamily="34" charset="-122"/>
                 <a:cs typeface="Arial" pitchFamily="34" charset="-120"/>
               </a:rPr>
-              <a:t>Plastics injection molding manufacturers seeking efficiency gains</a:t>
+              <a:t>Plastics injection molding manufacturers seeking efficiency improvements</a:t>
             </a:r>
             <a:endParaRPr lang="en-US" sz="900" dirty="0"/>
           </a:p>
@@ -12660,7 +12660,7 @@
                 <a:ea typeface="Arial" pitchFamily="34" charset="-122"/>
                 <a:cs typeface="Arial" pitchFamily="34" charset="-120"/>
               </a:rPr>
-              <a:t>Mold a better tomorrow with sophisticated hot runner solutions</a:t>
+              <a:t>Sophisticated hot runner solutions for advanced injection molding</a:t>
             </a:r>
             <a:endParaRPr lang="en-US" sz="900" dirty="0"/>
           </a:p>
@@ -12763,7 +12763,7 @@
                 <a:ea typeface="Arial" pitchFamily="34" charset="-122"/>
                 <a:cs typeface="Arial" pitchFamily="34" charset="-120"/>
               </a:rPr>
-              <a:t>Launched new IntelliGate Hot Runner with digital sensor technology</a:t>
+              <a:t>Launch of new IntelliGate Hot Runner with digital sensor technology</a:t>
             </a:r>
             <a:endParaRPr lang="en-US" sz="900" dirty="0"/>
           </a:p>
@@ -14480,7 +14480,7 @@
                           <a:ea typeface="Arial" pitchFamily="34" charset="-122"/>
                           <a:cs typeface="Arial" pitchFamily="34" charset="-120"/>
                         </a:rPr>
-                        <a:t>Direct contact</a:t>
+                        <a:t>Direct client relationships</a:t>
                       </a:r>
                       <a:endParaRPr lang="en-US" sz="800" dirty="0">
                         <a:latin typeface="Arial" charset="0"/>
@@ -14548,7 +14548,7 @@
                           <a:ea typeface="Arial" pitchFamily="34" charset="-122"/>
                           <a:cs typeface="Arial" pitchFamily="34" charset="-120"/>
                         </a:rPr>
-                        <a:t>Product finder</a:t>
+                        <a:t>Product finder tools</a:t>
                       </a:r>
                       <a:endParaRPr lang="en-US" sz="800" dirty="0">
                         <a:latin typeface="Arial" charset="0"/>
@@ -14616,7 +14616,7 @@
                           <a:ea typeface="Arial" pitchFamily="34" charset="-122"/>
                           <a:cs typeface="Arial" pitchFamily="34" charset="-120"/>
                         </a:rPr>
-                        <a:t>Content marketing</a:t>
+                        <a:t>Educational content on lighting and injection molding optimization</a:t>
                       </a:r>
                       <a:endParaRPr lang="en-US" sz="800" dirty="0">
                         <a:latin typeface="Arial" charset="0"/>
@@ -14822,7 +14822,7 @@
                           <a:ea typeface="Arial" pitchFamily="34" charset="-122"/>
                           <a:cs typeface="Arial" pitchFamily="34" charset="-120"/>
                         </a:rPr>
-                        <a:t>Trademark</a:t>
+                        <a:t>Trademark portfolio management</a:t>
                       </a:r>
                       <a:endParaRPr lang="en-US" sz="800" dirty="0">
                         <a:latin typeface="Arial" charset="0"/>
@@ -15164,7 +15164,7 @@
                           <a:ea typeface="Arial" pitchFamily="34" charset="-122"/>
                           <a:cs typeface="Arial" pitchFamily="34" charset="-120"/>
                         </a:rPr>
-                        <a:t>Avvo 10.0 rating</a:t>
+                        <a:t>Unknown</a:t>
                       </a:r>
                       <a:endParaRPr lang="en-US" sz="800" dirty="0">
                         <a:latin typeface="Arial" charset="0"/>
@@ -16190,7 +16190,7 @@
                           <a:ea typeface="Arial" pitchFamily="34" charset="-122"/>
                           <a:cs typeface="Arial" pitchFamily="34" charset="-120"/>
                         </a:rPr>
-                        <a:t>Entertainment industry producers</a:t>
+                        <a:t>Entertainment producers</a:t>
                       </a:r>
                       <a:endParaRPr lang="en-US" sz="800" dirty="0">
                         <a:latin typeface="Arial" charset="0"/>
@@ -16258,7 +16258,7 @@
                           <a:ea typeface="Arial" pitchFamily="34" charset="-122"/>
                           <a:cs typeface="Arial" pitchFamily="34" charset="-120"/>
                         </a:rPr>
-                        <a:t>Industrial manufacturers requiring force</a:t>
+                        <a:t>Industrial measurement applications</a:t>
                       </a:r>
                       <a:endParaRPr lang="en-US" sz="800" dirty="0">
                         <a:latin typeface="Arial" charset="0"/>
@@ -16326,7 +16326,7 @@
                           <a:ea typeface="Arial" pitchFamily="34" charset="-122"/>
                           <a:cs typeface="Arial" pitchFamily="34" charset="-120"/>
                         </a:rPr>
-                        <a:t>Plastics injection molding manufacturers seeking efficiency gains</a:t>
+                        <a:t>Plastics injection molding manufacturers seeking efficiency improvements</a:t>
                       </a:r>
                       <a:endParaRPr lang="en-US" sz="800" dirty="0">
                         <a:latin typeface="Arial" charset="0"/>
@@ -16532,7 +16532,7 @@
                           <a:ea typeface="Arial" pitchFamily="34" charset="-122"/>
                           <a:cs typeface="Arial" pitchFamily="34" charset="-120"/>
                         </a:rPr>
-                        <a:t>Intellectual property and entertainment law expertise</a:t>
+                        <a:t>Intellectual property law and entertainment law expertise</a:t>
                       </a:r>
                       <a:endParaRPr lang="en-US" sz="800" dirty="0">
                         <a:latin typeface="Arial" charset="0"/>
@@ -16668,7 +16668,7 @@
                           <a:ea typeface="Arial" pitchFamily="34" charset="-122"/>
                           <a:cs typeface="Arial" pitchFamily="34" charset="-120"/>
                         </a:rPr>
-                        <a:t>Mold a better tomorrow with sophisticated hot runner solutions</a:t>
+                        <a:t>Sophisticated hot runner solutions for advanced injection molding</a:t>
                       </a:r>
                       <a:endParaRPr lang="en-US" sz="800" dirty="0">
                         <a:latin typeface="Arial" charset="0"/>
@@ -16942,7 +16942,7 @@
                           <a:ea typeface="Arial" pitchFamily="34" charset="-122"/>
                           <a:cs typeface="Arial" pitchFamily="34" charset="-120"/>
                         </a:rPr>
-                        <a:t>eso GmbH fully merged with Kistler in March 2021</a:t>
+                        <a:t>March 2021 eso GmbH merged with Kistler Instrumente GmbH</a:t>
                       </a:r>
                       <a:endParaRPr lang="en-US" sz="800" dirty="0">
                         <a:latin typeface="Arial" charset="0"/>
@@ -17010,7 +17010,7 @@
                           <a:ea typeface="Arial" pitchFamily="34" charset="-122"/>
                           <a:cs typeface="Arial" pitchFamily="34" charset="-120"/>
                         </a:rPr>
-                        <a:t>Launched new IntelliGate Hot Runner with digital sensor technology</a:t>
+                        <a:t>Launch of new IntelliGate Hot Runner with digital sensor technology</a:t>
                       </a:r>
                       <a:endParaRPr lang="en-US" sz="800" dirty="0">
                         <a:latin typeface="Arial" charset="0"/>

--- a/mesh_bioplastics_CI_Report.pptx
+++ b/mesh_bioplastics_CI_Report.pptx
@@ -4909,7 +4909,7 @@
                 <a:ea typeface="Arial" pitchFamily="34" charset="-122"/>
                 <a:cs typeface="Arial" pitchFamily="34" charset="-120"/>
               </a:rPr>
-              <a:t>Material Science Innovation (Sustainability Focus)</a:t>
+              <a:t>Material Innovation vs. Process Equipment Focus</a:t>
             </a:r>
             <a:endParaRPr lang="en-US" sz="900" dirty="0"/>
           </a:p>
@@ -4987,7 +4987,7 @@
                 <a:ea typeface="Arial" pitchFamily="34" charset="-122"/>
                 <a:cs typeface="Arial" pitchFamily="34" charset="-120"/>
               </a:rPr>
-              <a:t>Manufacturing Process Digitalization (AI Integration)</a:t>
+              <a:t>Integrated AI Automation vs. Standalone Measurement/Control</a:t>
             </a:r>
             <a:endParaRPr lang="en-US" sz="900" dirty="0"/>
           </a:p>
@@ -8991,7 +8991,7 @@
                 <a:ea typeface="Arial" pitchFamily="34" charset="-122"/>
                 <a:cs typeface="Arial" pitchFamily="34" charset="-120"/>
               </a:rPr>
-              <a:t>Trademark portfolio management, entertainment law, music rights clearance expertise</a:t>
+              <a:t>Trademark and copyright legal services with 500+ registrations</a:t>
             </a:r>
             <a:endParaRPr lang="en-US" sz="900" dirty="0"/>
           </a:p>
@@ -9403,7 +9403,7 @@
                 <a:ea typeface="Arial" pitchFamily="34" charset="-122"/>
                 <a:cs typeface="Arial" pitchFamily="34" charset="-120"/>
               </a:rPr>
-              <a:t>Entertainment producers, directors, actors, musicians, publishers</a:t>
+              <a:t>Entertainment producers, directors, actors, musicians, authors</a:t>
             </a:r>
             <a:endParaRPr lang="en-US" sz="900" dirty="0"/>
           </a:p>
@@ -9506,7 +9506,7 @@
                 <a:ea typeface="Arial" pitchFamily="34" charset="-122"/>
                 <a:cs typeface="Arial" pitchFamily="34" charset="-120"/>
               </a:rPr>
-              <a:t>Intellectual property law and entertainment law expertise</a:t>
+              <a:t>Intellectual property and entertainment law expertise</a:t>
             </a:r>
             <a:endParaRPr lang="en-US" sz="900" dirty="0"/>
           </a:p>
@@ -9847,7 +9847,7 @@
                 <a:ea typeface="Arial" pitchFamily="34" charset="-122"/>
                 <a:cs typeface="Arial" pitchFamily="34" charset="-120"/>
               </a:rPr>
-              <a:t>Sindelfingen, Germany | https://www.kistler.com</a:t>
+              <a:t>Unknown | https://www.kistler.com</a:t>
             </a:r>
             <a:endParaRPr lang="en-US" sz="900" dirty="0"/>
           </a:p>
@@ -10465,7 +10465,7 @@
                 <a:ea typeface="Arial" pitchFamily="34" charset="-122"/>
                 <a:cs typeface="Arial" pitchFamily="34" charset="-120"/>
               </a:rPr>
-              <a:t>Product finder tools, industry partnerships</a:t>
+              <a:t>Product finder, online content marketing</a:t>
             </a:r>
             <a:endParaRPr lang="en-US" sz="900" dirty="0"/>
           </a:p>
@@ -10568,7 +10568,7 @@
                 <a:ea typeface="Arial" pitchFamily="34" charset="-122"/>
                 <a:cs typeface="Arial" pitchFamily="34" charset="-120"/>
               </a:rPr>
-              <a:t>IEPE piezoelectric sensors, force/pressure/acceleration measurement technology</a:t>
+              <a:t>IEPE piezoelectric sensors, force sensors, accelerometers</a:t>
             </a:r>
             <a:endParaRPr lang="en-US" sz="900" dirty="0"/>
           </a:p>
@@ -10980,7 +10980,7 @@
                 <a:ea typeface="Arial" pitchFamily="34" charset="-122"/>
                 <a:cs typeface="Arial" pitchFamily="34" charset="-120"/>
               </a:rPr>
-              <a:t>Industrial measurement applications, traffic monitoring, vibration/shock measurement</a:t>
+              <a:t>Industrial measurement and vibration monitoring applications</a:t>
             </a:r>
             <a:endParaRPr lang="en-US" sz="900" dirty="0"/>
           </a:p>
@@ -11083,7 +11083,7 @@
                 <a:ea typeface="Arial" pitchFamily="34" charset="-122"/>
                 <a:cs typeface="Arial" pitchFamily="34" charset="-120"/>
               </a:rPr>
-              <a:t>Advanced measurement technology solutions for industrial applications</a:t>
+              <a:t>Precision measurement technology for industrial applications</a:t>
             </a:r>
             <a:endParaRPr lang="en-US" sz="900" dirty="0"/>
           </a:p>
@@ -11186,7 +11186,7 @@
                 <a:ea typeface="Arial" pitchFamily="34" charset="-122"/>
                 <a:cs typeface="Arial" pitchFamily="34" charset="-120"/>
               </a:rPr>
-              <a:t>March 2021 eso GmbH merged with Kistler Instrumente GmbH</a:t>
+              <a:t>March 2021 eso GmbH fully merged with Kistler Instrumente GmbH</a:t>
             </a:r>
             <a:endParaRPr lang="en-US" sz="900" dirty="0"/>
           </a:p>
@@ -12042,7 +12042,7 @@
                 <a:ea typeface="Arial" pitchFamily="34" charset="-122"/>
                 <a:cs typeface="Arial" pitchFamily="34" charset="-120"/>
               </a:rPr>
-              <a:t>Educational content on lighting and injection molding optimization</a:t>
+              <a:t>Content marketing, product education pages</a:t>
             </a:r>
             <a:endParaRPr lang="en-US" sz="900" dirty="0"/>
           </a:p>
@@ -12145,7 +12145,7 @@
                 <a:ea typeface="Arial" pitchFamily="34" charset="-122"/>
                 <a:cs typeface="Arial" pitchFamily="34" charset="-120"/>
               </a:rPr>
-              <a:t>Hot runner systems, IntelliGate digital sensor technology, flow control for injection molding</a:t>
+              <a:t>Hot runner systems, IntelliGate digital sensor technology, flow control</a:t>
             </a:r>
             <a:endParaRPr lang="en-US" sz="900" dirty="0"/>
           </a:p>
@@ -12557,7 +12557,7 @@
                 <a:ea typeface="Arial" pitchFamily="34" charset="-122"/>
                 <a:cs typeface="Arial" pitchFamily="34" charset="-120"/>
               </a:rPr>
-              <a:t>Plastics injection molding manufacturers seeking efficiency improvements</a:t>
+              <a:t>Plastics injection molding manufacturers seeking efficiency gains</a:t>
             </a:r>
             <a:endParaRPr lang="en-US" sz="900" dirty="0"/>
           </a:p>
@@ -12660,7 +12660,7 @@
                 <a:ea typeface="Arial" pitchFamily="34" charset="-122"/>
                 <a:cs typeface="Arial" pitchFamily="34" charset="-120"/>
               </a:rPr>
-              <a:t>Sophisticated hot runner solutions for advanced injection molding</a:t>
+              <a:t>Advanced hot runner solutions for injection molding innovation</a:t>
             </a:r>
             <a:endParaRPr lang="en-US" sz="900" dirty="0"/>
           </a:p>
@@ -14548,7 +14548,7 @@
                           <a:ea typeface="Arial" pitchFamily="34" charset="-122"/>
                           <a:cs typeface="Arial" pitchFamily="34" charset="-120"/>
                         </a:rPr>
-                        <a:t>Product finder tools</a:t>
+                        <a:t>Product finder</a:t>
                       </a:r>
                       <a:endParaRPr lang="en-US" sz="800" dirty="0">
                         <a:latin typeface="Arial" charset="0"/>
@@ -14616,7 +14616,7 @@
                           <a:ea typeface="Arial" pitchFamily="34" charset="-122"/>
                           <a:cs typeface="Arial" pitchFamily="34" charset="-120"/>
                         </a:rPr>
-                        <a:t>Educational content on lighting and injection molding optimization</a:t>
+                        <a:t>Content marketing</a:t>
                       </a:r>
                       <a:endParaRPr lang="en-US" sz="800" dirty="0">
                         <a:latin typeface="Arial" charset="0"/>
@@ -14822,7 +14822,7 @@
                           <a:ea typeface="Arial" pitchFamily="34" charset="-122"/>
                           <a:cs typeface="Arial" pitchFamily="34" charset="-120"/>
                         </a:rPr>
-                        <a:t>Trademark portfolio management</a:t>
+                        <a:t>Trademark and copyright legal services with 500+ registrations</a:t>
                       </a:r>
                       <a:endParaRPr lang="en-US" sz="800" dirty="0">
                         <a:latin typeface="Arial" charset="0"/>
@@ -16258,7 +16258,7 @@
                           <a:ea typeface="Arial" pitchFamily="34" charset="-122"/>
                           <a:cs typeface="Arial" pitchFamily="34" charset="-120"/>
                         </a:rPr>
-                        <a:t>Industrial measurement applications</a:t>
+                        <a:t>Industrial measurement and vibration monitoring applications</a:t>
                       </a:r>
                       <a:endParaRPr lang="en-US" sz="800" dirty="0">
                         <a:latin typeface="Arial" charset="0"/>
@@ -16326,7 +16326,7 @@
                           <a:ea typeface="Arial" pitchFamily="34" charset="-122"/>
                           <a:cs typeface="Arial" pitchFamily="34" charset="-120"/>
                         </a:rPr>
-                        <a:t>Plastics injection molding manufacturers seeking efficiency improvements</a:t>
+                        <a:t>Plastics injection molding manufacturers seeking efficiency gains</a:t>
                       </a:r>
                       <a:endParaRPr lang="en-US" sz="800" dirty="0">
                         <a:latin typeface="Arial" charset="0"/>
@@ -16532,7 +16532,7 @@
                           <a:ea typeface="Arial" pitchFamily="34" charset="-122"/>
                           <a:cs typeface="Arial" pitchFamily="34" charset="-120"/>
                         </a:rPr>
-                        <a:t>Intellectual property law and entertainment law expertise</a:t>
+                        <a:t>Intellectual property and entertainment law expertise</a:t>
                       </a:r>
                       <a:endParaRPr lang="en-US" sz="800" dirty="0">
                         <a:latin typeface="Arial" charset="0"/>
@@ -16600,7 +16600,7 @@
                           <a:ea typeface="Arial" pitchFamily="34" charset="-122"/>
                           <a:cs typeface="Arial" pitchFamily="34" charset="-120"/>
                         </a:rPr>
-                        <a:t>Advanced measurement technology solutions for industrial applications</a:t>
+                        <a:t>Precision measurement technology for industrial applications</a:t>
                       </a:r>
                       <a:endParaRPr lang="en-US" sz="800" dirty="0">
                         <a:latin typeface="Arial" charset="0"/>
@@ -16668,7 +16668,7 @@
                           <a:ea typeface="Arial" pitchFamily="34" charset="-122"/>
                           <a:cs typeface="Arial" pitchFamily="34" charset="-120"/>
                         </a:rPr>
-                        <a:t>Sophisticated hot runner solutions for advanced injection molding</a:t>
+                        <a:t>Advanced hot runner solutions for injection molding innovation</a:t>
                       </a:r>
                       <a:endParaRPr lang="en-US" sz="800" dirty="0">
                         <a:latin typeface="Arial" charset="0"/>
@@ -16942,7 +16942,7 @@
                           <a:ea typeface="Arial" pitchFamily="34" charset="-122"/>
                           <a:cs typeface="Arial" pitchFamily="34" charset="-120"/>
                         </a:rPr>
-                        <a:t>March 2021 eso GmbH merged with Kistler Instrumente GmbH</a:t>
+                        <a:t>March 2021 eso GmbH fully merged with Kistler Instrumente GmbH</a:t>
                       </a:r>
                       <a:endParaRPr lang="en-US" sz="800" dirty="0">
                         <a:latin typeface="Arial" charset="0"/>

--- a/mesh_bioplastics_CI_Report.pptx
+++ b/mesh_bioplastics_CI_Report.pptx
@@ -4909,7 +4909,7 @@
                 <a:ea typeface="Arial" pitchFamily="34" charset="-122"/>
                 <a:cs typeface="Arial" pitchFamily="34" charset="-120"/>
               </a:rPr>
-              <a:t>Material Innovation vs. Process Equipment Focus</a:t>
+              <a:t>Material Innovation (Sustainability Focus)</a:t>
             </a:r>
             <a:endParaRPr lang="en-US" sz="900" dirty="0"/>
           </a:p>
@@ -4987,7 +4987,7 @@
                 <a:ea typeface="Arial" pitchFamily="34" charset="-122"/>
                 <a:cs typeface="Arial" pitchFamily="34" charset="-120"/>
               </a:rPr>
-              <a:t>Integrated AI Automation vs. Standalone Measurement/Control</a:t>
+              <a:t>Process Intelligence Integration</a:t>
             </a:r>
             <a:endParaRPr lang="en-US" sz="900" dirty="0"/>
           </a:p>
@@ -8270,7 +8270,7 @@
                 <a:ea typeface="Arial" pitchFamily="34" charset="-122"/>
                 <a:cs typeface="Arial" pitchFamily="34" charset="-120"/>
               </a:rPr>
-              <a:t>Emeryville, California, United States | https://www.rjg.com</a:t>
+              <a:t>Emeryville, United States | https://www.rjg.com</a:t>
             </a:r>
             <a:endParaRPr lang="en-US" sz="900" dirty="0"/>
           </a:p>
@@ -8888,7 +8888,7 @@
                 <a:ea typeface="Arial" pitchFamily="34" charset="-122"/>
                 <a:cs typeface="Arial" pitchFamily="34" charset="-120"/>
               </a:rPr>
-              <a:t>Direct client relationships, referrals from other attorneys</a:t>
+              <a:t>Direct contact, professional referrals</a:t>
             </a:r>
             <a:endParaRPr lang="en-US" sz="900" dirty="0"/>
           </a:p>
@@ -8991,7 +8991,7 @@
                 <a:ea typeface="Arial" pitchFamily="34" charset="-122"/>
                 <a:cs typeface="Arial" pitchFamily="34" charset="-120"/>
               </a:rPr>
-              <a:t>Trademark and copyright legal services with 500+ registrations</a:t>
+              <a:t>Trademark registration, copyright, entertainment law expertise</a:t>
             </a:r>
             <a:endParaRPr lang="en-US" sz="900" dirty="0"/>
           </a:p>
@@ -9094,7 +9094,7 @@
                 <a:ea typeface="Arial" pitchFamily="34" charset="-122"/>
                 <a:cs typeface="Arial" pitchFamily="34" charset="-120"/>
               </a:rPr>
-              <a:t>Unknown</a:t>
+              <a:t>500+ trademark applications and registrations credited</a:t>
             </a:r>
             <a:endParaRPr lang="en-US" sz="900" dirty="0"/>
           </a:p>
@@ -9403,7 +9403,7 @@
                 <a:ea typeface="Arial" pitchFamily="34" charset="-122"/>
                 <a:cs typeface="Arial" pitchFamily="34" charset="-120"/>
               </a:rPr>
-              <a:t>Entertainment producers, directors, actors, musicians, authors</a:t>
+              <a:t>Entertainment producers, directors, musicians, trademark applicants</a:t>
             </a:r>
             <a:endParaRPr lang="en-US" sz="900" dirty="0"/>
           </a:p>
@@ -9506,7 +9506,7 @@
                 <a:ea typeface="Arial" pitchFamily="34" charset="-122"/>
                 <a:cs typeface="Arial" pitchFamily="34" charset="-120"/>
               </a:rPr>
-              <a:t>Intellectual property and entertainment law expertise</a:t>
+              <a:t>Comprehensive intellectual property and entertainment law services</a:t>
             </a:r>
             <a:endParaRPr lang="en-US" sz="900" dirty="0"/>
           </a:p>
@@ -10465,7 +10465,7 @@
                 <a:ea typeface="Arial" pitchFamily="34" charset="-122"/>
                 <a:cs typeface="Arial" pitchFamily="34" charset="-120"/>
               </a:rPr>
-              <a:t>Product finder, online content marketing</a:t>
+              <a:t>Product finder, technical content, glossary resources</a:t>
             </a:r>
             <a:endParaRPr lang="en-US" sz="900" dirty="0"/>
           </a:p>
@@ -10980,7 +10980,7 @@
                 <a:ea typeface="Arial" pitchFamily="34" charset="-122"/>
                 <a:cs typeface="Arial" pitchFamily="34" charset="-120"/>
               </a:rPr>
-              <a:t>Industrial measurement and vibration monitoring applications</a:t>
+              <a:t>Industrial measurement, vibration monitoring, quality control applications</a:t>
             </a:r>
             <a:endParaRPr lang="en-US" sz="900" dirty="0"/>
           </a:p>
@@ -11083,7 +11083,7 @@
                 <a:ea typeface="Arial" pitchFamily="34" charset="-122"/>
                 <a:cs typeface="Arial" pitchFamily="34" charset="-120"/>
               </a:rPr>
-              <a:t>Precision measurement technology for industrial applications</a:t>
+              <a:t>Advanced piezoelectric sensor measurement technology solutions</a:t>
             </a:r>
             <a:endParaRPr lang="en-US" sz="900" dirty="0"/>
           </a:p>
@@ -11186,7 +11186,7 @@
                 <a:ea typeface="Arial" pitchFamily="34" charset="-122"/>
                 <a:cs typeface="Arial" pitchFamily="34" charset="-120"/>
               </a:rPr>
-              <a:t>March 2021 eso GmbH fully merged with Kistler Instrumente GmbH</a:t>
+              <a:t>eso GmbH merged with Kistler Instrumente GmbH in March 2021</a:t>
             </a:r>
             <a:endParaRPr lang="en-US" sz="900" dirty="0"/>
           </a:p>
@@ -12042,7 +12042,7 @@
                 <a:ea typeface="Arial" pitchFamily="34" charset="-122"/>
                 <a:cs typeface="Arial" pitchFamily="34" charset="-120"/>
               </a:rPr>
-              <a:t>Content marketing, product education pages</a:t>
+              <a:t>Content marketing, product education, technical solutions</a:t>
             </a:r>
             <a:endParaRPr lang="en-US" sz="900" dirty="0"/>
           </a:p>
@@ -12145,7 +12145,7 @@
                 <a:ea typeface="Arial" pitchFamily="34" charset="-122"/>
                 <a:cs typeface="Arial" pitchFamily="34" charset="-120"/>
               </a:rPr>
-              <a:t>Hot runner systems, IntelliGate digital sensor technology, flow control</a:t>
+              <a:t>Hot runner systems, IntelliGate sensor technology, flow control</a:t>
             </a:r>
             <a:endParaRPr lang="en-US" sz="900" dirty="0"/>
           </a:p>
@@ -12248,7 +12248,7 @@
                 <a:ea typeface="Arial" pitchFamily="34" charset="-122"/>
                 <a:cs typeface="Arial" pitchFamily="34" charset="-120"/>
               </a:rPr>
-              <a:t>Unknown</a:t>
+              <a:t>50+ years of customer relationships, proven technology</a:t>
             </a:r>
             <a:endParaRPr lang="en-US" sz="900" dirty="0"/>
           </a:p>
@@ -12557,7 +12557,7 @@
                 <a:ea typeface="Arial" pitchFamily="34" charset="-122"/>
                 <a:cs typeface="Arial" pitchFamily="34" charset="-120"/>
               </a:rPr>
-              <a:t>Plastics injection molding manufacturers seeking efficiency gains</a:t>
+              <a:t>Injection molding manufacturers seeking efficiency improvements</a:t>
             </a:r>
             <a:endParaRPr lang="en-US" sz="900" dirty="0"/>
           </a:p>
@@ -12660,7 +12660,7 @@
                 <a:ea typeface="Arial" pitchFamily="34" charset="-122"/>
                 <a:cs typeface="Arial" pitchFamily="34" charset="-120"/>
               </a:rPr>
-              <a:t>Advanced hot runner solutions for injection molding innovation</a:t>
+              <a:t>Leading hot runner and flow control technology innovation</a:t>
             </a:r>
             <a:endParaRPr lang="en-US" sz="900" dirty="0"/>
           </a:p>
@@ -12763,7 +12763,7 @@
                 <a:ea typeface="Arial" pitchFamily="34" charset="-122"/>
                 <a:cs typeface="Arial" pitchFamily="34" charset="-120"/>
               </a:rPr>
-              <a:t>Launch of new IntelliGate Hot Runner with digital sensor technology</a:t>
+              <a:t>Launched new IntelliGate Hot Runner with digital sensor technology</a:t>
             </a:r>
             <a:endParaRPr lang="en-US" sz="900" dirty="0"/>
           </a:p>
@@ -14480,7 +14480,7 @@
                           <a:ea typeface="Arial" pitchFamily="34" charset="-122"/>
                           <a:cs typeface="Arial" pitchFamily="34" charset="-120"/>
                         </a:rPr>
-                        <a:t>Direct client relationships</a:t>
+                        <a:t>Direct contact</a:t>
                       </a:r>
                       <a:endParaRPr lang="en-US" sz="800" dirty="0">
                         <a:latin typeface="Arial" charset="0"/>
@@ -14822,7 +14822,7 @@
                           <a:ea typeface="Arial" pitchFamily="34" charset="-122"/>
                           <a:cs typeface="Arial" pitchFamily="34" charset="-120"/>
                         </a:rPr>
-                        <a:t>Trademark and copyright legal services with 500+ registrations</a:t>
+                        <a:t>Trademark registration</a:t>
                       </a:r>
                       <a:endParaRPr lang="en-US" sz="800" dirty="0">
                         <a:latin typeface="Arial" charset="0"/>
@@ -15164,7 +15164,7 @@
                           <a:ea typeface="Arial" pitchFamily="34" charset="-122"/>
                           <a:cs typeface="Arial" pitchFamily="34" charset="-120"/>
                         </a:rPr>
-                        <a:t>Unknown</a:t>
+                        <a:t>500+ trademark applications and registrations credited</a:t>
                       </a:r>
                       <a:endParaRPr lang="en-US" sz="800" dirty="0">
                         <a:latin typeface="Arial" charset="0"/>
@@ -15300,7 +15300,7 @@
                           <a:ea typeface="Arial" pitchFamily="34" charset="-122"/>
                           <a:cs typeface="Arial" pitchFamily="34" charset="-120"/>
                         </a:rPr>
-                        <a:t>Unknown</a:t>
+                        <a:t>50+ years of customer relationships</a:t>
                       </a:r>
                       <a:endParaRPr lang="en-US" sz="800" dirty="0">
                         <a:latin typeface="Arial" charset="0"/>
@@ -16258,7 +16258,7 @@
                           <a:ea typeface="Arial" pitchFamily="34" charset="-122"/>
                           <a:cs typeface="Arial" pitchFamily="34" charset="-120"/>
                         </a:rPr>
-                        <a:t>Industrial measurement and vibration monitoring applications</a:t>
+                        <a:t>Industrial measurement</a:t>
                       </a:r>
                       <a:endParaRPr lang="en-US" sz="800" dirty="0">
                         <a:latin typeface="Arial" charset="0"/>
@@ -16326,7 +16326,7 @@
                           <a:ea typeface="Arial" pitchFamily="34" charset="-122"/>
                           <a:cs typeface="Arial" pitchFamily="34" charset="-120"/>
                         </a:rPr>
-                        <a:t>Plastics injection molding manufacturers seeking efficiency gains</a:t>
+                        <a:t>Injection molding manufacturers seeking efficiency improvements</a:t>
                       </a:r>
                       <a:endParaRPr lang="en-US" sz="800" dirty="0">
                         <a:latin typeface="Arial" charset="0"/>
@@ -16532,7 +16532,7 @@
                           <a:ea typeface="Arial" pitchFamily="34" charset="-122"/>
                           <a:cs typeface="Arial" pitchFamily="34" charset="-120"/>
                         </a:rPr>
-                        <a:t>Intellectual property and entertainment law expertise</a:t>
+                        <a:t>Comprehensive intellectual property and entertainment law services</a:t>
                       </a:r>
                       <a:endParaRPr lang="en-US" sz="800" dirty="0">
                         <a:latin typeface="Arial" charset="0"/>
@@ -16600,7 +16600,7 @@
                           <a:ea typeface="Arial" pitchFamily="34" charset="-122"/>
                           <a:cs typeface="Arial" pitchFamily="34" charset="-120"/>
                         </a:rPr>
-                        <a:t>Precision measurement technology for industrial applications</a:t>
+                        <a:t>Advanced piezoelectric sensor measurement technology solutions</a:t>
                       </a:r>
                       <a:endParaRPr lang="en-US" sz="800" dirty="0">
                         <a:latin typeface="Arial" charset="0"/>
@@ -16668,7 +16668,7 @@
                           <a:ea typeface="Arial" pitchFamily="34" charset="-122"/>
                           <a:cs typeface="Arial" pitchFamily="34" charset="-120"/>
                         </a:rPr>
-                        <a:t>Advanced hot runner solutions for injection molding innovation</a:t>
+                        <a:t>Leading hot runner and flow control technology innovation</a:t>
                       </a:r>
                       <a:endParaRPr lang="en-US" sz="800" dirty="0">
                         <a:latin typeface="Arial" charset="0"/>
@@ -16942,7 +16942,7 @@
                           <a:ea typeface="Arial" pitchFamily="34" charset="-122"/>
                           <a:cs typeface="Arial" pitchFamily="34" charset="-120"/>
                         </a:rPr>
-                        <a:t>March 2021 eso GmbH fully merged with Kistler Instrumente GmbH</a:t>
+                        <a:t>eso GmbH merged with Kistler Instrumente GmbH in March 2021</a:t>
                       </a:r>
                       <a:endParaRPr lang="en-US" sz="800" dirty="0">
                         <a:latin typeface="Arial" charset="0"/>
@@ -17010,7 +17010,7 @@
                           <a:ea typeface="Arial" pitchFamily="34" charset="-122"/>
                           <a:cs typeface="Arial" pitchFamily="34" charset="-120"/>
                         </a:rPr>
-                        <a:t>Launch of new IntelliGate Hot Runner with digital sensor technology</a:t>
+                        <a:t>Launched new IntelliGate Hot Runner with digital sensor technology</a:t>
                       </a:r>
                       <a:endParaRPr lang="en-US" sz="800" dirty="0">
                         <a:latin typeface="Arial" charset="0"/>

--- a/mesh_bioplastics_CI_Report.pptx
+++ b/mesh_bioplastics_CI_Report.pptx
@@ -4909,7 +4909,7 @@
                 <a:ea typeface="Arial" pitchFamily="34" charset="-122"/>
                 <a:cs typeface="Arial" pitchFamily="34" charset="-120"/>
               </a:rPr>
-              <a:t>Material Innovation (Sustainability Focus)</a:t>
+              <a:t>Material Science Innovation vs. Process Engineering Focus</a:t>
             </a:r>
             <a:endParaRPr lang="en-US" sz="900" dirty="0"/>
           </a:p>
@@ -4987,7 +4987,7 @@
                 <a:ea typeface="Arial" pitchFamily="34" charset="-122"/>
                 <a:cs typeface="Arial" pitchFamily="34" charset="-120"/>
               </a:rPr>
-              <a:t>Process Intelligence Integration</a:t>
+              <a:t>Integrated Intelligence Embedded vs. Standalone Monitoring</a:t>
             </a:r>
             <a:endParaRPr lang="en-US" sz="900" dirty="0"/>
           </a:p>
@@ -8888,7 +8888,7 @@
                 <a:ea typeface="Arial" pitchFamily="34" charset="-122"/>
                 <a:cs typeface="Arial" pitchFamily="34" charset="-120"/>
               </a:rPr>
-              <a:t>Direct contact, professional referrals</a:t>
+              <a:t>Direct contact, referrals from other attorneys</a:t>
             </a:r>
             <a:endParaRPr lang="en-US" sz="900" dirty="0"/>
           </a:p>
@@ -8991,7 +8991,7 @@
                 <a:ea typeface="Arial" pitchFamily="34" charset="-122"/>
                 <a:cs typeface="Arial" pitchFamily="34" charset="-120"/>
               </a:rPr>
-              <a:t>Trademark registration, copyright, entertainment law expertise</a:t>
+              <a:t>Trademark expertise with 500+ applications and registrations</a:t>
             </a:r>
             <a:endParaRPr lang="en-US" sz="900" dirty="0"/>
           </a:p>
@@ -9094,7 +9094,7 @@
                 <a:ea typeface="Arial" pitchFamily="34" charset="-122"/>
                 <a:cs typeface="Arial" pitchFamily="34" charset="-120"/>
               </a:rPr>
-              <a:t>500+ trademark applications and registrations credited</a:t>
+              <a:t>Avvo 10.0 rating, AV Preeminent Martindale-Hubbell rating</a:t>
             </a:r>
             <a:endParaRPr lang="en-US" sz="900" dirty="0"/>
           </a:p>
@@ -9403,7 +9403,7 @@
                 <a:ea typeface="Arial" pitchFamily="34" charset="-122"/>
                 <a:cs typeface="Arial" pitchFamily="34" charset="-120"/>
               </a:rPr>
-              <a:t>Entertainment producers, directors, musicians, trademark applicants</a:t>
+              <a:t>Entertainment industry producers, directors, actors, musicians</a:t>
             </a:r>
             <a:endParaRPr lang="en-US" sz="900" dirty="0"/>
           </a:p>
@@ -9506,7 +9506,7 @@
                 <a:ea typeface="Arial" pitchFamily="34" charset="-122"/>
                 <a:cs typeface="Arial" pitchFamily="34" charset="-120"/>
               </a:rPr>
-              <a:t>Comprehensive intellectual property and entertainment law services</a:t>
+              <a:t>Intellectual property and entertainment law expertise</a:t>
             </a:r>
             <a:endParaRPr lang="en-US" sz="900" dirty="0"/>
           </a:p>
@@ -9847,7 +9847,7 @@
                 <a:ea typeface="Arial" pitchFamily="34" charset="-122"/>
                 <a:cs typeface="Arial" pitchFamily="34" charset="-120"/>
               </a:rPr>
-              <a:t>Unknown | https://www.kistler.com</a:t>
+              <a:t>Sindelfingen, Germany | https://www.kistler.com</a:t>
             </a:r>
             <a:endParaRPr lang="en-US" sz="900" dirty="0"/>
           </a:p>
@@ -10465,7 +10465,7 @@
                 <a:ea typeface="Arial" pitchFamily="34" charset="-122"/>
                 <a:cs typeface="Arial" pitchFamily="34" charset="-120"/>
               </a:rPr>
-              <a:t>Product finder, technical content, glossary resources</a:t>
+              <a:t>Product finder, glossary content marketing</a:t>
             </a:r>
             <a:endParaRPr lang="en-US" sz="900" dirty="0"/>
           </a:p>
@@ -10568,7 +10568,7 @@
                 <a:ea typeface="Arial" pitchFamily="34" charset="-122"/>
                 <a:cs typeface="Arial" pitchFamily="34" charset="-120"/>
               </a:rPr>
-              <a:t>IEPE piezoelectric sensors, force sensors, accelerometers</a:t>
+              <a:t>IEPE piezoelectric sensors with integrated electronics technology</a:t>
             </a:r>
             <a:endParaRPr lang="en-US" sz="900" dirty="0"/>
           </a:p>
@@ -10980,7 +10980,7 @@
                 <a:ea typeface="Arial" pitchFamily="34" charset="-122"/>
                 <a:cs typeface="Arial" pitchFamily="34" charset="-120"/>
               </a:rPr>
-              <a:t>Industrial measurement, vibration monitoring, quality control applications</a:t>
+              <a:t>Industrial applications requiring force, pressure, acceleration measurement</a:t>
             </a:r>
             <a:endParaRPr lang="en-US" sz="900" dirty="0"/>
           </a:p>
@@ -11083,7 +11083,7 @@
                 <a:ea typeface="Arial" pitchFamily="34" charset="-122"/>
                 <a:cs typeface="Arial" pitchFamily="34" charset="-120"/>
               </a:rPr>
-              <a:t>Advanced piezoelectric sensor measurement technology solutions</a:t>
+              <a:t>Advanced measurement technology for industrial applications</a:t>
             </a:r>
             <a:endParaRPr lang="en-US" sz="900" dirty="0"/>
           </a:p>
@@ -12042,7 +12042,7 @@
                 <a:ea typeface="Arial" pitchFamily="34" charset="-122"/>
                 <a:cs typeface="Arial" pitchFamily="34" charset="-120"/>
               </a:rPr>
-              <a:t>Content marketing, product education, technical solutions</a:t>
+              <a:t>Product pages, landing pages, consultative sales</a:t>
             </a:r>
             <a:endParaRPr lang="en-US" sz="900" dirty="0"/>
           </a:p>
@@ -12145,7 +12145,7 @@
                 <a:ea typeface="Arial" pitchFamily="34" charset="-122"/>
                 <a:cs typeface="Arial" pitchFamily="34" charset="-120"/>
               </a:rPr>
-              <a:t>Hot runner systems, IntelliGate sensor technology, flow control</a:t>
+              <a:t>Hot runner systems with IntelliGate digital sensor technology</a:t>
             </a:r>
             <a:endParaRPr lang="en-US" sz="900" dirty="0"/>
           </a:p>
@@ -12248,7 +12248,7 @@
                 <a:ea typeface="Arial" pitchFamily="34" charset="-122"/>
                 <a:cs typeface="Arial" pitchFamily="34" charset="-120"/>
               </a:rPr>
-              <a:t>50+ years of customer relationships, proven technology</a:t>
+              <a:t>Unknown</a:t>
             </a:r>
             <a:endParaRPr lang="en-US" sz="900" dirty="0"/>
           </a:p>
@@ -12557,7 +12557,7 @@
                 <a:ea typeface="Arial" pitchFamily="34" charset="-122"/>
                 <a:cs typeface="Arial" pitchFamily="34" charset="-120"/>
               </a:rPr>
-              <a:t>Injection molding manufacturers seeking efficiency improvements</a:t>
+              <a:t>Injection molding manufacturers seeking efficiency gains</a:t>
             </a:r>
             <a:endParaRPr lang="en-US" sz="900" dirty="0"/>
           </a:p>
@@ -12660,7 +12660,7 @@
                 <a:ea typeface="Arial" pitchFamily="34" charset="-122"/>
                 <a:cs typeface="Arial" pitchFamily="34" charset="-120"/>
               </a:rPr>
-              <a:t>Leading hot runner and flow control technology innovation</a:t>
+              <a:t>Hot runner solutions for injection molding innovation</a:t>
             </a:r>
             <a:endParaRPr lang="en-US" sz="900" dirty="0"/>
           </a:p>
@@ -14616,7 +14616,7 @@
                           <a:ea typeface="Arial" pitchFamily="34" charset="-122"/>
                           <a:cs typeface="Arial" pitchFamily="34" charset="-120"/>
                         </a:rPr>
-                        <a:t>Content marketing</a:t>
+                        <a:t>Product pages</a:t>
                       </a:r>
                       <a:endParaRPr lang="en-US" sz="800" dirty="0">
                         <a:latin typeface="Arial" charset="0"/>
@@ -14822,7 +14822,7 @@
                           <a:ea typeface="Arial" pitchFamily="34" charset="-122"/>
                           <a:cs typeface="Arial" pitchFamily="34" charset="-120"/>
                         </a:rPr>
-                        <a:t>Trademark registration</a:t>
+                        <a:t>Trademark expertise with 500+ applications and registrations</a:t>
                       </a:r>
                       <a:endParaRPr lang="en-US" sz="800" dirty="0">
                         <a:latin typeface="Arial" charset="0"/>
@@ -14890,7 +14890,7 @@
                           <a:ea typeface="Arial" pitchFamily="34" charset="-122"/>
                           <a:cs typeface="Arial" pitchFamily="34" charset="-120"/>
                         </a:rPr>
-                        <a:t>IEPE piezoelectric sensors</a:t>
+                        <a:t>IEPE piezoelectric sensors with integrated electronics technology</a:t>
                       </a:r>
                       <a:endParaRPr lang="en-US" sz="800" dirty="0">
                         <a:latin typeface="Arial" charset="0"/>
@@ -14958,7 +14958,7 @@
                           <a:ea typeface="Arial" pitchFamily="34" charset="-122"/>
                           <a:cs typeface="Arial" pitchFamily="34" charset="-120"/>
                         </a:rPr>
-                        <a:t>Hot runner systems</a:t>
+                        <a:t>Hot runner systems with IntelliGate digital sensor technology</a:t>
                       </a:r>
                       <a:endParaRPr lang="en-US" sz="800" dirty="0">
                         <a:latin typeface="Arial" charset="0"/>
@@ -15164,7 +15164,7 @@
                           <a:ea typeface="Arial" pitchFamily="34" charset="-122"/>
                           <a:cs typeface="Arial" pitchFamily="34" charset="-120"/>
                         </a:rPr>
-                        <a:t>500+ trademark applications and registrations credited</a:t>
+                        <a:t>Avvo 10.0 rating</a:t>
                       </a:r>
                       <a:endParaRPr lang="en-US" sz="800" dirty="0">
                         <a:latin typeface="Arial" charset="0"/>
@@ -15300,7 +15300,7 @@
                           <a:ea typeface="Arial" pitchFamily="34" charset="-122"/>
                           <a:cs typeface="Arial" pitchFamily="34" charset="-120"/>
                         </a:rPr>
-                        <a:t>50+ years of customer relationships</a:t>
+                        <a:t>Unknown</a:t>
                       </a:r>
                       <a:endParaRPr lang="en-US" sz="800" dirty="0">
                         <a:latin typeface="Arial" charset="0"/>
@@ -16190,7 +16190,7 @@
                           <a:ea typeface="Arial" pitchFamily="34" charset="-122"/>
                           <a:cs typeface="Arial" pitchFamily="34" charset="-120"/>
                         </a:rPr>
-                        <a:t>Entertainment producers</a:t>
+                        <a:t>Entertainment industry producers</a:t>
                       </a:r>
                       <a:endParaRPr lang="en-US" sz="800" dirty="0">
                         <a:latin typeface="Arial" charset="0"/>
@@ -16258,7 +16258,7 @@
                           <a:ea typeface="Arial" pitchFamily="34" charset="-122"/>
                           <a:cs typeface="Arial" pitchFamily="34" charset="-120"/>
                         </a:rPr>
-                        <a:t>Industrial measurement</a:t>
+                        <a:t>Industrial applications requiring force</a:t>
                       </a:r>
                       <a:endParaRPr lang="en-US" sz="800" dirty="0">
                         <a:latin typeface="Arial" charset="0"/>
@@ -16326,7 +16326,7 @@
                           <a:ea typeface="Arial" pitchFamily="34" charset="-122"/>
                           <a:cs typeface="Arial" pitchFamily="34" charset="-120"/>
                         </a:rPr>
-                        <a:t>Injection molding manufacturers seeking efficiency improvements</a:t>
+                        <a:t>Injection molding manufacturers seeking efficiency gains</a:t>
                       </a:r>
                       <a:endParaRPr lang="en-US" sz="800" dirty="0">
                         <a:latin typeface="Arial" charset="0"/>
@@ -16532,7 +16532,7 @@
                           <a:ea typeface="Arial" pitchFamily="34" charset="-122"/>
                           <a:cs typeface="Arial" pitchFamily="34" charset="-120"/>
                         </a:rPr>
-                        <a:t>Comprehensive intellectual property and entertainment law services</a:t>
+                        <a:t>Intellectual property and entertainment law expertise</a:t>
                       </a:r>
                       <a:endParaRPr lang="en-US" sz="800" dirty="0">
                         <a:latin typeface="Arial" charset="0"/>
@@ -16600,7 +16600,7 @@
                           <a:ea typeface="Arial" pitchFamily="34" charset="-122"/>
                           <a:cs typeface="Arial" pitchFamily="34" charset="-120"/>
                         </a:rPr>
-                        <a:t>Advanced piezoelectric sensor measurement technology solutions</a:t>
+                        <a:t>Advanced measurement technology for industrial applications</a:t>
                       </a:r>
                       <a:endParaRPr lang="en-US" sz="800" dirty="0">
                         <a:latin typeface="Arial" charset="0"/>
@@ -16668,7 +16668,7 @@
                           <a:ea typeface="Arial" pitchFamily="34" charset="-122"/>
                           <a:cs typeface="Arial" pitchFamily="34" charset="-120"/>
                         </a:rPr>
-                        <a:t>Leading hot runner and flow control technology innovation</a:t>
+                        <a:t>Hot runner solutions for injection molding innovation</a:t>
                       </a:r>
                       <a:endParaRPr lang="en-US" sz="800" dirty="0">
                         <a:latin typeface="Arial" charset="0"/>

--- a/mesh_bioplastics_CI_Report.pptx
+++ b/mesh_bioplastics_CI_Report.pptx
@@ -4909,7 +4909,7 @@
                 <a:ea typeface="Arial" pitchFamily="34" charset="-122"/>
                 <a:cs typeface="Arial" pitchFamily="34" charset="-120"/>
               </a:rPr>
-              <a:t>Material Science Innovation vs. Process Engineering Focus</a:t>
+              <a:t>Material Sustainability Integration</a:t>
             </a:r>
             <a:endParaRPr lang="en-US" sz="900" dirty="0"/>
           </a:p>
@@ -4987,7 +4987,7 @@
                 <a:ea typeface="Arial" pitchFamily="34" charset="-122"/>
                 <a:cs typeface="Arial" pitchFamily="34" charset="-120"/>
               </a:rPr>
-              <a:t>Integrated Intelligence Embedded vs. Standalone Monitoring</a:t>
+              <a:t>Manufacturing Intelligence Automation</a:t>
             </a:r>
             <a:endParaRPr lang="en-US" sz="900" dirty="0"/>
           </a:p>
@@ -8270,7 +8270,7 @@
                 <a:ea typeface="Arial" pitchFamily="34" charset="-122"/>
                 <a:cs typeface="Arial" pitchFamily="34" charset="-120"/>
               </a:rPr>
-              <a:t>Emeryville, United States | https://www.rjg.com</a:t>
+              <a:t>Emeryville, California, United States | https://www.rjg.com</a:t>
             </a:r>
             <a:endParaRPr lang="en-US" sz="900" dirty="0"/>
           </a:p>
@@ -8888,7 +8888,7 @@
                 <a:ea typeface="Arial" pitchFamily="34" charset="-122"/>
                 <a:cs typeface="Arial" pitchFamily="34" charset="-120"/>
               </a:rPr>
-              <a:t>Direct contact, referrals from other attorneys</a:t>
+              <a:t>Direct client relationships, referrals from other attorneys</a:t>
             </a:r>
             <a:endParaRPr lang="en-US" sz="900" dirty="0"/>
           </a:p>
@@ -8991,7 +8991,7 @@
                 <a:ea typeface="Arial" pitchFamily="34" charset="-122"/>
                 <a:cs typeface="Arial" pitchFamily="34" charset="-120"/>
               </a:rPr>
-              <a:t>Trademark expertise with 500+ applications and registrations</a:t>
+              <a:t>Trademark registration expertise with 500+ applications and registrations</a:t>
             </a:r>
             <a:endParaRPr lang="en-US" sz="900" dirty="0"/>
           </a:p>
@@ -9094,7 +9094,7 @@
                 <a:ea typeface="Arial" pitchFamily="34" charset="-122"/>
                 <a:cs typeface="Arial" pitchFamily="34" charset="-120"/>
               </a:rPr>
-              <a:t>Avvo 10.0 rating, AV Preeminent Martindale-Hubbell rating</a:t>
+              <a:t>Unknown</a:t>
             </a:r>
             <a:endParaRPr lang="en-US" sz="900" dirty="0"/>
           </a:p>
@@ -9506,7 +9506,7 @@
                 <a:ea typeface="Arial" pitchFamily="34" charset="-122"/>
                 <a:cs typeface="Arial" pitchFamily="34" charset="-120"/>
               </a:rPr>
-              <a:t>Intellectual property and entertainment law expertise</a:t>
+              <a:t>Intellectual property and entertainment law expertise for creative industries</a:t>
             </a:r>
             <a:endParaRPr lang="en-US" sz="900" dirty="0"/>
           </a:p>
@@ -10465,7 +10465,7 @@
                 <a:ea typeface="Arial" pitchFamily="34" charset="-122"/>
                 <a:cs typeface="Arial" pitchFamily="34" charset="-120"/>
               </a:rPr>
-              <a:t>Product finder, glossary content marketing</a:t>
+              <a:t>Product finder, industry-specific product pages</a:t>
             </a:r>
             <a:endParaRPr lang="en-US" sz="900" dirty="0"/>
           </a:p>
@@ -10568,7 +10568,7 @@
                 <a:ea typeface="Arial" pitchFamily="34" charset="-122"/>
                 <a:cs typeface="Arial" pitchFamily="34" charset="-120"/>
               </a:rPr>
-              <a:t>IEPE piezoelectric sensors with integrated electronics technology</a:t>
+              <a:t>IEPE piezoelectric sensors with integrated electronics for industrial measurement</a:t>
             </a:r>
             <a:endParaRPr lang="en-US" sz="900" dirty="0"/>
           </a:p>
@@ -10980,7 +10980,7 @@
                 <a:ea typeface="Arial" pitchFamily="34" charset="-122"/>
                 <a:cs typeface="Arial" pitchFamily="34" charset="-120"/>
               </a:rPr>
-              <a:t>Industrial applications requiring force, pressure, acceleration measurement</a:t>
+              <a:t>Industrial manufacturers using force, pressure, acceleration measurement</a:t>
             </a:r>
             <a:endParaRPr lang="en-US" sz="900" dirty="0"/>
           </a:p>
@@ -11083,7 +11083,7 @@
                 <a:ea typeface="Arial" pitchFamily="34" charset="-122"/>
                 <a:cs typeface="Arial" pitchFamily="34" charset="-120"/>
               </a:rPr>
-              <a:t>Advanced measurement technology for industrial applications</a:t>
+              <a:t>Precision measurement technology for industrial applications and road safety</a:t>
             </a:r>
             <a:endParaRPr lang="en-US" sz="900" dirty="0"/>
           </a:p>
@@ -11186,7 +11186,7 @@
                 <a:ea typeface="Arial" pitchFamily="34" charset="-122"/>
                 <a:cs typeface="Arial" pitchFamily="34" charset="-120"/>
               </a:rPr>
-              <a:t>eso GmbH merged with Kistler Instrumente GmbH in March 2021</a:t>
+              <a:t>Merged eso GmbH with Kistler Instrumente GmbH in March 2021</a:t>
             </a:r>
             <a:endParaRPr lang="en-US" sz="900" dirty="0"/>
           </a:p>
@@ -12042,7 +12042,7 @@
                 <a:ea typeface="Arial" pitchFamily="34" charset="-122"/>
                 <a:cs typeface="Arial" pitchFamily="34" charset="-120"/>
               </a:rPr>
-              <a:t>Product pages, landing pages, consultative sales</a:t>
+              <a:t>Product pages, consultative approach, industry-specific solutions</a:t>
             </a:r>
             <a:endParaRPr lang="en-US" sz="900" dirty="0"/>
           </a:p>
@@ -12145,7 +12145,7 @@
                 <a:ea typeface="Arial" pitchFamily="34" charset="-122"/>
                 <a:cs typeface="Arial" pitchFamily="34" charset="-120"/>
               </a:rPr>
-              <a:t>Hot runner systems with IntelliGate digital sensor technology</a:t>
+              <a:t>Hot runner systems with digital sensor technology for injection molding</a:t>
             </a:r>
             <a:endParaRPr lang="en-US" sz="900" dirty="0"/>
           </a:p>
@@ -12557,7 +12557,7 @@
                 <a:ea typeface="Arial" pitchFamily="34" charset="-122"/>
                 <a:cs typeface="Arial" pitchFamily="34" charset="-120"/>
               </a:rPr>
-              <a:t>Injection molding manufacturers seeking efficiency gains</a:t>
+              <a:t>Injection molding manufacturers seeking efficiency and quality improvements</a:t>
             </a:r>
             <a:endParaRPr lang="en-US" sz="900" dirty="0"/>
           </a:p>
@@ -12660,7 +12660,7 @@
                 <a:ea typeface="Arial" pitchFamily="34" charset="-122"/>
                 <a:cs typeface="Arial" pitchFamily="34" charset="-120"/>
               </a:rPr>
-              <a:t>Hot runner solutions for injection molding innovation</a:t>
+              <a:t>Hot runner solutions and flow control technology for injection molding</a:t>
             </a:r>
             <a:endParaRPr lang="en-US" sz="900" dirty="0"/>
           </a:p>
@@ -14480,7 +14480,7 @@
                           <a:ea typeface="Arial" pitchFamily="34" charset="-122"/>
                           <a:cs typeface="Arial" pitchFamily="34" charset="-120"/>
                         </a:rPr>
-                        <a:t>Direct contact</a:t>
+                        <a:t>Direct client relationships</a:t>
                       </a:r>
                       <a:endParaRPr lang="en-US" sz="800" dirty="0">
                         <a:latin typeface="Arial" charset="0"/>
@@ -14822,7 +14822,7 @@
                           <a:ea typeface="Arial" pitchFamily="34" charset="-122"/>
                           <a:cs typeface="Arial" pitchFamily="34" charset="-120"/>
                         </a:rPr>
-                        <a:t>Trademark expertise with 500+ applications and registrations</a:t>
+                        <a:t>Trademark registration expertise with 500+ applications and registrations</a:t>
                       </a:r>
                       <a:endParaRPr lang="en-US" sz="800" dirty="0">
                         <a:latin typeface="Arial" charset="0"/>
@@ -14890,7 +14890,7 @@
                           <a:ea typeface="Arial" pitchFamily="34" charset="-122"/>
                           <a:cs typeface="Arial" pitchFamily="34" charset="-120"/>
                         </a:rPr>
-                        <a:t>IEPE piezoelectric sensors with integrated electronics technology</a:t>
+                        <a:t>IEPE piezoelectric sensors with integrated electronics for industrial measurement</a:t>
                       </a:r>
                       <a:endParaRPr lang="en-US" sz="800" dirty="0">
                         <a:latin typeface="Arial" charset="0"/>
@@ -14958,7 +14958,7 @@
                           <a:ea typeface="Arial" pitchFamily="34" charset="-122"/>
                           <a:cs typeface="Arial" pitchFamily="34" charset="-120"/>
                         </a:rPr>
-                        <a:t>Hot runner systems with IntelliGate digital sensor technology</a:t>
+                        <a:t>Hot runner systems with digital sensor technology for injection molding</a:t>
                       </a:r>
                       <a:endParaRPr lang="en-US" sz="800" dirty="0">
                         <a:latin typeface="Arial" charset="0"/>
@@ -15164,7 +15164,7 @@
                           <a:ea typeface="Arial" pitchFamily="34" charset="-122"/>
                           <a:cs typeface="Arial" pitchFamily="34" charset="-120"/>
                         </a:rPr>
-                        <a:t>Avvo 10.0 rating</a:t>
+                        <a:t>Unknown</a:t>
                       </a:r>
                       <a:endParaRPr lang="en-US" sz="800" dirty="0">
                         <a:latin typeface="Arial" charset="0"/>
@@ -16258,7 +16258,7 @@
                           <a:ea typeface="Arial" pitchFamily="34" charset="-122"/>
                           <a:cs typeface="Arial" pitchFamily="34" charset="-120"/>
                         </a:rPr>
-                        <a:t>Industrial applications requiring force</a:t>
+                        <a:t>Industrial manufacturers using force</a:t>
                       </a:r>
                       <a:endParaRPr lang="en-US" sz="800" dirty="0">
                         <a:latin typeface="Arial" charset="0"/>
@@ -16326,7 +16326,7 @@
                           <a:ea typeface="Arial" pitchFamily="34" charset="-122"/>
                           <a:cs typeface="Arial" pitchFamily="34" charset="-120"/>
                         </a:rPr>
-                        <a:t>Injection molding manufacturers seeking efficiency gains</a:t>
+                        <a:t>Injection molding manufacturers seeking efficiency and quality improvements</a:t>
                       </a:r>
                       <a:endParaRPr lang="en-US" sz="800" dirty="0">
                         <a:latin typeface="Arial" charset="0"/>
@@ -16532,7 +16532,7 @@
                           <a:ea typeface="Arial" pitchFamily="34" charset="-122"/>
                           <a:cs typeface="Arial" pitchFamily="34" charset="-120"/>
                         </a:rPr>
-                        <a:t>Intellectual property and entertainment law expertise</a:t>
+                        <a:t>Intellectual property and entertainment law expertise for creative industries</a:t>
                       </a:r>
                       <a:endParaRPr lang="en-US" sz="800" dirty="0">
                         <a:latin typeface="Arial" charset="0"/>
@@ -16600,7 +16600,7 @@
                           <a:ea typeface="Arial" pitchFamily="34" charset="-122"/>
                           <a:cs typeface="Arial" pitchFamily="34" charset="-120"/>
                         </a:rPr>
-                        <a:t>Advanced measurement technology for industrial applications</a:t>
+                        <a:t>Precision measurement technology for industrial applications and road safety</a:t>
                       </a:r>
                       <a:endParaRPr lang="en-US" sz="800" dirty="0">
                         <a:latin typeface="Arial" charset="0"/>
@@ -16668,7 +16668,7 @@
                           <a:ea typeface="Arial" pitchFamily="34" charset="-122"/>
                           <a:cs typeface="Arial" pitchFamily="34" charset="-120"/>
                         </a:rPr>
-                        <a:t>Hot runner solutions for injection molding innovation</a:t>
+                        <a:t>Hot runner solutions and flow control technology for injection molding</a:t>
                       </a:r>
                       <a:endParaRPr lang="en-US" sz="800" dirty="0">
                         <a:latin typeface="Arial" charset="0"/>
@@ -16942,7 +16942,7 @@
                           <a:ea typeface="Arial" pitchFamily="34" charset="-122"/>
                           <a:cs typeface="Arial" pitchFamily="34" charset="-120"/>
                         </a:rPr>
-                        <a:t>eso GmbH merged with Kistler Instrumente GmbH in March 2021</a:t>
+                        <a:t>Merged eso GmbH with Kistler Instrumente GmbH in March 2021</a:t>
                       </a:r>
                       <a:endParaRPr lang="en-US" sz="800" dirty="0">
                         <a:latin typeface="Arial" charset="0"/>

--- a/mesh_bioplastics_CI_Report.pptx
+++ b/mesh_bioplastics_CI_Report.pptx
@@ -4909,7 +4909,7 @@
                 <a:ea typeface="Arial" pitchFamily="34" charset="-122"/>
                 <a:cs typeface="Arial" pitchFamily="34" charset="-120"/>
               </a:rPr>
-              <a:t>Material Sustainability Integration</a:t>
+              <a:t>Material Science Innovation vs. Equipment/Process Innovation</a:t>
             </a:r>
             <a:endParaRPr lang="en-US" sz="900" dirty="0"/>
           </a:p>
@@ -4987,7 +4987,7 @@
                 <a:ea typeface="Arial" pitchFamily="34" charset="-122"/>
                 <a:cs typeface="Arial" pitchFamily="34" charset="-120"/>
               </a:rPr>
-              <a:t>Manufacturing Intelligence Automation</a:t>
+              <a:t>Sustainability Focus vs. Technical Performance Focus</a:t>
             </a:r>
             <a:endParaRPr lang="en-US" sz="900" dirty="0"/>
           </a:p>
@@ -8270,7 +8270,7 @@
                 <a:ea typeface="Arial" pitchFamily="34" charset="-122"/>
                 <a:cs typeface="Arial" pitchFamily="34" charset="-120"/>
               </a:rPr>
-              <a:t>Emeryville, California, United States | https://www.rjg.com</a:t>
+              <a:t>Emeryville, United States | https://www.rjg.com</a:t>
             </a:r>
             <a:endParaRPr lang="en-US" sz="900" dirty="0"/>
           </a:p>
@@ -8888,7 +8888,7 @@
                 <a:ea typeface="Arial" pitchFamily="34" charset="-122"/>
                 <a:cs typeface="Arial" pitchFamily="34" charset="-120"/>
               </a:rPr>
-              <a:t>Direct client relationships, referrals from other attorneys</a:t>
+              <a:t>Direct client relationships, attorney referrals</a:t>
             </a:r>
             <a:endParaRPr lang="en-US" sz="900" dirty="0"/>
           </a:p>
@@ -8991,7 +8991,7 @@
                 <a:ea typeface="Arial" pitchFamily="34" charset="-122"/>
                 <a:cs typeface="Arial" pitchFamily="34" charset="-120"/>
               </a:rPr>
-              <a:t>Trademark registration expertise with 500+ applications and registrations</a:t>
+              <a:t>Trademark registration, copyright, entertainment law expertise</a:t>
             </a:r>
             <a:endParaRPr lang="en-US" sz="900" dirty="0"/>
           </a:p>
@@ -9094,7 +9094,7 @@
                 <a:ea typeface="Arial" pitchFamily="34" charset="-122"/>
                 <a:cs typeface="Arial" pitchFamily="34" charset="-120"/>
               </a:rPr>
-              <a:t>Unknown</a:t>
+              <a:t>Over 500 trademark applications and registrations credited</a:t>
             </a:r>
             <a:endParaRPr lang="en-US" sz="900" dirty="0"/>
           </a:p>
@@ -9403,7 +9403,7 @@
                 <a:ea typeface="Arial" pitchFamily="34" charset="-122"/>
                 <a:cs typeface="Arial" pitchFamily="34" charset="-120"/>
               </a:rPr>
-              <a:t>Entertainment industry producers, directors, actors, musicians</a:t>
+              <a:t>Entertainment producers, directors, actors, musicians, attorneys</a:t>
             </a:r>
             <a:endParaRPr lang="en-US" sz="900" dirty="0"/>
           </a:p>
@@ -9506,7 +9506,7 @@
                 <a:ea typeface="Arial" pitchFamily="34" charset="-122"/>
                 <a:cs typeface="Arial" pitchFamily="34" charset="-120"/>
               </a:rPr>
-              <a:t>Intellectual property and entertainment law expertise for creative industries</a:t>
+              <a:t>Intellectual property law and entertainment legal services</a:t>
             </a:r>
             <a:endParaRPr lang="en-US" sz="900" dirty="0"/>
           </a:p>
@@ -10465,7 +10465,7 @@
                 <a:ea typeface="Arial" pitchFamily="34" charset="-122"/>
                 <a:cs typeface="Arial" pitchFamily="34" charset="-120"/>
               </a:rPr>
-              <a:t>Product finder, industry-specific product pages</a:t>
+              <a:t>Product finder, industrial direct sales</a:t>
             </a:r>
             <a:endParaRPr lang="en-US" sz="900" dirty="0"/>
           </a:p>
@@ -10568,7 +10568,7 @@
                 <a:ea typeface="Arial" pitchFamily="34" charset="-122"/>
                 <a:cs typeface="Arial" pitchFamily="34" charset="-120"/>
               </a:rPr>
-              <a:t>IEPE piezoelectric sensors with integrated electronics for industrial measurement</a:t>
+              <a:t>IEPE piezoelectric sensors, force sensors, accelerometers technology</a:t>
             </a:r>
             <a:endParaRPr lang="en-US" sz="900" dirty="0"/>
           </a:p>
@@ -10980,7 +10980,7 @@
                 <a:ea typeface="Arial" pitchFamily="34" charset="-122"/>
                 <a:cs typeface="Arial" pitchFamily="34" charset="-120"/>
               </a:rPr>
-              <a:t>Industrial manufacturers using force, pressure, acceleration measurement</a:t>
+              <a:t>Industrial measurement, vibration monitoring, force measurement applications</a:t>
             </a:r>
             <a:endParaRPr lang="en-US" sz="900" dirty="0"/>
           </a:p>
@@ -11083,7 +11083,7 @@
                 <a:ea typeface="Arial" pitchFamily="34" charset="-122"/>
                 <a:cs typeface="Arial" pitchFamily="34" charset="-120"/>
               </a:rPr>
-              <a:t>Precision measurement technology for industrial applications and road safety</a:t>
+              <a:t>Precision measurement technology for industrial applications</a:t>
             </a:r>
             <a:endParaRPr lang="en-US" sz="900" dirty="0"/>
           </a:p>
@@ -11186,7 +11186,7 @@
                 <a:ea typeface="Arial" pitchFamily="34" charset="-122"/>
                 <a:cs typeface="Arial" pitchFamily="34" charset="-120"/>
               </a:rPr>
-              <a:t>Merged eso GmbH with Kistler Instrumente GmbH in March 2021</a:t>
+              <a:t>Merged eso GmbH into Kistler Instrumente GmbH in March 2021</a:t>
             </a:r>
             <a:endParaRPr lang="en-US" sz="900" dirty="0"/>
           </a:p>
@@ -11836,7 +11836,7 @@
                 <a:ea typeface="Arial" pitchFamily="34" charset="-122"/>
                 <a:cs typeface="Arial" pitchFamily="34" charset="-120"/>
               </a:rPr>
-              <a:t>World's leading manufacturer of hot runner systems</a:t>
+              <a:t>World leading manufacturer of hot runner systems</a:t>
             </a:r>
             <a:endParaRPr lang="en-US" sz="900" dirty="0"/>
           </a:p>
@@ -12042,7 +12042,7 @@
                 <a:ea typeface="Arial" pitchFamily="34" charset="-122"/>
                 <a:cs typeface="Arial" pitchFamily="34" charset="-120"/>
               </a:rPr>
-              <a:t>Product pages, consultative approach, industry-specific solutions</a:t>
+              <a:t>Direct consultative sales, product education content</a:t>
             </a:r>
             <a:endParaRPr lang="en-US" sz="900" dirty="0"/>
           </a:p>
@@ -12145,7 +12145,7 @@
                 <a:ea typeface="Arial" pitchFamily="34" charset="-122"/>
                 <a:cs typeface="Arial" pitchFamily="34" charset="-120"/>
               </a:rPr>
-              <a:t>Hot runner systems with digital sensor technology for injection molding</a:t>
+              <a:t>Hot runner systems, IntelliGate digital sensor technology, flow control</a:t>
             </a:r>
             <a:endParaRPr lang="en-US" sz="900" dirty="0"/>
           </a:p>
@@ -12248,7 +12248,7 @@
                 <a:ea typeface="Arial" pitchFamily="34" charset="-122"/>
                 <a:cs typeface="Arial" pitchFamily="34" charset="-120"/>
               </a:rPr>
-              <a:t>Unknown</a:t>
+              <a:t>50+ years development history, long-standing customer relationships</a:t>
             </a:r>
             <a:endParaRPr lang="en-US" sz="900" dirty="0"/>
           </a:p>
@@ -12557,7 +12557,7 @@
                 <a:ea typeface="Arial" pitchFamily="34" charset="-122"/>
                 <a:cs typeface="Arial" pitchFamily="34" charset="-120"/>
               </a:rPr>
-              <a:t>Injection molding manufacturers seeking efficiency and quality improvements</a:t>
+              <a:t>Plastics injection molding manufacturers, mold designers</a:t>
             </a:r>
             <a:endParaRPr lang="en-US" sz="900" dirty="0"/>
           </a:p>
@@ -12660,7 +12660,7 @@
                 <a:ea typeface="Arial" pitchFamily="34" charset="-122"/>
                 <a:cs typeface="Arial" pitchFamily="34" charset="-120"/>
               </a:rPr>
-              <a:t>Hot runner solutions and flow control technology for injection molding</a:t>
+              <a:t>Mold a better tomorrow with advanced hot runner solutions</a:t>
             </a:r>
             <a:endParaRPr lang="en-US" sz="900" dirty="0"/>
           </a:p>
@@ -13932,7 +13932,7 @@
                           <a:ea typeface="Arial" pitchFamily="34" charset="-122"/>
                           <a:cs typeface="Arial" pitchFamily="34" charset="-120"/>
                         </a:rPr>
-                        <a:t>World's leading manufacturer of hot runner systems</a:t>
+                        <a:t>World leading manufacturer of hot runner systems</a:t>
                       </a:r>
                       <a:endParaRPr lang="en-US" sz="800" dirty="0">
                         <a:latin typeface="Arial" charset="0"/>
@@ -14616,7 +14616,7 @@
                           <a:ea typeface="Arial" pitchFamily="34" charset="-122"/>
                           <a:cs typeface="Arial" pitchFamily="34" charset="-120"/>
                         </a:rPr>
-                        <a:t>Product pages</a:t>
+                        <a:t>Direct consultative sales</a:t>
                       </a:r>
                       <a:endParaRPr lang="en-US" sz="800" dirty="0">
                         <a:latin typeface="Arial" charset="0"/>
@@ -14822,7 +14822,7 @@
                           <a:ea typeface="Arial" pitchFamily="34" charset="-122"/>
                           <a:cs typeface="Arial" pitchFamily="34" charset="-120"/>
                         </a:rPr>
-                        <a:t>Trademark registration expertise with 500+ applications and registrations</a:t>
+                        <a:t>Trademark registration</a:t>
                       </a:r>
                       <a:endParaRPr lang="en-US" sz="800" dirty="0">
                         <a:latin typeface="Arial" charset="0"/>
@@ -14890,7 +14890,7 @@
                           <a:ea typeface="Arial" pitchFamily="34" charset="-122"/>
                           <a:cs typeface="Arial" pitchFamily="34" charset="-120"/>
                         </a:rPr>
-                        <a:t>IEPE piezoelectric sensors with integrated electronics for industrial measurement</a:t>
+                        <a:t>IEPE piezoelectric sensors</a:t>
                       </a:r>
                       <a:endParaRPr lang="en-US" sz="800" dirty="0">
                         <a:latin typeface="Arial" charset="0"/>
@@ -14958,7 +14958,7 @@
                           <a:ea typeface="Arial" pitchFamily="34" charset="-122"/>
                           <a:cs typeface="Arial" pitchFamily="34" charset="-120"/>
                         </a:rPr>
-                        <a:t>Hot runner systems with digital sensor technology for injection molding</a:t>
+                        <a:t>Hot runner systems</a:t>
                       </a:r>
                       <a:endParaRPr lang="en-US" sz="800" dirty="0">
                         <a:latin typeface="Arial" charset="0"/>
@@ -15164,7 +15164,7 @@
                           <a:ea typeface="Arial" pitchFamily="34" charset="-122"/>
                           <a:cs typeface="Arial" pitchFamily="34" charset="-120"/>
                         </a:rPr>
-                        <a:t>Unknown</a:t>
+                        <a:t>Over 500 trademark applications and registrations credited</a:t>
                       </a:r>
                       <a:endParaRPr lang="en-US" sz="800" dirty="0">
                         <a:latin typeface="Arial" charset="0"/>
@@ -15300,7 +15300,7 @@
                           <a:ea typeface="Arial" pitchFamily="34" charset="-122"/>
                           <a:cs typeface="Arial" pitchFamily="34" charset="-120"/>
                         </a:rPr>
-                        <a:t>Unknown</a:t>
+                        <a:t>50+ years development history</a:t>
                       </a:r>
                       <a:endParaRPr lang="en-US" sz="800" dirty="0">
                         <a:latin typeface="Arial" charset="0"/>
@@ -16190,7 +16190,7 @@
                           <a:ea typeface="Arial" pitchFamily="34" charset="-122"/>
                           <a:cs typeface="Arial" pitchFamily="34" charset="-120"/>
                         </a:rPr>
-                        <a:t>Entertainment industry producers</a:t>
+                        <a:t>Entertainment producers</a:t>
                       </a:r>
                       <a:endParaRPr lang="en-US" sz="800" dirty="0">
                         <a:latin typeface="Arial" charset="0"/>
@@ -16258,7 +16258,7 @@
                           <a:ea typeface="Arial" pitchFamily="34" charset="-122"/>
                           <a:cs typeface="Arial" pitchFamily="34" charset="-120"/>
                         </a:rPr>
-                        <a:t>Industrial manufacturers using force</a:t>
+                        <a:t>Industrial measurement</a:t>
                       </a:r>
                       <a:endParaRPr lang="en-US" sz="800" dirty="0">
                         <a:latin typeface="Arial" charset="0"/>
@@ -16326,7 +16326,7 @@
                           <a:ea typeface="Arial" pitchFamily="34" charset="-122"/>
                           <a:cs typeface="Arial" pitchFamily="34" charset="-120"/>
                         </a:rPr>
-                        <a:t>Injection molding manufacturers seeking efficiency and quality improvements</a:t>
+                        <a:t>Plastics injection molding manufacturers</a:t>
                       </a:r>
                       <a:endParaRPr lang="en-US" sz="800" dirty="0">
                         <a:latin typeface="Arial" charset="0"/>
@@ -16532,7 +16532,7 @@
                           <a:ea typeface="Arial" pitchFamily="34" charset="-122"/>
                           <a:cs typeface="Arial" pitchFamily="34" charset="-120"/>
                         </a:rPr>
-                        <a:t>Intellectual property and entertainment law expertise for creative industries</a:t>
+                        <a:t>Intellectual property law and entertainment legal services</a:t>
                       </a:r>
                       <a:endParaRPr lang="en-US" sz="800" dirty="0">
                         <a:latin typeface="Arial" charset="0"/>
@@ -16600,7 +16600,7 @@
                           <a:ea typeface="Arial" pitchFamily="34" charset="-122"/>
                           <a:cs typeface="Arial" pitchFamily="34" charset="-120"/>
                         </a:rPr>
-                        <a:t>Precision measurement technology for industrial applications and road safety</a:t>
+                        <a:t>Precision measurement technology for industrial applications</a:t>
                       </a:r>
                       <a:endParaRPr lang="en-US" sz="800" dirty="0">
                         <a:latin typeface="Arial" charset="0"/>
@@ -16668,7 +16668,7 @@
                           <a:ea typeface="Arial" pitchFamily="34" charset="-122"/>
                           <a:cs typeface="Arial" pitchFamily="34" charset="-120"/>
                         </a:rPr>
-                        <a:t>Hot runner solutions and flow control technology for injection molding</a:t>
+                        <a:t>Mold a better tomorrow with advanced hot runner solutions</a:t>
                       </a:r>
                       <a:endParaRPr lang="en-US" sz="800" dirty="0">
                         <a:latin typeface="Arial" charset="0"/>
@@ -16942,7 +16942,7 @@
                           <a:ea typeface="Arial" pitchFamily="34" charset="-122"/>
                           <a:cs typeface="Arial" pitchFamily="34" charset="-120"/>
                         </a:rPr>
-                        <a:t>Merged eso GmbH with Kistler Instrumente GmbH in March 2021</a:t>
+                        <a:t>Merged eso GmbH into Kistler Instrumente GmbH in March 2021</a:t>
                       </a:r>
                       <a:endParaRPr lang="en-US" sz="800" dirty="0">
                         <a:latin typeface="Arial" charset="0"/>

--- a/mesh_bioplastics_CI_Report.pptx
+++ b/mesh_bioplastics_CI_Report.pptx
@@ -4909,7 +4909,7 @@
                 <a:ea typeface="Arial" pitchFamily="34" charset="-122"/>
                 <a:cs typeface="Arial" pitchFamily="34" charset="-120"/>
               </a:rPr>
-              <a:t>Material Science Innovation vs. Equipment/Process Innovation</a:t>
+              <a:t>Material Innovation vs. Process Optimization Focus</a:t>
             </a:r>
             <a:endParaRPr lang="en-US" sz="900" dirty="0"/>
           </a:p>
@@ -4987,7 +4987,7 @@
                 <a:ea typeface="Arial" pitchFamily="34" charset="-122"/>
                 <a:cs typeface="Arial" pitchFamily="34" charset="-120"/>
               </a:rPr>
-              <a:t>Sustainability Focus vs. Technical Performance Focus</a:t>
+              <a:t>Integrated Intelligence vs. Standalone Functionality</a:t>
             </a:r>
             <a:endParaRPr lang="en-US" sz="900" dirty="0"/>
           </a:p>
@@ -8270,7 +8270,7 @@
                 <a:ea typeface="Arial" pitchFamily="34" charset="-122"/>
                 <a:cs typeface="Arial" pitchFamily="34" charset="-120"/>
               </a:rPr>
-              <a:t>Emeryville, United States | https://www.rjg.com</a:t>
+              <a:t>Emeryville, California, United States | https://www.rjg.com</a:t>
             </a:r>
             <a:endParaRPr lang="en-US" sz="900" dirty="0"/>
           </a:p>
@@ -8888,7 +8888,7 @@
                 <a:ea typeface="Arial" pitchFamily="34" charset="-122"/>
                 <a:cs typeface="Arial" pitchFamily="34" charset="-120"/>
               </a:rPr>
-              <a:t>Direct client relationships, attorney referrals</a:t>
+              <a:t>Direct contact, professional referrals</a:t>
             </a:r>
             <a:endParaRPr lang="en-US" sz="900" dirty="0"/>
           </a:p>
@@ -8991,7 +8991,7 @@
                 <a:ea typeface="Arial" pitchFamily="34" charset="-122"/>
                 <a:cs typeface="Arial" pitchFamily="34" charset="-120"/>
               </a:rPr>
-              <a:t>Trademark registration, copyright, entertainment law expertise</a:t>
+              <a:t>Trademark, copyright, entertainment law expertise</a:t>
             </a:r>
             <a:endParaRPr lang="en-US" sz="900" dirty="0"/>
           </a:p>
@@ -9094,7 +9094,7 @@
                 <a:ea typeface="Arial" pitchFamily="34" charset="-122"/>
                 <a:cs typeface="Arial" pitchFamily="34" charset="-120"/>
               </a:rPr>
-              <a:t>Over 500 trademark applications and registrations credited</a:t>
+              <a:t>500+ trademark applications and registrations</a:t>
             </a:r>
             <a:endParaRPr lang="en-US" sz="900" dirty="0"/>
           </a:p>
@@ -9403,7 +9403,7 @@
                 <a:ea typeface="Arial" pitchFamily="34" charset="-122"/>
                 <a:cs typeface="Arial" pitchFamily="34" charset="-120"/>
               </a:rPr>
-              <a:t>Entertainment producers, directors, actors, musicians, attorneys</a:t>
+              <a:t>Entertainment producers, directors, actors, musicians</a:t>
             </a:r>
             <a:endParaRPr lang="en-US" sz="900" dirty="0"/>
           </a:p>
@@ -9506,7 +9506,7 @@
                 <a:ea typeface="Arial" pitchFamily="34" charset="-122"/>
                 <a:cs typeface="Arial" pitchFamily="34" charset="-120"/>
               </a:rPr>
-              <a:t>Intellectual property law and entertainment legal services</a:t>
+              <a:t>Intellectual property and entertainment law counsel</a:t>
             </a:r>
             <a:endParaRPr lang="en-US" sz="900" dirty="0"/>
           </a:p>
@@ -10465,7 +10465,7 @@
                 <a:ea typeface="Arial" pitchFamily="34" charset="-122"/>
                 <a:cs typeface="Arial" pitchFamily="34" charset="-120"/>
               </a:rPr>
-              <a:t>Product finder, industrial direct sales</a:t>
+              <a:t>Product finder, technical documentation</a:t>
             </a:r>
             <a:endParaRPr lang="en-US" sz="900" dirty="0"/>
           </a:p>
@@ -10568,7 +10568,7 @@
                 <a:ea typeface="Arial" pitchFamily="34" charset="-122"/>
                 <a:cs typeface="Arial" pitchFamily="34" charset="-120"/>
               </a:rPr>
-              <a:t>IEPE piezoelectric sensors, force sensors, accelerometers technology</a:t>
+              <a:t>IEPE/ICP piezoelectric sensors with integrated electronics</a:t>
             </a:r>
             <a:endParaRPr lang="en-US" sz="900" dirty="0"/>
           </a:p>
@@ -10980,7 +10980,7 @@
                 <a:ea typeface="Arial" pitchFamily="34" charset="-122"/>
                 <a:cs typeface="Arial" pitchFamily="34" charset="-120"/>
               </a:rPr>
-              <a:t>Industrial measurement, vibration monitoring, force measurement applications</a:t>
+              <a:t>Industrial measurement applications requiring piezoelectric sensors</a:t>
             </a:r>
             <a:endParaRPr lang="en-US" sz="900" dirty="0"/>
           </a:p>
@@ -11186,7 +11186,7 @@
                 <a:ea typeface="Arial" pitchFamily="34" charset="-122"/>
                 <a:cs typeface="Arial" pitchFamily="34" charset="-120"/>
               </a:rPr>
-              <a:t>Merged eso GmbH into Kistler Instrumente GmbH in March 2021</a:t>
+              <a:t>eso GmbH merged with Kistler Instrumente GmbH in March 2021</a:t>
             </a:r>
             <a:endParaRPr lang="en-US" sz="900" dirty="0"/>
           </a:p>
@@ -11836,7 +11836,7 @@
                 <a:ea typeface="Arial" pitchFamily="34" charset="-122"/>
                 <a:cs typeface="Arial" pitchFamily="34" charset="-120"/>
               </a:rPr>
-              <a:t>World leading manufacturer of hot runner systems</a:t>
+              <a:t>World's leading manufacturer of hot runner systems</a:t>
             </a:r>
             <a:endParaRPr lang="en-US" sz="900" dirty="0"/>
           </a:p>
@@ -12042,7 +12042,7 @@
                 <a:ea typeface="Arial" pitchFamily="34" charset="-122"/>
                 <a:cs typeface="Arial" pitchFamily="34" charset="-120"/>
               </a:rPr>
-              <a:t>Direct consultative sales, product education content</a:t>
+              <a:t>Content marketing, product demonstrations, consultative sales</a:t>
             </a:r>
             <a:endParaRPr lang="en-US" sz="900" dirty="0"/>
           </a:p>
@@ -12145,7 +12145,7 @@
                 <a:ea typeface="Arial" pitchFamily="34" charset="-122"/>
                 <a:cs typeface="Arial" pitchFamily="34" charset="-120"/>
               </a:rPr>
-              <a:t>Hot runner systems, IntelliGate digital sensor technology, flow control</a:t>
+              <a:t>Hot runner systems, IntelliGate, flow control technology</a:t>
             </a:r>
             <a:endParaRPr lang="en-US" sz="900" dirty="0"/>
           </a:p>
@@ -12248,7 +12248,7 @@
                 <a:ea typeface="Arial" pitchFamily="34" charset="-122"/>
                 <a:cs typeface="Arial" pitchFamily="34" charset="-120"/>
               </a:rPr>
-              <a:t>50+ years development history, long-standing customer relationships</a:t>
+              <a:t>50+ years developing hot runner technology</a:t>
             </a:r>
             <a:endParaRPr lang="en-US" sz="900" dirty="0"/>
           </a:p>
@@ -12557,7 +12557,7 @@
                 <a:ea typeface="Arial" pitchFamily="34" charset="-122"/>
                 <a:cs typeface="Arial" pitchFamily="34" charset="-120"/>
               </a:rPr>
-              <a:t>Plastics injection molding manufacturers, mold designers</a:t>
+              <a:t>Plastic injection molding manufacturers seeking efficiency</a:t>
             </a:r>
             <a:endParaRPr lang="en-US" sz="900" dirty="0"/>
           </a:p>
@@ -12660,7 +12660,7 @@
                 <a:ea typeface="Arial" pitchFamily="34" charset="-122"/>
                 <a:cs typeface="Arial" pitchFamily="34" charset="-120"/>
               </a:rPr>
-              <a:t>Mold a better tomorrow with advanced hot runner solutions</a:t>
+              <a:t>Innovative hot runner solutions for injection molding</a:t>
             </a:r>
             <a:endParaRPr lang="en-US" sz="900" dirty="0"/>
           </a:p>
@@ -12763,7 +12763,7 @@
                 <a:ea typeface="Arial" pitchFamily="34" charset="-122"/>
                 <a:cs typeface="Arial" pitchFamily="34" charset="-120"/>
               </a:rPr>
-              <a:t>Launched new IntelliGate Hot Runner with digital sensor technology</a:t>
+              <a:t>Launched new IntelliGate Hot Runner with digital sensors</a:t>
             </a:r>
             <a:endParaRPr lang="en-US" sz="900" dirty="0"/>
           </a:p>
@@ -13932,7 +13932,7 @@
                           <a:ea typeface="Arial" pitchFamily="34" charset="-122"/>
                           <a:cs typeface="Arial" pitchFamily="34" charset="-120"/>
                         </a:rPr>
-                        <a:t>World leading manufacturer of hot runner systems</a:t>
+                        <a:t>World's leading manufacturer of hot runner systems</a:t>
                       </a:r>
                       <a:endParaRPr lang="en-US" sz="800" dirty="0">
                         <a:latin typeface="Arial" charset="0"/>
@@ -14480,7 +14480,7 @@
                           <a:ea typeface="Arial" pitchFamily="34" charset="-122"/>
                           <a:cs typeface="Arial" pitchFamily="34" charset="-120"/>
                         </a:rPr>
-                        <a:t>Direct client relationships</a:t>
+                        <a:t>Direct contact</a:t>
                       </a:r>
                       <a:endParaRPr lang="en-US" sz="800" dirty="0">
                         <a:latin typeface="Arial" charset="0"/>
@@ -14616,7 +14616,7 @@
                           <a:ea typeface="Arial" pitchFamily="34" charset="-122"/>
                           <a:cs typeface="Arial" pitchFamily="34" charset="-120"/>
                         </a:rPr>
-                        <a:t>Direct consultative sales</a:t>
+                        <a:t>Content marketing</a:t>
                       </a:r>
                       <a:endParaRPr lang="en-US" sz="800" dirty="0">
                         <a:latin typeface="Arial" charset="0"/>
@@ -14822,7 +14822,7 @@
                           <a:ea typeface="Arial" pitchFamily="34" charset="-122"/>
                           <a:cs typeface="Arial" pitchFamily="34" charset="-120"/>
                         </a:rPr>
-                        <a:t>Trademark registration</a:t>
+                        <a:t>Trademark</a:t>
                       </a:r>
                       <a:endParaRPr lang="en-US" sz="800" dirty="0">
                         <a:latin typeface="Arial" charset="0"/>
@@ -14890,7 +14890,7 @@
                           <a:ea typeface="Arial" pitchFamily="34" charset="-122"/>
                           <a:cs typeface="Arial" pitchFamily="34" charset="-120"/>
                         </a:rPr>
-                        <a:t>IEPE piezoelectric sensors</a:t>
+                        <a:t>IEPE/ICP piezoelectric sensors with integrated electronics</a:t>
                       </a:r>
                       <a:endParaRPr lang="en-US" sz="800" dirty="0">
                         <a:latin typeface="Arial" charset="0"/>
@@ -15164,7 +15164,7 @@
                           <a:ea typeface="Arial" pitchFamily="34" charset="-122"/>
                           <a:cs typeface="Arial" pitchFamily="34" charset="-120"/>
                         </a:rPr>
-                        <a:t>Over 500 trademark applications and registrations credited</a:t>
+                        <a:t>500+ trademark applications and registrations</a:t>
                       </a:r>
                       <a:endParaRPr lang="en-US" sz="800" dirty="0">
                         <a:latin typeface="Arial" charset="0"/>
@@ -15300,7 +15300,7 @@
                           <a:ea typeface="Arial" pitchFamily="34" charset="-122"/>
                           <a:cs typeface="Arial" pitchFamily="34" charset="-120"/>
                         </a:rPr>
-                        <a:t>50+ years development history</a:t>
+                        <a:t>50+ years developing hot runner technology</a:t>
                       </a:r>
                       <a:endParaRPr lang="en-US" sz="800" dirty="0">
                         <a:latin typeface="Arial" charset="0"/>
@@ -16258,7 +16258,7 @@
                           <a:ea typeface="Arial" pitchFamily="34" charset="-122"/>
                           <a:cs typeface="Arial" pitchFamily="34" charset="-120"/>
                         </a:rPr>
-                        <a:t>Industrial measurement</a:t>
+                        <a:t>Industrial measurement applications requiring piezoelectric sensors</a:t>
                       </a:r>
                       <a:endParaRPr lang="en-US" sz="800" dirty="0">
                         <a:latin typeface="Arial" charset="0"/>
@@ -16326,7 +16326,7 @@
                           <a:ea typeface="Arial" pitchFamily="34" charset="-122"/>
                           <a:cs typeface="Arial" pitchFamily="34" charset="-120"/>
                         </a:rPr>
-                        <a:t>Plastics injection molding manufacturers</a:t>
+                        <a:t>Plastic injection molding manufacturers seeking efficiency</a:t>
                       </a:r>
                       <a:endParaRPr lang="en-US" sz="800" dirty="0">
                         <a:latin typeface="Arial" charset="0"/>
@@ -16532,7 +16532,7 @@
                           <a:ea typeface="Arial" pitchFamily="34" charset="-122"/>
                           <a:cs typeface="Arial" pitchFamily="34" charset="-120"/>
                         </a:rPr>
-                        <a:t>Intellectual property law and entertainment legal services</a:t>
+                        <a:t>Intellectual property and entertainment law counsel</a:t>
                       </a:r>
                       <a:endParaRPr lang="en-US" sz="800" dirty="0">
                         <a:latin typeface="Arial" charset="0"/>
@@ -16668,7 +16668,7 @@
                           <a:ea typeface="Arial" pitchFamily="34" charset="-122"/>
                           <a:cs typeface="Arial" pitchFamily="34" charset="-120"/>
                         </a:rPr>
-                        <a:t>Mold a better tomorrow with advanced hot runner solutions</a:t>
+                        <a:t>Innovative hot runner solutions for injection molding</a:t>
                       </a:r>
                       <a:endParaRPr lang="en-US" sz="800" dirty="0">
                         <a:latin typeface="Arial" charset="0"/>
@@ -16942,7 +16942,7 @@
                           <a:ea typeface="Arial" pitchFamily="34" charset="-122"/>
                           <a:cs typeface="Arial" pitchFamily="34" charset="-120"/>
                         </a:rPr>
-                        <a:t>Merged eso GmbH into Kistler Instrumente GmbH in March 2021</a:t>
+                        <a:t>eso GmbH merged with Kistler Instrumente GmbH in March 2021</a:t>
                       </a:r>
                       <a:endParaRPr lang="en-US" sz="800" dirty="0">
                         <a:latin typeface="Arial" charset="0"/>
@@ -17010,7 +17010,7 @@
                           <a:ea typeface="Arial" pitchFamily="34" charset="-122"/>
                           <a:cs typeface="Arial" pitchFamily="34" charset="-120"/>
                         </a:rPr>
-                        <a:t>Launched new IntelliGate Hot Runner with digital sensor technology</a:t>
+                        <a:t>Launched new IntelliGate Hot Runner with digital sensors</a:t>
                       </a:r>
                       <a:endParaRPr lang="en-US" sz="800" dirty="0">
                         <a:latin typeface="Arial" charset="0"/>

--- a/mesh_bioplastics_CI_Report.pptx
+++ b/mesh_bioplastics_CI_Report.pptx
@@ -4909,7 +4909,7 @@
                 <a:ea typeface="Arial" pitchFamily="34" charset="-122"/>
                 <a:cs typeface="Arial" pitchFamily="34" charset="-120"/>
               </a:rPr>
-              <a:t>Material Innovation vs. Process Optimization Focus</a:t>
+              <a:t>Material Science Innovation vs. Process Equipment Focus</a:t>
             </a:r>
             <a:endParaRPr lang="en-US" sz="900" dirty="0"/>
           </a:p>
@@ -8270,7 +8270,7 @@
                 <a:ea typeface="Arial" pitchFamily="34" charset="-122"/>
                 <a:cs typeface="Arial" pitchFamily="34" charset="-120"/>
               </a:rPr>
-              <a:t>Emeryville, California, United States | https://www.rjg.com</a:t>
+              <a:t>Emeryville, California, USA | https://www.rjg.com</a:t>
             </a:r>
             <a:endParaRPr lang="en-US" sz="900" dirty="0"/>
           </a:p>
@@ -8888,7 +8888,7 @@
                 <a:ea typeface="Arial" pitchFamily="34" charset="-122"/>
                 <a:cs typeface="Arial" pitchFamily="34" charset="-120"/>
               </a:rPr>
-              <a:t>Direct contact, professional referrals</a:t>
+              <a:t>Direct contact, referrals from other attorneys</a:t>
             </a:r>
             <a:endParaRPr lang="en-US" sz="900" dirty="0"/>
           </a:p>
@@ -8991,7 +8991,7 @@
                 <a:ea typeface="Arial" pitchFamily="34" charset="-122"/>
                 <a:cs typeface="Arial" pitchFamily="34" charset="-120"/>
               </a:rPr>
-              <a:t>Trademark, copyright, entertainment law expertise</a:t>
+              <a:t>Trademark and entertainment law specialization with 500+ applications</a:t>
             </a:r>
             <a:endParaRPr lang="en-US" sz="900" dirty="0"/>
           </a:p>
@@ -9094,7 +9094,7 @@
                 <a:ea typeface="Arial" pitchFamily="34" charset="-122"/>
                 <a:cs typeface="Arial" pitchFamily="34" charset="-120"/>
               </a:rPr>
-              <a:t>500+ trademark applications and registrations</a:t>
+              <a:t>Unknown</a:t>
             </a:r>
             <a:endParaRPr lang="en-US" sz="900" dirty="0"/>
           </a:p>
@@ -9403,7 +9403,7 @@
                 <a:ea typeface="Arial" pitchFamily="34" charset="-122"/>
                 <a:cs typeface="Arial" pitchFamily="34" charset="-120"/>
               </a:rPr>
-              <a:t>Entertainment producers, directors, actors, musicians</a:t>
+              <a:t>Entertainment industry professionals, trademark applicants, music rights</a:t>
             </a:r>
             <a:endParaRPr lang="en-US" sz="900" dirty="0"/>
           </a:p>
@@ -9506,7 +9506,7 @@
                 <a:ea typeface="Arial" pitchFamily="34" charset="-122"/>
                 <a:cs typeface="Arial" pitchFamily="34" charset="-120"/>
               </a:rPr>
-              <a:t>Intellectual property and entertainment law counsel</a:t>
+              <a:t>Intellectual property and entertainment law expertise</a:t>
             </a:r>
             <a:endParaRPr lang="en-US" sz="900" dirty="0"/>
           </a:p>
@@ -10465,7 +10465,7 @@
                 <a:ea typeface="Arial" pitchFamily="34" charset="-122"/>
                 <a:cs typeface="Arial" pitchFamily="34" charset="-120"/>
               </a:rPr>
-              <a:t>Product finder, technical documentation</a:t>
+              <a:t>Product finder, direct website content</a:t>
             </a:r>
             <a:endParaRPr lang="en-US" sz="900" dirty="0"/>
           </a:p>
@@ -10568,7 +10568,7 @@
                 <a:ea typeface="Arial" pitchFamily="34" charset="-122"/>
                 <a:cs typeface="Arial" pitchFamily="34" charset="-120"/>
               </a:rPr>
-              <a:t>IEPE/ICP piezoelectric sensors with integrated electronics</a:t>
+              <a:t>IEPE piezoelectric sensors, force sensors, accelerometers technology</a:t>
             </a:r>
             <a:endParaRPr lang="en-US" sz="900" dirty="0"/>
           </a:p>
@@ -10980,7 +10980,7 @@
                 <a:ea typeface="Arial" pitchFamily="34" charset="-122"/>
                 <a:cs typeface="Arial" pitchFamily="34" charset="-120"/>
               </a:rPr>
-              <a:t>Industrial measurement applications requiring piezoelectric sensors</a:t>
+              <a:t>Industrial measurement and vibration monitoring applications</a:t>
             </a:r>
             <a:endParaRPr lang="en-US" sz="900" dirty="0"/>
           </a:p>
@@ -11083,7 +11083,7 @@
                 <a:ea typeface="Arial" pitchFamily="34" charset="-122"/>
                 <a:cs typeface="Arial" pitchFamily="34" charset="-120"/>
               </a:rPr>
-              <a:t>Precision measurement technology for industrial applications</a:t>
+              <a:t>Precision measurement technology solutions for industrial applications</a:t>
             </a:r>
             <a:endParaRPr lang="en-US" sz="900" dirty="0"/>
           </a:p>
@@ -12042,7 +12042,7 @@
                 <a:ea typeface="Arial" pitchFamily="34" charset="-122"/>
                 <a:cs typeface="Arial" pitchFamily="34" charset="-120"/>
               </a:rPr>
-              <a:t>Content marketing, product demonstrations, consultative sales</a:t>
+              <a:t>Educational content, product demonstrations, consultative approach</a:t>
             </a:r>
             <a:endParaRPr lang="en-US" sz="900" dirty="0"/>
           </a:p>
@@ -12145,7 +12145,7 @@
                 <a:ea typeface="Arial" pitchFamily="34" charset="-122"/>
                 <a:cs typeface="Arial" pitchFamily="34" charset="-120"/>
               </a:rPr>
-              <a:t>Hot runner systems, IntelliGate, flow control technology</a:t>
+              <a:t>IntelliGate hot runner with digital sensors, flow control technology</a:t>
             </a:r>
             <a:endParaRPr lang="en-US" sz="900" dirty="0"/>
           </a:p>
@@ -12248,7 +12248,7 @@
                 <a:ea typeface="Arial" pitchFamily="34" charset="-122"/>
                 <a:cs typeface="Arial" pitchFamily="34" charset="-120"/>
               </a:rPr>
-              <a:t>50+ years developing hot runner technology</a:t>
+              <a:t>Unknown</a:t>
             </a:r>
             <a:endParaRPr lang="en-US" sz="900" dirty="0"/>
           </a:p>
@@ -12557,7 +12557,7 @@
                 <a:ea typeface="Arial" pitchFamily="34" charset="-122"/>
                 <a:cs typeface="Arial" pitchFamily="34" charset="-120"/>
               </a:rPr>
-              <a:t>Plastic injection molding manufacturers seeking efficiency</a:t>
+              <a:t>Injection molding manufacturers seeking efficiency improvements</a:t>
             </a:r>
             <a:endParaRPr lang="en-US" sz="900" dirty="0"/>
           </a:p>
@@ -12660,7 +12660,7 @@
                 <a:ea typeface="Arial" pitchFamily="34" charset="-122"/>
                 <a:cs typeface="Arial" pitchFamily="34" charset="-120"/>
               </a:rPr>
-              <a:t>Innovative hot runner solutions for injection molding</a:t>
+              <a:t>Innovative hot runner systems for injection molding efficiency</a:t>
             </a:r>
             <a:endParaRPr lang="en-US" sz="900" dirty="0"/>
           </a:p>
@@ -12763,7 +12763,7 @@
                 <a:ea typeface="Arial" pitchFamily="34" charset="-122"/>
                 <a:cs typeface="Arial" pitchFamily="34" charset="-120"/>
               </a:rPr>
-              <a:t>Launched new IntelliGate Hot Runner with digital sensors</a:t>
+              <a:t>Launched new IntelliGate Hot Runner with digital sensor technology</a:t>
             </a:r>
             <a:endParaRPr lang="en-US" sz="900" dirty="0"/>
           </a:p>
@@ -14616,7 +14616,7 @@
                           <a:ea typeface="Arial" pitchFamily="34" charset="-122"/>
                           <a:cs typeface="Arial" pitchFamily="34" charset="-120"/>
                         </a:rPr>
-                        <a:t>Content marketing</a:t>
+                        <a:t>Educational content</a:t>
                       </a:r>
                       <a:endParaRPr lang="en-US" sz="800" dirty="0">
                         <a:latin typeface="Arial" charset="0"/>
@@ -14822,7 +14822,7 @@
                           <a:ea typeface="Arial" pitchFamily="34" charset="-122"/>
                           <a:cs typeface="Arial" pitchFamily="34" charset="-120"/>
                         </a:rPr>
-                        <a:t>Trademark</a:t>
+                        <a:t>Trademark and entertainment law specialization with 500+ applications</a:t>
                       </a:r>
                       <a:endParaRPr lang="en-US" sz="800" dirty="0">
                         <a:latin typeface="Arial" charset="0"/>
@@ -14890,7 +14890,7 @@
                           <a:ea typeface="Arial" pitchFamily="34" charset="-122"/>
                           <a:cs typeface="Arial" pitchFamily="34" charset="-120"/>
                         </a:rPr>
-                        <a:t>IEPE/ICP piezoelectric sensors with integrated electronics</a:t>
+                        <a:t>IEPE piezoelectric sensors</a:t>
                       </a:r>
                       <a:endParaRPr lang="en-US" sz="800" dirty="0">
                         <a:latin typeface="Arial" charset="0"/>
@@ -14958,7 +14958,7 @@
                           <a:ea typeface="Arial" pitchFamily="34" charset="-122"/>
                           <a:cs typeface="Arial" pitchFamily="34" charset="-120"/>
                         </a:rPr>
-                        <a:t>Hot runner systems</a:t>
+                        <a:t>IntelliGate hot runner with digital sensors</a:t>
                       </a:r>
                       <a:endParaRPr lang="en-US" sz="800" dirty="0">
                         <a:latin typeface="Arial" charset="0"/>
@@ -15164,7 +15164,7 @@
                           <a:ea typeface="Arial" pitchFamily="34" charset="-122"/>
                           <a:cs typeface="Arial" pitchFamily="34" charset="-120"/>
                         </a:rPr>
-                        <a:t>500+ trademark applications and registrations</a:t>
+                        <a:t>Unknown</a:t>
                       </a:r>
                       <a:endParaRPr lang="en-US" sz="800" dirty="0">
                         <a:latin typeface="Arial" charset="0"/>
@@ -15300,7 +15300,7 @@
                           <a:ea typeface="Arial" pitchFamily="34" charset="-122"/>
                           <a:cs typeface="Arial" pitchFamily="34" charset="-120"/>
                         </a:rPr>
-                        <a:t>50+ years developing hot runner technology</a:t>
+                        <a:t>Unknown</a:t>
                       </a:r>
                       <a:endParaRPr lang="en-US" sz="800" dirty="0">
                         <a:latin typeface="Arial" charset="0"/>
@@ -16190,7 +16190,7 @@
                           <a:ea typeface="Arial" pitchFamily="34" charset="-122"/>
                           <a:cs typeface="Arial" pitchFamily="34" charset="-120"/>
                         </a:rPr>
-                        <a:t>Entertainment producers</a:t>
+                        <a:t>Entertainment industry professionals</a:t>
                       </a:r>
                       <a:endParaRPr lang="en-US" sz="800" dirty="0">
                         <a:latin typeface="Arial" charset="0"/>
@@ -16258,7 +16258,7 @@
                           <a:ea typeface="Arial" pitchFamily="34" charset="-122"/>
                           <a:cs typeface="Arial" pitchFamily="34" charset="-120"/>
                         </a:rPr>
-                        <a:t>Industrial measurement applications requiring piezoelectric sensors</a:t>
+                        <a:t>Industrial measurement and vibration monitoring applications</a:t>
                       </a:r>
                       <a:endParaRPr lang="en-US" sz="800" dirty="0">
                         <a:latin typeface="Arial" charset="0"/>
@@ -16326,7 +16326,7 @@
                           <a:ea typeface="Arial" pitchFamily="34" charset="-122"/>
                           <a:cs typeface="Arial" pitchFamily="34" charset="-120"/>
                         </a:rPr>
-                        <a:t>Plastic injection molding manufacturers seeking efficiency</a:t>
+                        <a:t>Injection molding manufacturers seeking efficiency improvements</a:t>
                       </a:r>
                       <a:endParaRPr lang="en-US" sz="800" dirty="0">
                         <a:latin typeface="Arial" charset="0"/>
@@ -16532,7 +16532,7 @@
                           <a:ea typeface="Arial" pitchFamily="34" charset="-122"/>
                           <a:cs typeface="Arial" pitchFamily="34" charset="-120"/>
                         </a:rPr>
-                        <a:t>Intellectual property and entertainment law counsel</a:t>
+                        <a:t>Intellectual property and entertainment law expertise</a:t>
                       </a:r>
                       <a:endParaRPr lang="en-US" sz="800" dirty="0">
                         <a:latin typeface="Arial" charset="0"/>
@@ -16600,7 +16600,7 @@
                           <a:ea typeface="Arial" pitchFamily="34" charset="-122"/>
                           <a:cs typeface="Arial" pitchFamily="34" charset="-120"/>
                         </a:rPr>
-                        <a:t>Precision measurement technology for industrial applications</a:t>
+                        <a:t>Precision measurement technology solutions for industrial applications</a:t>
                       </a:r>
                       <a:endParaRPr lang="en-US" sz="800" dirty="0">
                         <a:latin typeface="Arial" charset="0"/>
@@ -16668,7 +16668,7 @@
                           <a:ea typeface="Arial" pitchFamily="34" charset="-122"/>
                           <a:cs typeface="Arial" pitchFamily="34" charset="-120"/>
                         </a:rPr>
-                        <a:t>Innovative hot runner solutions for injection molding</a:t>
+                        <a:t>Innovative hot runner systems for injection molding efficiency</a:t>
                       </a:r>
                       <a:endParaRPr lang="en-US" sz="800" dirty="0">
                         <a:latin typeface="Arial" charset="0"/>
@@ -17010,7 +17010,7 @@
                           <a:ea typeface="Arial" pitchFamily="34" charset="-122"/>
                           <a:cs typeface="Arial" pitchFamily="34" charset="-120"/>
                         </a:rPr>
-                        <a:t>Launched new IntelliGate Hot Runner with digital sensors</a:t>
+                        <a:t>Launched new IntelliGate Hot Runner with digital sensor technology</a:t>
                       </a:r>
                       <a:endParaRPr lang="en-US" sz="800" dirty="0">
                         <a:latin typeface="Arial" charset="0"/>

--- a/mesh_bioplastics_CI_Report.pptx
+++ b/mesh_bioplastics_CI_Report.pptx
@@ -4909,7 +4909,7 @@
                 <a:ea typeface="Arial" pitchFamily="34" charset="-122"/>
                 <a:cs typeface="Arial" pitchFamily="34" charset="-120"/>
               </a:rPr>
-              <a:t>Material Science Innovation vs. Process Equipment Focus</a:t>
+              <a:t>Material Innovation Depth</a:t>
             </a:r>
             <a:endParaRPr lang="en-US" sz="900" dirty="0"/>
           </a:p>
@@ -4987,7 +4987,7 @@
                 <a:ea typeface="Arial" pitchFamily="34" charset="-122"/>
                 <a:cs typeface="Arial" pitchFamily="34" charset="-120"/>
               </a:rPr>
-              <a:t>Integrated Intelligence vs. Standalone Functionality</a:t>
+              <a:t>Process Automation Integration</a:t>
             </a:r>
             <a:endParaRPr lang="en-US" sz="900" dirty="0"/>
           </a:p>
@@ -8270,7 +8270,7 @@
                 <a:ea typeface="Arial" pitchFamily="34" charset="-122"/>
                 <a:cs typeface="Arial" pitchFamily="34" charset="-120"/>
               </a:rPr>
-              <a:t>Emeryville, California, USA | https://www.rjg.com</a:t>
+              <a:t>Emeryville, California, United States | https://www.rjg.com</a:t>
             </a:r>
             <a:endParaRPr lang="en-US" sz="900" dirty="0"/>
           </a:p>
@@ -8888,7 +8888,7 @@
                 <a:ea typeface="Arial" pitchFamily="34" charset="-122"/>
                 <a:cs typeface="Arial" pitchFamily="34" charset="-120"/>
               </a:rPr>
-              <a:t>Direct contact, referrals from other attorneys</a:t>
+              <a:t>Direct client engagement, referrals from other attorneys</a:t>
             </a:r>
             <a:endParaRPr lang="en-US" sz="900" dirty="0"/>
           </a:p>
@@ -8991,7 +8991,7 @@
                 <a:ea typeface="Arial" pitchFamily="34" charset="-122"/>
                 <a:cs typeface="Arial" pitchFamily="34" charset="-120"/>
               </a:rPr>
-              <a:t>Trademark and entertainment law specialization with 500+ applications</a:t>
+              <a:t>Trademark applications, copyright, entertainment law expertise</a:t>
             </a:r>
             <a:endParaRPr lang="en-US" sz="900" dirty="0"/>
           </a:p>
@@ -9094,7 +9094,7 @@
                 <a:ea typeface="Arial" pitchFamily="34" charset="-122"/>
                 <a:cs typeface="Arial" pitchFamily="34" charset="-120"/>
               </a:rPr>
-              <a:t>Unknown</a:t>
+              <a:t>500+ trademark applications and registrations credited</a:t>
             </a:r>
             <a:endParaRPr lang="en-US" sz="900" dirty="0"/>
           </a:p>
@@ -9403,7 +9403,7 @@
                 <a:ea typeface="Arial" pitchFamily="34" charset="-122"/>
                 <a:cs typeface="Arial" pitchFamily="34" charset="-120"/>
               </a:rPr>
-              <a:t>Entertainment industry professionals, trademark applicants, music rights</a:t>
+              <a:t>Entertainment producers, directors, actors, authors, musicians</a:t>
             </a:r>
             <a:endParaRPr lang="en-US" sz="900" dirty="0"/>
           </a:p>
@@ -9506,7 +9506,7 @@
                 <a:ea typeface="Arial" pitchFamily="34" charset="-122"/>
                 <a:cs typeface="Arial" pitchFamily="34" charset="-120"/>
               </a:rPr>
-              <a:t>Intellectual property and entertainment law expertise</a:t>
+              <a:t>Intellectual property and entertainment law practice</a:t>
             </a:r>
             <a:endParaRPr lang="en-US" sz="900" dirty="0"/>
           </a:p>
@@ -9847,7 +9847,7 @@
                 <a:ea typeface="Arial" pitchFamily="34" charset="-122"/>
                 <a:cs typeface="Arial" pitchFamily="34" charset="-120"/>
               </a:rPr>
-              <a:t>Sindelfingen, Germany | https://www.kistler.com</a:t>
+              <a:t>Unknown | https://www.kistler.com</a:t>
             </a:r>
             <a:endParaRPr lang="en-US" sz="900" dirty="0"/>
           </a:p>
@@ -10465,7 +10465,7 @@
                 <a:ea typeface="Arial" pitchFamily="34" charset="-122"/>
                 <a:cs typeface="Arial" pitchFamily="34" charset="-120"/>
               </a:rPr>
-              <a:t>Product finder, direct website content</a:t>
+              <a:t>Product finder, website educational content</a:t>
             </a:r>
             <a:endParaRPr lang="en-US" sz="900" dirty="0"/>
           </a:p>
@@ -10568,7 +10568,7 @@
                 <a:ea typeface="Arial" pitchFamily="34" charset="-122"/>
                 <a:cs typeface="Arial" pitchFamily="34" charset="-120"/>
               </a:rPr>
-              <a:t>IEPE piezoelectric sensors, force sensors, accelerometers technology</a:t>
+              <a:t>IEPE piezoelectric sensors, force sensors, accelerometers</a:t>
             </a:r>
             <a:endParaRPr lang="en-US" sz="900" dirty="0"/>
           </a:p>
@@ -10980,7 +10980,7 @@
                 <a:ea typeface="Arial" pitchFamily="34" charset="-122"/>
                 <a:cs typeface="Arial" pitchFamily="34" charset="-120"/>
               </a:rPr>
-              <a:t>Industrial measurement and vibration monitoring applications</a:t>
+              <a:t>Industrial applications requiring force, pressure, acceleration measurement</a:t>
             </a:r>
             <a:endParaRPr lang="en-US" sz="900" dirty="0"/>
           </a:p>
@@ -11083,7 +11083,7 @@
                 <a:ea typeface="Arial" pitchFamily="34" charset="-122"/>
                 <a:cs typeface="Arial" pitchFamily="34" charset="-120"/>
               </a:rPr>
-              <a:t>Precision measurement technology solutions for industrial applications</a:t>
+              <a:t>Precision measurement technology for industrial applications</a:t>
             </a:r>
             <a:endParaRPr lang="en-US" sz="900" dirty="0"/>
           </a:p>
@@ -11186,7 +11186,7 @@
                 <a:ea typeface="Arial" pitchFamily="34" charset="-122"/>
                 <a:cs typeface="Arial" pitchFamily="34" charset="-120"/>
               </a:rPr>
-              <a:t>eso GmbH merged with Kistler Instrumente GmbH in March 2021</a:t>
+              <a:t>Acquired eso GmbH in 2017, fully merged March 2021</a:t>
             </a:r>
             <a:endParaRPr lang="en-US" sz="900" dirty="0"/>
           </a:p>
@@ -12042,7 +12042,7 @@
                 <a:ea typeface="Arial" pitchFamily="34" charset="-122"/>
                 <a:cs typeface="Arial" pitchFamily="34" charset="-120"/>
               </a:rPr>
-              <a:t>Educational content, product demonstrations, consultative approach</a:t>
+              <a:t>Product education, case studies, technical solutions</a:t>
             </a:r>
             <a:endParaRPr lang="en-US" sz="900" dirty="0"/>
           </a:p>
@@ -12145,7 +12145,7 @@
                 <a:ea typeface="Arial" pitchFamily="34" charset="-122"/>
                 <a:cs typeface="Arial" pitchFamily="34" charset="-120"/>
               </a:rPr>
-              <a:t>IntelliGate hot runner with digital sensors, flow control technology</a:t>
+              <a:t>Hot runner systems, IntelliGate sensor technology, flow control</a:t>
             </a:r>
             <a:endParaRPr lang="en-US" sz="900" dirty="0"/>
           </a:p>
@@ -12248,7 +12248,7 @@
                 <a:ea typeface="Arial" pitchFamily="34" charset="-122"/>
                 <a:cs typeface="Arial" pitchFamily="34" charset="-120"/>
               </a:rPr>
-              <a:t>Unknown</a:t>
+              <a:t>Long-standing customer relationships, 50+ years development</a:t>
             </a:r>
             <a:endParaRPr lang="en-US" sz="900" dirty="0"/>
           </a:p>
@@ -12660,7 +12660,7 @@
                 <a:ea typeface="Arial" pitchFamily="34" charset="-122"/>
                 <a:cs typeface="Arial" pitchFamily="34" charset="-120"/>
               </a:rPr>
-              <a:t>Innovative hot runner systems for injection molding efficiency</a:t>
+              <a:t>Hot runner solutions and flow control for injection molding</a:t>
             </a:r>
             <a:endParaRPr lang="en-US" sz="900" dirty="0"/>
           </a:p>
@@ -14480,7 +14480,7 @@
                           <a:ea typeface="Arial" pitchFamily="34" charset="-122"/>
                           <a:cs typeface="Arial" pitchFamily="34" charset="-120"/>
                         </a:rPr>
-                        <a:t>Direct contact</a:t>
+                        <a:t>Direct client engagement</a:t>
                       </a:r>
                       <a:endParaRPr lang="en-US" sz="800" dirty="0">
                         <a:latin typeface="Arial" charset="0"/>
@@ -14616,7 +14616,7 @@
                           <a:ea typeface="Arial" pitchFamily="34" charset="-122"/>
                           <a:cs typeface="Arial" pitchFamily="34" charset="-120"/>
                         </a:rPr>
-                        <a:t>Educational content</a:t>
+                        <a:t>Product education</a:t>
                       </a:r>
                       <a:endParaRPr lang="en-US" sz="800" dirty="0">
                         <a:latin typeface="Arial" charset="0"/>
@@ -14822,7 +14822,7 @@
                           <a:ea typeface="Arial" pitchFamily="34" charset="-122"/>
                           <a:cs typeface="Arial" pitchFamily="34" charset="-120"/>
                         </a:rPr>
-                        <a:t>Trademark and entertainment law specialization with 500+ applications</a:t>
+                        <a:t>Trademark applications</a:t>
                       </a:r>
                       <a:endParaRPr lang="en-US" sz="800" dirty="0">
                         <a:latin typeface="Arial" charset="0"/>
@@ -14958,7 +14958,7 @@
                           <a:ea typeface="Arial" pitchFamily="34" charset="-122"/>
                           <a:cs typeface="Arial" pitchFamily="34" charset="-120"/>
                         </a:rPr>
-                        <a:t>IntelliGate hot runner with digital sensors</a:t>
+                        <a:t>Hot runner systems</a:t>
                       </a:r>
                       <a:endParaRPr lang="en-US" sz="800" dirty="0">
                         <a:latin typeface="Arial" charset="0"/>
@@ -15164,7 +15164,7 @@
                           <a:ea typeface="Arial" pitchFamily="34" charset="-122"/>
                           <a:cs typeface="Arial" pitchFamily="34" charset="-120"/>
                         </a:rPr>
-                        <a:t>Unknown</a:t>
+                        <a:t>500+ trademark applications and registrations credited</a:t>
                       </a:r>
                       <a:endParaRPr lang="en-US" sz="800" dirty="0">
                         <a:latin typeface="Arial" charset="0"/>
@@ -15300,7 +15300,7 @@
                           <a:ea typeface="Arial" pitchFamily="34" charset="-122"/>
                           <a:cs typeface="Arial" pitchFamily="34" charset="-120"/>
                         </a:rPr>
-                        <a:t>Unknown</a:t>
+                        <a:t>Long-standing customer relationships</a:t>
                       </a:r>
                       <a:endParaRPr lang="en-US" sz="800" dirty="0">
                         <a:latin typeface="Arial" charset="0"/>
@@ -16190,7 +16190,7 @@
                           <a:ea typeface="Arial" pitchFamily="34" charset="-122"/>
                           <a:cs typeface="Arial" pitchFamily="34" charset="-120"/>
                         </a:rPr>
-                        <a:t>Entertainment industry professionals</a:t>
+                        <a:t>Entertainment producers</a:t>
                       </a:r>
                       <a:endParaRPr lang="en-US" sz="800" dirty="0">
                         <a:latin typeface="Arial" charset="0"/>
@@ -16258,7 +16258,7 @@
                           <a:ea typeface="Arial" pitchFamily="34" charset="-122"/>
                           <a:cs typeface="Arial" pitchFamily="34" charset="-120"/>
                         </a:rPr>
-                        <a:t>Industrial measurement and vibration monitoring applications</a:t>
+                        <a:t>Industrial applications requiring force</a:t>
                       </a:r>
                       <a:endParaRPr lang="en-US" sz="800" dirty="0">
                         <a:latin typeface="Arial" charset="0"/>
@@ -16532,7 +16532,7 @@
                           <a:ea typeface="Arial" pitchFamily="34" charset="-122"/>
                           <a:cs typeface="Arial" pitchFamily="34" charset="-120"/>
                         </a:rPr>
-                        <a:t>Intellectual property and entertainment law expertise</a:t>
+                        <a:t>Intellectual property and entertainment law practice</a:t>
                       </a:r>
                       <a:endParaRPr lang="en-US" sz="800" dirty="0">
                         <a:latin typeface="Arial" charset="0"/>
@@ -16600,7 +16600,7 @@
                           <a:ea typeface="Arial" pitchFamily="34" charset="-122"/>
                           <a:cs typeface="Arial" pitchFamily="34" charset="-120"/>
                         </a:rPr>
-                        <a:t>Precision measurement technology solutions for industrial applications</a:t>
+                        <a:t>Precision measurement technology for industrial applications</a:t>
                       </a:r>
                       <a:endParaRPr lang="en-US" sz="800" dirty="0">
                         <a:latin typeface="Arial" charset="0"/>
@@ -16668,7 +16668,7 @@
                           <a:ea typeface="Arial" pitchFamily="34" charset="-122"/>
                           <a:cs typeface="Arial" pitchFamily="34" charset="-120"/>
                         </a:rPr>
-                        <a:t>Innovative hot runner systems for injection molding efficiency</a:t>
+                        <a:t>Hot runner solutions and flow control for injection molding</a:t>
                       </a:r>
                       <a:endParaRPr lang="en-US" sz="800" dirty="0">
                         <a:latin typeface="Arial" charset="0"/>
@@ -16942,7 +16942,7 @@
                           <a:ea typeface="Arial" pitchFamily="34" charset="-122"/>
                           <a:cs typeface="Arial" pitchFamily="34" charset="-120"/>
                         </a:rPr>
-                        <a:t>eso GmbH merged with Kistler Instrumente GmbH in March 2021</a:t>
+                        <a:t>Acquired eso GmbH in 2017</a:t>
                       </a:r>
                       <a:endParaRPr lang="en-US" sz="800" dirty="0">
                         <a:latin typeface="Arial" charset="0"/>

--- a/mesh_bioplastics_CI_Report.pptx
+++ b/mesh_bioplastics_CI_Report.pptx
@@ -4909,7 +4909,7 @@
                 <a:ea typeface="Arial" pitchFamily="34" charset="-122"/>
                 <a:cs typeface="Arial" pitchFamily="34" charset="-120"/>
               </a:rPr>
-              <a:t>Material Innovation Depth</a:t>
+              <a:t>Material Innovation (Bio-based vs. Conventional)</a:t>
             </a:r>
             <a:endParaRPr lang="en-US" sz="900" dirty="0"/>
           </a:p>
@@ -4987,7 +4987,7 @@
                 <a:ea typeface="Arial" pitchFamily="34" charset="-122"/>
                 <a:cs typeface="Arial" pitchFamily="34" charset="-120"/>
               </a:rPr>
-              <a:t>Process Automation Integration</a:t>
+              <a:t>Manufacturing Intelligence Integration (Embedded vs. Bolt-on)</a:t>
             </a:r>
             <a:endParaRPr lang="en-US" sz="900" dirty="0"/>
           </a:p>
@@ -8888,7 +8888,7 @@
                 <a:ea typeface="Arial" pitchFamily="34" charset="-122"/>
                 <a:cs typeface="Arial" pitchFamily="34" charset="-120"/>
               </a:rPr>
-              <a:t>Direct client engagement, referrals from other attorneys</a:t>
+              <a:t>Direct client relationships, attorney referrals</a:t>
             </a:r>
             <a:endParaRPr lang="en-US" sz="900" dirty="0"/>
           </a:p>
@@ -9403,7 +9403,7 @@
                 <a:ea typeface="Arial" pitchFamily="34" charset="-122"/>
                 <a:cs typeface="Arial" pitchFamily="34" charset="-120"/>
               </a:rPr>
-              <a:t>Entertainment producers, directors, actors, authors, musicians</a:t>
+              <a:t>Entertainment industry producers, directors, actors, musicians</a:t>
             </a:r>
             <a:endParaRPr lang="en-US" sz="900" dirty="0"/>
           </a:p>
@@ -9506,7 +9506,7 @@
                 <a:ea typeface="Arial" pitchFamily="34" charset="-122"/>
                 <a:cs typeface="Arial" pitchFamily="34" charset="-120"/>
               </a:rPr>
-              <a:t>Intellectual property and entertainment law practice</a:t>
+              <a:t>Trademark, copyright, and entertainment law services</a:t>
             </a:r>
             <a:endParaRPr lang="en-US" sz="900" dirty="0"/>
           </a:p>
@@ -10465,7 +10465,7 @@
                 <a:ea typeface="Arial" pitchFamily="34" charset="-122"/>
                 <a:cs typeface="Arial" pitchFamily="34" charset="-120"/>
               </a:rPr>
-              <a:t>Product finder, website educational content</a:t>
+              <a:t>Product finder, force sensors, accelerometers sections</a:t>
             </a:r>
             <a:endParaRPr lang="en-US" sz="900" dirty="0"/>
           </a:p>
@@ -10980,7 +10980,7 @@
                 <a:ea typeface="Arial" pitchFamily="34" charset="-122"/>
                 <a:cs typeface="Arial" pitchFamily="34" charset="-120"/>
               </a:rPr>
-              <a:t>Industrial applications requiring force, pressure, acceleration measurement</a:t>
+              <a:t>Industrial measurement and industrial applications users</a:t>
             </a:r>
             <a:endParaRPr lang="en-US" sz="900" dirty="0"/>
           </a:p>
@@ -11083,7 +11083,7 @@
                 <a:ea typeface="Arial" pitchFamily="34" charset="-122"/>
                 <a:cs typeface="Arial" pitchFamily="34" charset="-120"/>
               </a:rPr>
-              <a:t>Precision measurement technology for industrial applications</a:t>
+              <a:t>Measurement technology for force, pressure, acceleration sensors</a:t>
             </a:r>
             <a:endParaRPr lang="en-US" sz="900" dirty="0"/>
           </a:p>
@@ -11186,7 +11186,7 @@
                 <a:ea typeface="Arial" pitchFamily="34" charset="-122"/>
                 <a:cs typeface="Arial" pitchFamily="34" charset="-120"/>
               </a:rPr>
-              <a:t>Acquired eso GmbH in 2017, fully merged March 2021</a:t>
+              <a:t>eso GmbH merged with Kistler Instrumente GmbH in March 2021</a:t>
             </a:r>
             <a:endParaRPr lang="en-US" sz="900" dirty="0"/>
           </a:p>
@@ -12042,7 +12042,7 @@
                 <a:ea typeface="Arial" pitchFamily="34" charset="-122"/>
                 <a:cs typeface="Arial" pitchFamily="34" charset="-120"/>
               </a:rPr>
-              <a:t>Product education, case studies, technical solutions</a:t>
+              <a:t>Product education, application-specific solutions pages</a:t>
             </a:r>
             <a:endParaRPr lang="en-US" sz="900" dirty="0"/>
           </a:p>
@@ -12145,7 +12145,7 @@
                 <a:ea typeface="Arial" pitchFamily="34" charset="-122"/>
                 <a:cs typeface="Arial" pitchFamily="34" charset="-120"/>
               </a:rPr>
-              <a:t>Hot runner systems, IntelliGate sensor technology, flow control</a:t>
+              <a:t>Hot runner systems, flow control, IntelliGate sequential molding</a:t>
             </a:r>
             <a:endParaRPr lang="en-US" sz="900" dirty="0"/>
           </a:p>
@@ -12248,7 +12248,7 @@
                 <a:ea typeface="Arial" pitchFamily="34" charset="-122"/>
                 <a:cs typeface="Arial" pitchFamily="34" charset="-120"/>
               </a:rPr>
-              <a:t>Long-standing customer relationships, 50+ years development</a:t>
+              <a:t>50+ years developing hot runner technology</a:t>
             </a:r>
             <a:endParaRPr lang="en-US" sz="900" dirty="0"/>
           </a:p>
@@ -12557,7 +12557,7 @@
                 <a:ea typeface="Arial" pitchFamily="34" charset="-122"/>
                 <a:cs typeface="Arial" pitchFamily="34" charset="-120"/>
               </a:rPr>
-              <a:t>Injection molding manufacturers seeking efficiency improvements</a:t>
+              <a:t>Plastics injection molding manufacturers worldwide</a:t>
             </a:r>
             <a:endParaRPr lang="en-US" sz="900" dirty="0"/>
           </a:p>
@@ -12660,7 +12660,7 @@
                 <a:ea typeface="Arial" pitchFamily="34" charset="-122"/>
                 <a:cs typeface="Arial" pitchFamily="34" charset="-120"/>
               </a:rPr>
-              <a:t>Hot runner solutions and flow control for injection molding</a:t>
+              <a:t>Hot runner systems and flow control technology leadership</a:t>
             </a:r>
             <a:endParaRPr lang="en-US" sz="900" dirty="0"/>
           </a:p>
@@ -12763,7 +12763,7 @@
                 <a:ea typeface="Arial" pitchFamily="34" charset="-122"/>
                 <a:cs typeface="Arial" pitchFamily="34" charset="-120"/>
               </a:rPr>
-              <a:t>Launched new IntelliGate Hot Runner with digital sensor technology</a:t>
+              <a:t>Launched new IntelliGate Hot Runner with digital sensors</a:t>
             </a:r>
             <a:endParaRPr lang="en-US" sz="900" dirty="0"/>
           </a:p>
@@ -14480,7 +14480,7 @@
                           <a:ea typeface="Arial" pitchFamily="34" charset="-122"/>
                           <a:cs typeface="Arial" pitchFamily="34" charset="-120"/>
                         </a:rPr>
-                        <a:t>Direct client engagement</a:t>
+                        <a:t>Direct client relationships</a:t>
                       </a:r>
                       <a:endParaRPr lang="en-US" sz="800" dirty="0">
                         <a:latin typeface="Arial" charset="0"/>
@@ -15300,7 +15300,7 @@
                           <a:ea typeface="Arial" pitchFamily="34" charset="-122"/>
                           <a:cs typeface="Arial" pitchFamily="34" charset="-120"/>
                         </a:rPr>
-                        <a:t>Long-standing customer relationships</a:t>
+                        <a:t>50+ years developing hot runner technology</a:t>
                       </a:r>
                       <a:endParaRPr lang="en-US" sz="800" dirty="0">
                         <a:latin typeface="Arial" charset="0"/>
@@ -16190,7 +16190,7 @@
                           <a:ea typeface="Arial" pitchFamily="34" charset="-122"/>
                           <a:cs typeface="Arial" pitchFamily="34" charset="-120"/>
                         </a:rPr>
-                        <a:t>Entertainment producers</a:t>
+                        <a:t>Entertainment industry producers</a:t>
                       </a:r>
                       <a:endParaRPr lang="en-US" sz="800" dirty="0">
                         <a:latin typeface="Arial" charset="0"/>
@@ -16258,7 +16258,7 @@
                           <a:ea typeface="Arial" pitchFamily="34" charset="-122"/>
                           <a:cs typeface="Arial" pitchFamily="34" charset="-120"/>
                         </a:rPr>
-                        <a:t>Industrial applications requiring force</a:t>
+                        <a:t>Industrial measurement and industrial applications users</a:t>
                       </a:r>
                       <a:endParaRPr lang="en-US" sz="800" dirty="0">
                         <a:latin typeface="Arial" charset="0"/>
@@ -16326,7 +16326,7 @@
                           <a:ea typeface="Arial" pitchFamily="34" charset="-122"/>
                           <a:cs typeface="Arial" pitchFamily="34" charset="-120"/>
                         </a:rPr>
-                        <a:t>Injection molding manufacturers seeking efficiency improvements</a:t>
+                        <a:t>Plastics injection molding manufacturers worldwide</a:t>
                       </a:r>
                       <a:endParaRPr lang="en-US" sz="800" dirty="0">
                         <a:latin typeface="Arial" charset="0"/>
@@ -16532,7 +16532,7 @@
                           <a:ea typeface="Arial" pitchFamily="34" charset="-122"/>
                           <a:cs typeface="Arial" pitchFamily="34" charset="-120"/>
                         </a:rPr>
-                        <a:t>Intellectual property and entertainment law practice</a:t>
+                        <a:t>Trademark</a:t>
                       </a:r>
                       <a:endParaRPr lang="en-US" sz="800" dirty="0">
                         <a:latin typeface="Arial" charset="0"/>
@@ -16600,7 +16600,7 @@
                           <a:ea typeface="Arial" pitchFamily="34" charset="-122"/>
                           <a:cs typeface="Arial" pitchFamily="34" charset="-120"/>
                         </a:rPr>
-                        <a:t>Precision measurement technology for industrial applications</a:t>
+                        <a:t>Measurement technology for force</a:t>
                       </a:r>
                       <a:endParaRPr lang="en-US" sz="800" dirty="0">
                         <a:latin typeface="Arial" charset="0"/>
@@ -16668,7 +16668,7 @@
                           <a:ea typeface="Arial" pitchFamily="34" charset="-122"/>
                           <a:cs typeface="Arial" pitchFamily="34" charset="-120"/>
                         </a:rPr>
-                        <a:t>Hot runner solutions and flow control for injection molding</a:t>
+                        <a:t>Hot runner systems and flow control technology leadership</a:t>
                       </a:r>
                       <a:endParaRPr lang="en-US" sz="800" dirty="0">
                         <a:latin typeface="Arial" charset="0"/>
@@ -16942,7 +16942,7 @@
                           <a:ea typeface="Arial" pitchFamily="34" charset="-122"/>
                           <a:cs typeface="Arial" pitchFamily="34" charset="-120"/>
                         </a:rPr>
-                        <a:t>Acquired eso GmbH in 2017</a:t>
+                        <a:t>eso GmbH merged with Kistler Instrumente GmbH in March 2021</a:t>
                       </a:r>
                       <a:endParaRPr lang="en-US" sz="800" dirty="0">
                         <a:latin typeface="Arial" charset="0"/>
@@ -17010,7 +17010,7 @@
                           <a:ea typeface="Arial" pitchFamily="34" charset="-122"/>
                           <a:cs typeface="Arial" pitchFamily="34" charset="-120"/>
                         </a:rPr>
-                        <a:t>Launched new IntelliGate Hot Runner with digital sensor technology</a:t>
+                        <a:t>Launched new IntelliGate Hot Runner with digital sensors</a:t>
                       </a:r>
                       <a:endParaRPr lang="en-US" sz="800" dirty="0">
                         <a:latin typeface="Arial" charset="0"/>

--- a/mesh_bioplastics_CI_Report.pptx
+++ b/mesh_bioplastics_CI_Report.pptx
@@ -4909,7 +4909,7 @@
                 <a:ea typeface="Arial" pitchFamily="34" charset="-122"/>
                 <a:cs typeface="Arial" pitchFamily="34" charset="-120"/>
               </a:rPr>
-              <a:t>Material Innovation (Bio-based vs. Conventional)</a:t>
+              <a:t>Material Science Innovation vs. Equipment/Process Focus</a:t>
             </a:r>
             <a:endParaRPr lang="en-US" sz="900" dirty="0"/>
           </a:p>
@@ -4987,7 +4987,7 @@
                 <a:ea typeface="Arial" pitchFamily="34" charset="-122"/>
                 <a:cs typeface="Arial" pitchFamily="34" charset="-120"/>
               </a:rPr>
-              <a:t>Manufacturing Intelligence Integration (Embedded vs. Bolt-on)</a:t>
+              <a:t>Integrated Intelligence (embedded AI) vs. Standalone Tooling</a:t>
             </a:r>
             <a:endParaRPr lang="en-US" sz="900" dirty="0"/>
           </a:p>
@@ -8270,7 +8270,7 @@
                 <a:ea typeface="Arial" pitchFamily="34" charset="-122"/>
                 <a:cs typeface="Arial" pitchFamily="34" charset="-120"/>
               </a:rPr>
-              <a:t>Emeryville, California, United States | https://www.rjg.com</a:t>
+              <a:t>Emeryville, United States | https://www.rjg.com</a:t>
             </a:r>
             <a:endParaRPr lang="en-US" sz="900" dirty="0"/>
           </a:p>
@@ -8991,7 +8991,7 @@
                 <a:ea typeface="Arial" pitchFamily="34" charset="-122"/>
                 <a:cs typeface="Arial" pitchFamily="34" charset="-120"/>
               </a:rPr>
-              <a:t>Trademark applications, copyright, entertainment law expertise</a:t>
+              <a:t>Trademark expertise with 500+ applications and registrations</a:t>
             </a:r>
             <a:endParaRPr lang="en-US" sz="900" dirty="0"/>
           </a:p>
@@ -9094,7 +9094,7 @@
                 <a:ea typeface="Arial" pitchFamily="34" charset="-122"/>
                 <a:cs typeface="Arial" pitchFamily="34" charset="-120"/>
               </a:rPr>
-              <a:t>500+ trademark applications and registrations credited</a:t>
+              <a:t>Unknown</a:t>
             </a:r>
             <a:endParaRPr lang="en-US" sz="900" dirty="0"/>
           </a:p>
@@ -9506,7 +9506,7 @@
                 <a:ea typeface="Arial" pitchFamily="34" charset="-122"/>
                 <a:cs typeface="Arial" pitchFamily="34" charset="-120"/>
               </a:rPr>
-              <a:t>Trademark, copyright, and entertainment law services</a:t>
+              <a:t>Intellectual property and entertainment law expertise</a:t>
             </a:r>
             <a:endParaRPr lang="en-US" sz="900" dirty="0"/>
           </a:p>
@@ -9847,7 +9847,7 @@
                 <a:ea typeface="Arial" pitchFamily="34" charset="-122"/>
                 <a:cs typeface="Arial" pitchFamily="34" charset="-120"/>
               </a:rPr>
-              <a:t>Unknown | https://www.kistler.com</a:t>
+              <a:t>Sindelfingen, Germany | https://www.kistler.com</a:t>
             </a:r>
             <a:endParaRPr lang="en-US" sz="900" dirty="0"/>
           </a:p>
@@ -10465,7 +10465,7 @@
                 <a:ea typeface="Arial" pitchFamily="34" charset="-122"/>
                 <a:cs typeface="Arial" pitchFamily="34" charset="-120"/>
               </a:rPr>
-              <a:t>Product finder, force sensors, accelerometers sections</a:t>
+              <a:t>Product finder, industry partnerships</a:t>
             </a:r>
             <a:endParaRPr lang="en-US" sz="900" dirty="0"/>
           </a:p>
@@ -10568,7 +10568,7 @@
                 <a:ea typeface="Arial" pitchFamily="34" charset="-122"/>
                 <a:cs typeface="Arial" pitchFamily="34" charset="-120"/>
               </a:rPr>
-              <a:t>IEPE piezoelectric sensors, force sensors, accelerometers</a:t>
+              <a:t>IEPE piezoelectric sensors for force, pressure, acceleration measurement</a:t>
             </a:r>
             <a:endParaRPr lang="en-US" sz="900" dirty="0"/>
           </a:p>
@@ -10980,7 +10980,7 @@
                 <a:ea typeface="Arial" pitchFamily="34" charset="-122"/>
                 <a:cs typeface="Arial" pitchFamily="34" charset="-120"/>
               </a:rPr>
-              <a:t>Industrial measurement and industrial applications users</a:t>
+              <a:t>Industrial manufacturers requiring precision measurement technology</a:t>
             </a:r>
             <a:endParaRPr lang="en-US" sz="900" dirty="0"/>
           </a:p>
@@ -11083,7 +11083,7 @@
                 <a:ea typeface="Arial" pitchFamily="34" charset="-122"/>
                 <a:cs typeface="Arial" pitchFamily="34" charset="-120"/>
               </a:rPr>
-              <a:t>Measurement technology for force, pressure, acceleration sensors</a:t>
+              <a:t>Advanced measurement technology for industrial applications</a:t>
             </a:r>
             <a:endParaRPr lang="en-US" sz="900" dirty="0"/>
           </a:p>
@@ -11186,7 +11186,7 @@
                 <a:ea typeface="Arial" pitchFamily="34" charset="-122"/>
                 <a:cs typeface="Arial" pitchFamily="34" charset="-120"/>
               </a:rPr>
-              <a:t>eso GmbH merged with Kistler Instrumente GmbH in March 2021</a:t>
+              <a:t>eso GmbH fully merged with Kistler Instrumente GmbH in March 2021</a:t>
             </a:r>
             <a:endParaRPr lang="en-US" sz="900" dirty="0"/>
           </a:p>
@@ -11836,7 +11836,7 @@
                 <a:ea typeface="Arial" pitchFamily="34" charset="-122"/>
                 <a:cs typeface="Arial" pitchFamily="34" charset="-120"/>
               </a:rPr>
-              <a:t>World's leading manufacturer of hot runner systems</a:t>
+              <a:t>Unknown</a:t>
             </a:r>
             <a:endParaRPr lang="en-US" sz="900" dirty="0"/>
           </a:p>
@@ -12042,7 +12042,7 @@
                 <a:ea typeface="Arial" pitchFamily="34" charset="-122"/>
                 <a:cs typeface="Arial" pitchFamily="34" charset="-120"/>
               </a:rPr>
-              <a:t>Product education, application-specific solutions pages</a:t>
+              <a:t>Website, product consultations, industry partnerships</a:t>
             </a:r>
             <a:endParaRPr lang="en-US" sz="900" dirty="0"/>
           </a:p>
@@ -12145,7 +12145,7 @@
                 <a:ea typeface="Arial" pitchFamily="34" charset="-122"/>
                 <a:cs typeface="Arial" pitchFamily="34" charset="-120"/>
               </a:rPr>
-              <a:t>Hot runner systems, flow control, IntelliGate sequential molding</a:t>
+              <a:t>Hot runner systems with 50+ years development, advanced flow control technology</a:t>
             </a:r>
             <a:endParaRPr lang="en-US" sz="900" dirty="0"/>
           </a:p>
@@ -12248,7 +12248,7 @@
                 <a:ea typeface="Arial" pitchFamily="34" charset="-122"/>
                 <a:cs typeface="Arial" pitchFamily="34" charset="-120"/>
               </a:rPr>
-              <a:t>50+ years developing hot runner technology</a:t>
+              <a:t>Unknown</a:t>
             </a:r>
             <a:endParaRPr lang="en-US" sz="900" dirty="0"/>
           </a:p>
@@ -12557,7 +12557,7 @@
                 <a:ea typeface="Arial" pitchFamily="34" charset="-122"/>
                 <a:cs typeface="Arial" pitchFamily="34" charset="-120"/>
               </a:rPr>
-              <a:t>Plastics injection molding manufacturers worldwide</a:t>
+              <a:t>Injection molding manufacturers seeking efficiency and quality</a:t>
             </a:r>
             <a:endParaRPr lang="en-US" sz="900" dirty="0"/>
           </a:p>
@@ -12660,7 +12660,7 @@
                 <a:ea typeface="Arial" pitchFamily="34" charset="-122"/>
                 <a:cs typeface="Arial" pitchFamily="34" charset="-120"/>
               </a:rPr>
-              <a:t>Hot runner systems and flow control technology leadership</a:t>
+              <a:t>Innovative hot runner solutions for injection molding efficiency</a:t>
             </a:r>
             <a:endParaRPr lang="en-US" sz="900" dirty="0"/>
           </a:p>
@@ -12763,7 +12763,7 @@
                 <a:ea typeface="Arial" pitchFamily="34" charset="-122"/>
                 <a:cs typeface="Arial" pitchFamily="34" charset="-120"/>
               </a:rPr>
-              <a:t>Launched new IntelliGate Hot Runner with digital sensors</a:t>
+              <a:t>Launched new IntelliGate Hot Runner with digital sensor technology</a:t>
             </a:r>
             <a:endParaRPr lang="en-US" sz="900" dirty="0"/>
           </a:p>
@@ -13932,7 +13932,7 @@
                           <a:ea typeface="Arial" pitchFamily="34" charset="-122"/>
                           <a:cs typeface="Arial" pitchFamily="34" charset="-120"/>
                         </a:rPr>
-                        <a:t>World's leading manufacturer of hot runner systems</a:t>
+                        <a:t>Unknown</a:t>
                       </a:r>
                       <a:endParaRPr lang="en-US" sz="800" dirty="0">
                         <a:latin typeface="Arial" charset="0"/>
@@ -14616,7 +14616,7 @@
                           <a:ea typeface="Arial" pitchFamily="34" charset="-122"/>
                           <a:cs typeface="Arial" pitchFamily="34" charset="-120"/>
                         </a:rPr>
-                        <a:t>Product education</a:t>
+                        <a:t>Website</a:t>
                       </a:r>
                       <a:endParaRPr lang="en-US" sz="800" dirty="0">
                         <a:latin typeface="Arial" charset="0"/>
@@ -14822,7 +14822,7 @@
                           <a:ea typeface="Arial" pitchFamily="34" charset="-122"/>
                           <a:cs typeface="Arial" pitchFamily="34" charset="-120"/>
                         </a:rPr>
-                        <a:t>Trademark applications</a:t>
+                        <a:t>Trademark expertise with 500+ applications and registrations</a:t>
                       </a:r>
                       <a:endParaRPr lang="en-US" sz="800" dirty="0">
                         <a:latin typeface="Arial" charset="0"/>
@@ -14890,7 +14890,7 @@
                           <a:ea typeface="Arial" pitchFamily="34" charset="-122"/>
                           <a:cs typeface="Arial" pitchFamily="34" charset="-120"/>
                         </a:rPr>
-                        <a:t>IEPE piezoelectric sensors</a:t>
+                        <a:t>IEPE piezoelectric sensors for force</a:t>
                       </a:r>
                       <a:endParaRPr lang="en-US" sz="800" dirty="0">
                         <a:latin typeface="Arial" charset="0"/>
@@ -14958,7 +14958,7 @@
                           <a:ea typeface="Arial" pitchFamily="34" charset="-122"/>
                           <a:cs typeface="Arial" pitchFamily="34" charset="-120"/>
                         </a:rPr>
-                        <a:t>Hot runner systems</a:t>
+                        <a:t>Hot runner systems with 50+ years development</a:t>
                       </a:r>
                       <a:endParaRPr lang="en-US" sz="800" dirty="0">
                         <a:latin typeface="Arial" charset="0"/>
@@ -15164,7 +15164,7 @@
                           <a:ea typeface="Arial" pitchFamily="34" charset="-122"/>
                           <a:cs typeface="Arial" pitchFamily="34" charset="-120"/>
                         </a:rPr>
-                        <a:t>500+ trademark applications and registrations credited</a:t>
+                        <a:t>Unknown</a:t>
                       </a:r>
                       <a:endParaRPr lang="en-US" sz="800" dirty="0">
                         <a:latin typeface="Arial" charset="0"/>
@@ -15300,7 +15300,7 @@
                           <a:ea typeface="Arial" pitchFamily="34" charset="-122"/>
                           <a:cs typeface="Arial" pitchFamily="34" charset="-120"/>
                         </a:rPr>
-                        <a:t>50+ years developing hot runner technology</a:t>
+                        <a:t>Unknown</a:t>
                       </a:r>
                       <a:endParaRPr lang="en-US" sz="800" dirty="0">
                         <a:latin typeface="Arial" charset="0"/>
@@ -16258,7 +16258,7 @@
                           <a:ea typeface="Arial" pitchFamily="34" charset="-122"/>
                           <a:cs typeface="Arial" pitchFamily="34" charset="-120"/>
                         </a:rPr>
-                        <a:t>Industrial measurement and industrial applications users</a:t>
+                        <a:t>Industrial manufacturers requiring precision measurement technology</a:t>
                       </a:r>
                       <a:endParaRPr lang="en-US" sz="800" dirty="0">
                         <a:latin typeface="Arial" charset="0"/>
@@ -16326,7 +16326,7 @@
                           <a:ea typeface="Arial" pitchFamily="34" charset="-122"/>
                           <a:cs typeface="Arial" pitchFamily="34" charset="-120"/>
                         </a:rPr>
-                        <a:t>Plastics injection molding manufacturers worldwide</a:t>
+                        <a:t>Injection molding manufacturers seeking efficiency and quality</a:t>
                       </a:r>
                       <a:endParaRPr lang="en-US" sz="800" dirty="0">
                         <a:latin typeface="Arial" charset="0"/>
@@ -16532,7 +16532,7 @@
                           <a:ea typeface="Arial" pitchFamily="34" charset="-122"/>
                           <a:cs typeface="Arial" pitchFamily="34" charset="-120"/>
                         </a:rPr>
-                        <a:t>Trademark</a:t>
+                        <a:t>Intellectual property and entertainment law expertise</a:t>
                       </a:r>
                       <a:endParaRPr lang="en-US" sz="800" dirty="0">
                         <a:latin typeface="Arial" charset="0"/>
@@ -16600,7 +16600,7 @@
                           <a:ea typeface="Arial" pitchFamily="34" charset="-122"/>
                           <a:cs typeface="Arial" pitchFamily="34" charset="-120"/>
                         </a:rPr>
-                        <a:t>Measurement technology for force</a:t>
+                        <a:t>Advanced measurement technology for industrial applications</a:t>
                       </a:r>
                       <a:endParaRPr lang="en-US" sz="800" dirty="0">
                         <a:latin typeface="Arial" charset="0"/>
@@ -16668,7 +16668,7 @@
                           <a:ea typeface="Arial" pitchFamily="34" charset="-122"/>
                           <a:cs typeface="Arial" pitchFamily="34" charset="-120"/>
                         </a:rPr>
-                        <a:t>Hot runner systems and flow control technology leadership</a:t>
+                        <a:t>Innovative hot runner solutions for injection molding efficiency</a:t>
                       </a:r>
                       <a:endParaRPr lang="en-US" sz="800" dirty="0">
                         <a:latin typeface="Arial" charset="0"/>
@@ -16942,7 +16942,7 @@
                           <a:ea typeface="Arial" pitchFamily="34" charset="-122"/>
                           <a:cs typeface="Arial" pitchFamily="34" charset="-120"/>
                         </a:rPr>
-                        <a:t>eso GmbH merged with Kistler Instrumente GmbH in March 2021</a:t>
+                        <a:t>eso GmbH fully merged with Kistler Instrumente GmbH in March 2021</a:t>
                       </a:r>
                       <a:endParaRPr lang="en-US" sz="800" dirty="0">
                         <a:latin typeface="Arial" charset="0"/>
@@ -17010,7 +17010,7 @@
                           <a:ea typeface="Arial" pitchFamily="34" charset="-122"/>
                           <a:cs typeface="Arial" pitchFamily="34" charset="-120"/>
                         </a:rPr>
-                        <a:t>Launched new IntelliGate Hot Runner with digital sensors</a:t>
+                        <a:t>Launched new IntelliGate Hot Runner with digital sensor technology</a:t>
                       </a:r>
                       <a:endParaRPr lang="en-US" sz="800" dirty="0">
                         <a:latin typeface="Arial" charset="0"/>

--- a/mesh_bioplastics_CI_Report.pptx
+++ b/mesh_bioplastics_CI_Report.pptx
@@ -4909,7 +4909,7 @@
                 <a:ea typeface="Arial" pitchFamily="34" charset="-122"/>
                 <a:cs typeface="Arial" pitchFamily="34" charset="-120"/>
               </a:rPr>
-              <a:t>Material Science Innovation vs. Equipment/Process Focus</a:t>
+              <a:t>Material Sustainability Integration</a:t>
             </a:r>
             <a:endParaRPr lang="en-US" sz="900" dirty="0"/>
           </a:p>
@@ -4987,7 +4987,7 @@
                 <a:ea typeface="Arial" pitchFamily="34" charset="-122"/>
                 <a:cs typeface="Arial" pitchFamily="34" charset="-120"/>
               </a:rPr>
-              <a:t>Integrated Intelligence (embedded AI) vs. Standalone Tooling</a:t>
+              <a:t>Manufacturing Intelligence Sophistication</a:t>
             </a:r>
             <a:endParaRPr lang="en-US" sz="900" dirty="0"/>
           </a:p>
@@ -8888,7 +8888,7 @@
                 <a:ea typeface="Arial" pitchFamily="34" charset="-122"/>
                 <a:cs typeface="Arial" pitchFamily="34" charset="-120"/>
               </a:rPr>
-              <a:t>Direct client relationships, attorney referrals</a:t>
+              <a:t>Direct client relationships, referrals from other attorneys</a:t>
             </a:r>
             <a:endParaRPr lang="en-US" sz="900" dirty="0"/>
           </a:p>
@@ -8991,7 +8991,7 @@
                 <a:ea typeface="Arial" pitchFamily="34" charset="-122"/>
                 <a:cs typeface="Arial" pitchFamily="34" charset="-120"/>
               </a:rPr>
-              <a:t>Trademark expertise with 500+ applications and registrations</a:t>
+              <a:t>Trademark portfolio management, entertainment law, music rights clearance</a:t>
             </a:r>
             <a:endParaRPr lang="en-US" sz="900" dirty="0"/>
           </a:p>
@@ -9094,7 +9094,7 @@
                 <a:ea typeface="Arial" pitchFamily="34" charset="-122"/>
                 <a:cs typeface="Arial" pitchFamily="34" charset="-120"/>
               </a:rPr>
-              <a:t>Unknown</a:t>
+              <a:t>500+ trademark applications and registrations credited</a:t>
             </a:r>
             <a:endParaRPr lang="en-US" sz="900" dirty="0"/>
           </a:p>
@@ -10465,7 +10465,7 @@
                 <a:ea typeface="Arial" pitchFamily="34" charset="-122"/>
                 <a:cs typeface="Arial" pitchFamily="34" charset="-120"/>
               </a:rPr>
-              <a:t>Product finder, industry partnerships</a:t>
+              <a:t>Product finder, technical content marketing</a:t>
             </a:r>
             <a:endParaRPr lang="en-US" sz="900" dirty="0"/>
           </a:p>
@@ -10568,7 +10568,7 @@
                 <a:ea typeface="Arial" pitchFamily="34" charset="-122"/>
                 <a:cs typeface="Arial" pitchFamily="34" charset="-120"/>
               </a:rPr>
-              <a:t>IEPE piezoelectric sensors for force, pressure, acceleration measurement</a:t>
+              <a:t>IEPE piezoelectric sensors, force sensors, accelerometers, vibration measurement</a:t>
             </a:r>
             <a:endParaRPr lang="en-US" sz="900" dirty="0"/>
           </a:p>
@@ -10980,7 +10980,7 @@
                 <a:ea typeface="Arial" pitchFamily="34" charset="-122"/>
                 <a:cs typeface="Arial" pitchFamily="34" charset="-120"/>
               </a:rPr>
-              <a:t>Industrial manufacturers requiring precision measurement technology</a:t>
+              <a:t>Industrial measurement and testing applications requiring vibration analysis</a:t>
             </a:r>
             <a:endParaRPr lang="en-US" sz="900" dirty="0"/>
           </a:p>
@@ -11083,7 +11083,7 @@
                 <a:ea typeface="Arial" pitchFamily="34" charset="-122"/>
                 <a:cs typeface="Arial" pitchFamily="34" charset="-120"/>
               </a:rPr>
-              <a:t>Advanced measurement technology for industrial applications</a:t>
+              <a:t>Advanced sensor technology for precise industrial measurement</a:t>
             </a:r>
             <a:endParaRPr lang="en-US" sz="900" dirty="0"/>
           </a:p>
@@ -11186,7 +11186,7 @@
                 <a:ea typeface="Arial" pitchFamily="34" charset="-122"/>
                 <a:cs typeface="Arial" pitchFamily="34" charset="-120"/>
               </a:rPr>
-              <a:t>eso GmbH fully merged with Kistler Instrumente GmbH in March 2021</a:t>
+              <a:t>March 2021 eso GmbH merged into Kistler Instrumente GmbH</a:t>
             </a:r>
             <a:endParaRPr lang="en-US" sz="900" dirty="0"/>
           </a:p>
@@ -11836,7 +11836,7 @@
                 <a:ea typeface="Arial" pitchFamily="34" charset="-122"/>
                 <a:cs typeface="Arial" pitchFamily="34" charset="-120"/>
               </a:rPr>
-              <a:t>Unknown</a:t>
+              <a:t>World's leading manufacturer of hot runner systems</a:t>
             </a:r>
             <a:endParaRPr lang="en-US" sz="900" dirty="0"/>
           </a:p>
@@ -12042,7 +12042,7 @@
                 <a:ea typeface="Arial" pitchFamily="34" charset="-122"/>
                 <a:cs typeface="Arial" pitchFamily="34" charset="-120"/>
               </a:rPr>
-              <a:t>Website, product consultations, industry partnerships</a:t>
+              <a:t>Content marketing, product education, case studies</a:t>
             </a:r>
             <a:endParaRPr lang="en-US" sz="900" dirty="0"/>
           </a:p>
@@ -12145,7 +12145,7 @@
                 <a:ea typeface="Arial" pitchFamily="34" charset="-122"/>
                 <a:cs typeface="Arial" pitchFamily="34" charset="-120"/>
               </a:rPr>
-              <a:t>Hot runner systems with 50+ years development, advanced flow control technology</a:t>
+              <a:t>IntelliGate hot runner with digital sensors, flow control technology, 50+ years development</a:t>
             </a:r>
             <a:endParaRPr lang="en-US" sz="900" dirty="0"/>
           </a:p>
@@ -12557,7 +12557,7 @@
                 <a:ea typeface="Arial" pitchFamily="34" charset="-122"/>
                 <a:cs typeface="Arial" pitchFamily="34" charset="-120"/>
               </a:rPr>
-              <a:t>Injection molding manufacturers seeking efficiency and quality</a:t>
+              <a:t>Plastics injection molding manufacturers seeking efficiency gains</a:t>
             </a:r>
             <a:endParaRPr lang="en-US" sz="900" dirty="0"/>
           </a:p>
@@ -12660,7 +12660,7 @@
                 <a:ea typeface="Arial" pitchFamily="34" charset="-122"/>
                 <a:cs typeface="Arial" pitchFamily="34" charset="-120"/>
               </a:rPr>
-              <a:t>Innovative hot runner solutions for injection molding efficiency</a:t>
+              <a:t>Hot runner systems enabling material savings and cycle time reduction</a:t>
             </a:r>
             <a:endParaRPr lang="en-US" sz="900" dirty="0"/>
           </a:p>
@@ -12763,7 +12763,7 @@
                 <a:ea typeface="Arial" pitchFamily="34" charset="-122"/>
                 <a:cs typeface="Arial" pitchFamily="34" charset="-120"/>
               </a:rPr>
-              <a:t>Launched new IntelliGate Hot Runner with digital sensor technology</a:t>
+              <a:t>New IntelliGate Hot Runner with digital sensor technology launched</a:t>
             </a:r>
             <a:endParaRPr lang="en-US" sz="900" dirty="0"/>
           </a:p>
@@ -13932,7 +13932,7 @@
                           <a:ea typeface="Arial" pitchFamily="34" charset="-122"/>
                           <a:cs typeface="Arial" pitchFamily="34" charset="-120"/>
                         </a:rPr>
-                        <a:t>Unknown</a:t>
+                        <a:t>World's leading manufacturer of hot runner systems</a:t>
                       </a:r>
                       <a:endParaRPr lang="en-US" sz="800" dirty="0">
                         <a:latin typeface="Arial" charset="0"/>
@@ -14616,7 +14616,7 @@
                           <a:ea typeface="Arial" pitchFamily="34" charset="-122"/>
                           <a:cs typeface="Arial" pitchFamily="34" charset="-120"/>
                         </a:rPr>
-                        <a:t>Website</a:t>
+                        <a:t>Content marketing</a:t>
                       </a:r>
                       <a:endParaRPr lang="en-US" sz="800" dirty="0">
                         <a:latin typeface="Arial" charset="0"/>
@@ -14822,7 +14822,7 @@
                           <a:ea typeface="Arial" pitchFamily="34" charset="-122"/>
                           <a:cs typeface="Arial" pitchFamily="34" charset="-120"/>
                         </a:rPr>
-                        <a:t>Trademark expertise with 500+ applications and registrations</a:t>
+                        <a:t>Trademark portfolio management</a:t>
                       </a:r>
                       <a:endParaRPr lang="en-US" sz="800" dirty="0">
                         <a:latin typeface="Arial" charset="0"/>
@@ -14890,7 +14890,7 @@
                           <a:ea typeface="Arial" pitchFamily="34" charset="-122"/>
                           <a:cs typeface="Arial" pitchFamily="34" charset="-120"/>
                         </a:rPr>
-                        <a:t>IEPE piezoelectric sensors for force</a:t>
+                        <a:t>IEPE piezoelectric sensors</a:t>
                       </a:r>
                       <a:endParaRPr lang="en-US" sz="800" dirty="0">
                         <a:latin typeface="Arial" charset="0"/>
@@ -14958,7 +14958,7 @@
                           <a:ea typeface="Arial" pitchFamily="34" charset="-122"/>
                           <a:cs typeface="Arial" pitchFamily="34" charset="-120"/>
                         </a:rPr>
-                        <a:t>Hot runner systems with 50+ years development</a:t>
+                        <a:t>IntelliGate hot runner with digital sensors</a:t>
                       </a:r>
                       <a:endParaRPr lang="en-US" sz="800" dirty="0">
                         <a:latin typeface="Arial" charset="0"/>
@@ -15164,7 +15164,7 @@
                           <a:ea typeface="Arial" pitchFamily="34" charset="-122"/>
                           <a:cs typeface="Arial" pitchFamily="34" charset="-120"/>
                         </a:rPr>
-                        <a:t>Unknown</a:t>
+                        <a:t>500+ trademark applications and registrations credited</a:t>
                       </a:r>
                       <a:endParaRPr lang="en-US" sz="800" dirty="0">
                         <a:latin typeface="Arial" charset="0"/>
@@ -16258,7 +16258,7 @@
                           <a:ea typeface="Arial" pitchFamily="34" charset="-122"/>
                           <a:cs typeface="Arial" pitchFamily="34" charset="-120"/>
                         </a:rPr>
-                        <a:t>Industrial manufacturers requiring precision measurement technology</a:t>
+                        <a:t>Industrial measurement and testing applications requiring vibration analysis</a:t>
                       </a:r>
                       <a:endParaRPr lang="en-US" sz="800" dirty="0">
                         <a:latin typeface="Arial" charset="0"/>
@@ -16326,7 +16326,7 @@
                           <a:ea typeface="Arial" pitchFamily="34" charset="-122"/>
                           <a:cs typeface="Arial" pitchFamily="34" charset="-120"/>
                         </a:rPr>
-                        <a:t>Injection molding manufacturers seeking efficiency and quality</a:t>
+                        <a:t>Plastics injection molding manufacturers seeking efficiency gains</a:t>
                       </a:r>
                       <a:endParaRPr lang="en-US" sz="800" dirty="0">
                         <a:latin typeface="Arial" charset="0"/>
@@ -16600,7 +16600,7 @@
                           <a:ea typeface="Arial" pitchFamily="34" charset="-122"/>
                           <a:cs typeface="Arial" pitchFamily="34" charset="-120"/>
                         </a:rPr>
-                        <a:t>Advanced measurement technology for industrial applications</a:t>
+                        <a:t>Advanced sensor technology for precise industrial measurement</a:t>
                       </a:r>
                       <a:endParaRPr lang="en-US" sz="800" dirty="0">
                         <a:latin typeface="Arial" charset="0"/>
@@ -16668,7 +16668,7 @@
                           <a:ea typeface="Arial" pitchFamily="34" charset="-122"/>
                           <a:cs typeface="Arial" pitchFamily="34" charset="-120"/>
                         </a:rPr>
-                        <a:t>Innovative hot runner solutions for injection molding efficiency</a:t>
+                        <a:t>Hot runner systems enabling material savings and cycle time reduction</a:t>
                       </a:r>
                       <a:endParaRPr lang="en-US" sz="800" dirty="0">
                         <a:latin typeface="Arial" charset="0"/>
@@ -16942,7 +16942,7 @@
                           <a:ea typeface="Arial" pitchFamily="34" charset="-122"/>
                           <a:cs typeface="Arial" pitchFamily="34" charset="-120"/>
                         </a:rPr>
-                        <a:t>eso GmbH fully merged with Kistler Instrumente GmbH in March 2021</a:t>
+                        <a:t>March 2021 eso GmbH merged into Kistler Instrumente GmbH</a:t>
                       </a:r>
                       <a:endParaRPr lang="en-US" sz="800" dirty="0">
                         <a:latin typeface="Arial" charset="0"/>
@@ -17010,7 +17010,7 @@
                           <a:ea typeface="Arial" pitchFamily="34" charset="-122"/>
                           <a:cs typeface="Arial" pitchFamily="34" charset="-120"/>
                         </a:rPr>
-                        <a:t>Launched new IntelliGate Hot Runner with digital sensor technology</a:t>
+                        <a:t>New IntelliGate Hot Runner with digital sensor technology launched</a:t>
                       </a:r>
                       <a:endParaRPr lang="en-US" sz="800" dirty="0">
                         <a:latin typeface="Arial" charset="0"/>

--- a/mesh_bioplastics_CI_Report.pptx
+++ b/mesh_bioplastics_CI_Report.pptx
@@ -4909,7 +4909,7 @@
                 <a:ea typeface="Arial" pitchFamily="34" charset="-122"/>
                 <a:cs typeface="Arial" pitchFamily="34" charset="-120"/>
               </a:rPr>
-              <a:t>Material Sustainability Integration</a:t>
+              <a:t>Material Innovation vs. Process Innovation</a:t>
             </a:r>
             <a:endParaRPr lang="en-US" sz="900" dirty="0"/>
           </a:p>
@@ -4987,7 +4987,7 @@
                 <a:ea typeface="Arial" pitchFamily="34" charset="-122"/>
                 <a:cs typeface="Arial" pitchFamily="34" charset="-120"/>
               </a:rPr>
-              <a:t>Manufacturing Intelligence Sophistication</a:t>
+              <a:t>Integrated Intelligence vs. Hardware-First</a:t>
             </a:r>
             <a:endParaRPr lang="en-US" sz="900" dirty="0"/>
           </a:p>
@@ -8270,7 +8270,7 @@
                 <a:ea typeface="Arial" pitchFamily="34" charset="-122"/>
                 <a:cs typeface="Arial" pitchFamily="34" charset="-120"/>
               </a:rPr>
-              <a:t>Emeryville, United States | https://www.rjg.com</a:t>
+              <a:t>Emeryville, California, United States | https://www.rjg.com</a:t>
             </a:r>
             <a:endParaRPr lang="en-US" sz="900" dirty="0"/>
           </a:p>
@@ -8888,7 +8888,7 @@
                 <a:ea typeface="Arial" pitchFamily="34" charset="-122"/>
                 <a:cs typeface="Arial" pitchFamily="34" charset="-120"/>
               </a:rPr>
-              <a:t>Direct client relationships, referrals from other attorneys</a:t>
+              <a:t>Direct contact, referrals from other attorneys</a:t>
             </a:r>
             <a:endParaRPr lang="en-US" sz="900" dirty="0"/>
           </a:p>
@@ -8991,7 +8991,7 @@
                 <a:ea typeface="Arial" pitchFamily="34" charset="-122"/>
                 <a:cs typeface="Arial" pitchFamily="34" charset="-120"/>
               </a:rPr>
-              <a:t>Trademark portfolio management, entertainment law, music rights clearance</a:t>
+              <a:t>Trademark applications, copyright, entertainment law services</a:t>
             </a:r>
             <a:endParaRPr lang="en-US" sz="900" dirty="0"/>
           </a:p>
@@ -9403,7 +9403,7 @@
                 <a:ea typeface="Arial" pitchFamily="34" charset="-122"/>
                 <a:cs typeface="Arial" pitchFamily="34" charset="-120"/>
               </a:rPr>
-              <a:t>Entertainment industry producers, directors, actors, musicians</a:t>
+              <a:t>Entertainment producers, directors, actors, musicians, IP holders</a:t>
             </a:r>
             <a:endParaRPr lang="en-US" sz="900" dirty="0"/>
           </a:p>
@@ -9847,7 +9847,7 @@
                 <a:ea typeface="Arial" pitchFamily="34" charset="-122"/>
                 <a:cs typeface="Arial" pitchFamily="34" charset="-120"/>
               </a:rPr>
-              <a:t>Sindelfingen, Germany | https://www.kistler.com</a:t>
+              <a:t>Unknown | https://www.kistler.com</a:t>
             </a:r>
             <a:endParaRPr lang="en-US" sz="900" dirty="0"/>
           </a:p>
@@ -10465,7 +10465,7 @@
                 <a:ea typeface="Arial" pitchFamily="34" charset="-122"/>
                 <a:cs typeface="Arial" pitchFamily="34" charset="-120"/>
               </a:rPr>
-              <a:t>Product finder, technical content marketing</a:t>
+              <a:t>Product finder, online catalog navigation</a:t>
             </a:r>
             <a:endParaRPr lang="en-US" sz="900" dirty="0"/>
           </a:p>
@@ -10568,7 +10568,7 @@
                 <a:ea typeface="Arial" pitchFamily="34" charset="-122"/>
                 <a:cs typeface="Arial" pitchFamily="34" charset="-120"/>
               </a:rPr>
-              <a:t>IEPE piezoelectric sensors, force sensors, accelerometers, vibration measurement</a:t>
+              <a:t>IEPE piezoelectric sensors, force sensors, accelerometers</a:t>
             </a:r>
             <a:endParaRPr lang="en-US" sz="900" dirty="0"/>
           </a:p>
@@ -10980,7 +10980,7 @@
                 <a:ea typeface="Arial" pitchFamily="34" charset="-122"/>
                 <a:cs typeface="Arial" pitchFamily="34" charset="-120"/>
               </a:rPr>
-              <a:t>Industrial measurement and testing applications requiring vibration analysis</a:t>
+              <a:t>Industrial manufacturers requiring force and acceleration measurement</a:t>
             </a:r>
             <a:endParaRPr lang="en-US" sz="900" dirty="0"/>
           </a:p>
@@ -11083,7 +11083,7 @@
                 <a:ea typeface="Arial" pitchFamily="34" charset="-122"/>
                 <a:cs typeface="Arial" pitchFamily="34" charset="-120"/>
               </a:rPr>
-              <a:t>Advanced sensor technology for precise industrial measurement</a:t>
+              <a:t>Precision measurement technology for industrial applications</a:t>
             </a:r>
             <a:endParaRPr lang="en-US" sz="900" dirty="0"/>
           </a:p>
@@ -11186,7 +11186,7 @@
                 <a:ea typeface="Arial" pitchFamily="34" charset="-122"/>
                 <a:cs typeface="Arial" pitchFamily="34" charset="-120"/>
               </a:rPr>
-              <a:t>March 2021 eso GmbH merged into Kistler Instrumente GmbH</a:t>
+              <a:t>Acquired eso GmbH in 2017; merged with Kistler Instrumente GmbH in March 2021</a:t>
             </a:r>
             <a:endParaRPr lang="en-US" sz="900" dirty="0"/>
           </a:p>
@@ -12042,7 +12042,7 @@
                 <a:ea typeface="Arial" pitchFamily="34" charset="-122"/>
                 <a:cs typeface="Arial" pitchFamily="34" charset="-120"/>
               </a:rPr>
-              <a:t>Content marketing, product education, case studies</a:t>
+              <a:t>Product pages, landing pages, consultative sales approach</a:t>
             </a:r>
             <a:endParaRPr lang="en-US" sz="900" dirty="0"/>
           </a:p>
@@ -12145,7 +12145,7 @@
                 <a:ea typeface="Arial" pitchFamily="34" charset="-122"/>
                 <a:cs typeface="Arial" pitchFamily="34" charset="-120"/>
               </a:rPr>
-              <a:t>IntelliGate hot runner with digital sensors, flow control technology, 50+ years development</a:t>
+              <a:t>Hot runner systems, IntelliGate digital sensor technology, flow control</a:t>
             </a:r>
             <a:endParaRPr lang="en-US" sz="900" dirty="0"/>
           </a:p>
@@ -12248,7 +12248,7 @@
                 <a:ea typeface="Arial" pitchFamily="34" charset="-122"/>
                 <a:cs typeface="Arial" pitchFamily="34" charset="-120"/>
               </a:rPr>
-              <a:t>Unknown</a:t>
+              <a:t>Long-standing customer relationships, 50+ years experience</a:t>
             </a:r>
             <a:endParaRPr lang="en-US" sz="900" dirty="0"/>
           </a:p>
@@ -12660,7 +12660,7 @@
                 <a:ea typeface="Arial" pitchFamily="34" charset="-122"/>
                 <a:cs typeface="Arial" pitchFamily="34" charset="-120"/>
               </a:rPr>
-              <a:t>Hot runner systems enabling material savings and cycle time reduction</a:t>
+              <a:t>Advanced hot runner solutions to improve injection molding productivity</a:t>
             </a:r>
             <a:endParaRPr lang="en-US" sz="900" dirty="0"/>
           </a:p>
@@ -12763,7 +12763,7 @@
                 <a:ea typeface="Arial" pitchFamily="34" charset="-122"/>
                 <a:cs typeface="Arial" pitchFamily="34" charset="-120"/>
               </a:rPr>
-              <a:t>New IntelliGate Hot Runner with digital sensor technology launched</a:t>
+              <a:t>Launched new IntelliGate Hot Runner with digital sensor technology</a:t>
             </a:r>
             <a:endParaRPr lang="en-US" sz="900" dirty="0"/>
           </a:p>
@@ -14480,7 +14480,7 @@
                           <a:ea typeface="Arial" pitchFamily="34" charset="-122"/>
                           <a:cs typeface="Arial" pitchFamily="34" charset="-120"/>
                         </a:rPr>
-                        <a:t>Direct client relationships</a:t>
+                        <a:t>Direct contact</a:t>
                       </a:r>
                       <a:endParaRPr lang="en-US" sz="800" dirty="0">
                         <a:latin typeface="Arial" charset="0"/>
@@ -14616,7 +14616,7 @@
                           <a:ea typeface="Arial" pitchFamily="34" charset="-122"/>
                           <a:cs typeface="Arial" pitchFamily="34" charset="-120"/>
                         </a:rPr>
-                        <a:t>Content marketing</a:t>
+                        <a:t>Product pages</a:t>
                       </a:r>
                       <a:endParaRPr lang="en-US" sz="800" dirty="0">
                         <a:latin typeface="Arial" charset="0"/>
@@ -14822,7 +14822,7 @@
                           <a:ea typeface="Arial" pitchFamily="34" charset="-122"/>
                           <a:cs typeface="Arial" pitchFamily="34" charset="-120"/>
                         </a:rPr>
-                        <a:t>Trademark portfolio management</a:t>
+                        <a:t>Trademark applications</a:t>
                       </a:r>
                       <a:endParaRPr lang="en-US" sz="800" dirty="0">
                         <a:latin typeface="Arial" charset="0"/>
@@ -14958,7 +14958,7 @@
                           <a:ea typeface="Arial" pitchFamily="34" charset="-122"/>
                           <a:cs typeface="Arial" pitchFamily="34" charset="-120"/>
                         </a:rPr>
-                        <a:t>IntelliGate hot runner with digital sensors</a:t>
+                        <a:t>Hot runner systems</a:t>
                       </a:r>
                       <a:endParaRPr lang="en-US" sz="800" dirty="0">
                         <a:latin typeface="Arial" charset="0"/>
@@ -15300,7 +15300,7 @@
                           <a:ea typeface="Arial" pitchFamily="34" charset="-122"/>
                           <a:cs typeface="Arial" pitchFamily="34" charset="-120"/>
                         </a:rPr>
-                        <a:t>Unknown</a:t>
+                        <a:t>Long-standing customer relationships</a:t>
                       </a:r>
                       <a:endParaRPr lang="en-US" sz="800" dirty="0">
                         <a:latin typeface="Arial" charset="0"/>
@@ -16190,7 +16190,7 @@
                           <a:ea typeface="Arial" pitchFamily="34" charset="-122"/>
                           <a:cs typeface="Arial" pitchFamily="34" charset="-120"/>
                         </a:rPr>
-                        <a:t>Entertainment industry producers</a:t>
+                        <a:t>Entertainment producers</a:t>
                       </a:r>
                       <a:endParaRPr lang="en-US" sz="800" dirty="0">
                         <a:latin typeface="Arial" charset="0"/>
@@ -16258,7 +16258,7 @@
                           <a:ea typeface="Arial" pitchFamily="34" charset="-122"/>
                           <a:cs typeface="Arial" pitchFamily="34" charset="-120"/>
                         </a:rPr>
-                        <a:t>Industrial measurement and testing applications requiring vibration analysis</a:t>
+                        <a:t>Industrial manufacturers requiring force and acceleration measurement</a:t>
                       </a:r>
                       <a:endParaRPr lang="en-US" sz="800" dirty="0">
                         <a:latin typeface="Arial" charset="0"/>
@@ -16600,7 +16600,7 @@
                           <a:ea typeface="Arial" pitchFamily="34" charset="-122"/>
                           <a:cs typeface="Arial" pitchFamily="34" charset="-120"/>
                         </a:rPr>
-                        <a:t>Advanced sensor technology for precise industrial measurement</a:t>
+                        <a:t>Precision measurement technology for industrial applications</a:t>
                       </a:r>
                       <a:endParaRPr lang="en-US" sz="800" dirty="0">
                         <a:latin typeface="Arial" charset="0"/>
@@ -16668,7 +16668,7 @@
                           <a:ea typeface="Arial" pitchFamily="34" charset="-122"/>
                           <a:cs typeface="Arial" pitchFamily="34" charset="-120"/>
                         </a:rPr>
-                        <a:t>Hot runner systems enabling material savings and cycle time reduction</a:t>
+                        <a:t>Advanced hot runner solutions to improve injection molding productivity</a:t>
                       </a:r>
                       <a:endParaRPr lang="en-US" sz="800" dirty="0">
                         <a:latin typeface="Arial" charset="0"/>
@@ -16942,7 +16942,7 @@
                           <a:ea typeface="Arial" pitchFamily="34" charset="-122"/>
                           <a:cs typeface="Arial" pitchFamily="34" charset="-120"/>
                         </a:rPr>
-                        <a:t>March 2021 eso GmbH merged into Kistler Instrumente GmbH</a:t>
+                        <a:t>Acquired eso GmbH in 2017; merged with Kistler Instrumente GmbH in March 2021</a:t>
                       </a:r>
                       <a:endParaRPr lang="en-US" sz="800" dirty="0">
                         <a:latin typeface="Arial" charset="0"/>
@@ -17010,7 +17010,7 @@
                           <a:ea typeface="Arial" pitchFamily="34" charset="-122"/>
                           <a:cs typeface="Arial" pitchFamily="34" charset="-120"/>
                         </a:rPr>
-                        <a:t>New IntelliGate Hot Runner with digital sensor technology launched</a:t>
+                        <a:t>Launched new IntelliGate Hot Runner with digital sensor technology</a:t>
                       </a:r>
                       <a:endParaRPr lang="en-US" sz="800" dirty="0">
                         <a:latin typeface="Arial" charset="0"/>

--- a/mesh_bioplastics_CI_Report.pptx
+++ b/mesh_bioplastics_CI_Report.pptx
@@ -4909,7 +4909,7 @@
                 <a:ea typeface="Arial" pitchFamily="34" charset="-122"/>
                 <a:cs typeface="Arial" pitchFamily="34" charset="-120"/>
               </a:rPr>
-              <a:t>Material Innovation vs. Process Innovation</a:t>
+              <a:t>Material Science Innovation vs. Process Equipment Focus</a:t>
             </a:r>
             <a:endParaRPr lang="en-US" sz="900" dirty="0"/>
           </a:p>
@@ -4987,7 +4987,7 @@
                 <a:ea typeface="Arial" pitchFamily="34" charset="-122"/>
                 <a:cs typeface="Arial" pitchFamily="34" charset="-120"/>
               </a:rPr>
-              <a:t>Integrated Intelligence vs. Hardware-First</a:t>
+              <a:t>Integrated AI Automation vs. Standalone Sensor/Monitoring</a:t>
             </a:r>
             <a:endParaRPr lang="en-US" sz="900" dirty="0"/>
           </a:p>
@@ -8888,7 +8888,7 @@
                 <a:ea typeface="Arial" pitchFamily="34" charset="-122"/>
                 <a:cs typeface="Arial" pitchFamily="34" charset="-120"/>
               </a:rPr>
-              <a:t>Direct contact, referrals from other attorneys</a:t>
+              <a:t>Direct client contact, referrals from other attorneys</a:t>
             </a:r>
             <a:endParaRPr lang="en-US" sz="900" dirty="0"/>
           </a:p>
@@ -8991,7 +8991,7 @@
                 <a:ea typeface="Arial" pitchFamily="34" charset="-122"/>
                 <a:cs typeface="Arial" pitchFamily="34" charset="-120"/>
               </a:rPr>
-              <a:t>Trademark applications, copyright, entertainment law services</a:t>
+              <a:t>Trademark applications, copyright, entertainment law practice expertise</a:t>
             </a:r>
             <a:endParaRPr lang="en-US" sz="900" dirty="0"/>
           </a:p>
@@ -9094,7 +9094,7 @@
                 <a:ea typeface="Arial" pitchFamily="34" charset="-122"/>
                 <a:cs typeface="Arial" pitchFamily="34" charset="-120"/>
               </a:rPr>
-              <a:t>500+ trademark applications and registrations credited</a:t>
+              <a:t>500+ trademark applications and registrations completed</a:t>
             </a:r>
             <a:endParaRPr lang="en-US" sz="900" dirty="0"/>
           </a:p>
@@ -9403,7 +9403,7 @@
                 <a:ea typeface="Arial" pitchFamily="34" charset="-122"/>
                 <a:cs typeface="Arial" pitchFamily="34" charset="-120"/>
               </a:rPr>
-              <a:t>Entertainment producers, directors, actors, musicians, IP holders</a:t>
+              <a:t>Entertainment industry professionals, trademark applicants, copyright holders</a:t>
             </a:r>
             <a:endParaRPr lang="en-US" sz="900" dirty="0"/>
           </a:p>
@@ -9506,7 +9506,7 @@
                 <a:ea typeface="Arial" pitchFamily="34" charset="-122"/>
                 <a:cs typeface="Arial" pitchFamily="34" charset="-120"/>
               </a:rPr>
-              <a:t>Intellectual property and entertainment law expertise</a:t>
+              <a:t>Intellectual property and entertainment law expertise with 500+ trademark registrations</a:t>
             </a:r>
             <a:endParaRPr lang="en-US" sz="900" dirty="0"/>
           </a:p>
@@ -10465,7 +10465,7 @@
                 <a:ea typeface="Arial" pitchFamily="34" charset="-122"/>
                 <a:cs typeface="Arial" pitchFamily="34" charset="-120"/>
               </a:rPr>
-              <a:t>Product finder, online catalog navigation</a:t>
+              <a:t>Product finder, direct website navigation</a:t>
             </a:r>
             <a:endParaRPr lang="en-US" sz="900" dirty="0"/>
           </a:p>
@@ -10568,7 +10568,7 @@
                 <a:ea typeface="Arial" pitchFamily="34" charset="-122"/>
                 <a:cs typeface="Arial" pitchFamily="34" charset="-120"/>
               </a:rPr>
-              <a:t>IEPE piezoelectric sensors, force sensors, accelerometers</a:t>
+              <a:t>IEPE piezoelectric sensors, force sensors, accelerometers for industrial measurement</a:t>
             </a:r>
             <a:endParaRPr lang="en-US" sz="900" dirty="0"/>
           </a:p>
@@ -10980,7 +10980,7 @@
                 <a:ea typeface="Arial" pitchFamily="34" charset="-122"/>
                 <a:cs typeface="Arial" pitchFamily="34" charset="-120"/>
               </a:rPr>
-              <a:t>Industrial manufacturers requiring force and acceleration measurement</a:t>
+              <a:t>Industrial manufacturers requiring force, pressure, acceleration measurement solutions</a:t>
             </a:r>
             <a:endParaRPr lang="en-US" sz="900" dirty="0"/>
           </a:p>
@@ -11083,7 +11083,7 @@
                 <a:ea typeface="Arial" pitchFamily="34" charset="-122"/>
                 <a:cs typeface="Arial" pitchFamily="34" charset="-120"/>
               </a:rPr>
-              <a:t>Precision measurement technology for industrial applications</a:t>
+              <a:t>Precision measurement technology for industrial applications with integrated electronics</a:t>
             </a:r>
             <a:endParaRPr lang="en-US" sz="900" dirty="0"/>
           </a:p>
@@ -11186,7 +11186,7 @@
                 <a:ea typeface="Arial" pitchFamily="34" charset="-122"/>
                 <a:cs typeface="Arial" pitchFamily="34" charset="-120"/>
               </a:rPr>
-              <a:t>Acquired eso GmbH in 2017; merged with Kistler Instrumente GmbH in March 2021</a:t>
+              <a:t>eso GmbH fully merged with Kistler Instrumente GmbH in March 2021</a:t>
             </a:r>
             <a:endParaRPr lang="en-US" sz="900" dirty="0"/>
           </a:p>
@@ -12042,7 +12042,7 @@
                 <a:ea typeface="Arial" pitchFamily="34" charset="-122"/>
                 <a:cs typeface="Arial" pitchFamily="34" charset="-120"/>
               </a:rPr>
-              <a:t>Product pages, landing pages, consultative sales approach</a:t>
+              <a:t>Direct website, product pages, learning resources</a:t>
             </a:r>
             <a:endParaRPr lang="en-US" sz="900" dirty="0"/>
           </a:p>
@@ -12145,7 +12145,7 @@
                 <a:ea typeface="Arial" pitchFamily="34" charset="-122"/>
                 <a:cs typeface="Arial" pitchFamily="34" charset="-120"/>
               </a:rPr>
-              <a:t>Hot runner systems, IntelliGate digital sensor technology, flow control</a:t>
+              <a:t>Hot runner systems, IntelliGate intelligent hot runners, flow control technology</a:t>
             </a:r>
             <a:endParaRPr lang="en-US" sz="900" dirty="0"/>
           </a:p>
@@ -12248,7 +12248,7 @@
                 <a:ea typeface="Arial" pitchFamily="34" charset="-122"/>
                 <a:cs typeface="Arial" pitchFamily="34" charset="-120"/>
               </a:rPr>
-              <a:t>Long-standing customer relationships, 50+ years experience</a:t>
+              <a:t>50+ years developing hot runner technology, long-standing customer relationships</a:t>
             </a:r>
             <a:endParaRPr lang="en-US" sz="900" dirty="0"/>
           </a:p>
@@ -12557,7 +12557,7 @@
                 <a:ea typeface="Arial" pitchFamily="34" charset="-122"/>
                 <a:cs typeface="Arial" pitchFamily="34" charset="-120"/>
               </a:rPr>
-              <a:t>Plastics injection molding manufacturers seeking efficiency gains</a:t>
+              <a:t>Injection molding manufacturers seeking efficiency and quality improvements</a:t>
             </a:r>
             <a:endParaRPr lang="en-US" sz="900" dirty="0"/>
           </a:p>
@@ -12660,7 +12660,7 @@
                 <a:ea typeface="Arial" pitchFamily="34" charset="-122"/>
                 <a:cs typeface="Arial" pitchFamily="34" charset="-120"/>
               </a:rPr>
-              <a:t>Advanced hot runner solutions to improve injection molding productivity</a:t>
+              <a:t>World-leading hot runner systems enabling material savings and cycle time reduction</a:t>
             </a:r>
             <a:endParaRPr lang="en-US" sz="900" dirty="0"/>
           </a:p>
@@ -12763,7 +12763,7 @@
                 <a:ea typeface="Arial" pitchFamily="34" charset="-122"/>
                 <a:cs typeface="Arial" pitchFamily="34" charset="-120"/>
               </a:rPr>
-              <a:t>Launched new IntelliGate Hot Runner with digital sensor technology</a:t>
+              <a:t>Launched NEW IntelliGate Hot Runner with digital sensor technology</a:t>
             </a:r>
             <a:endParaRPr lang="en-US" sz="900" dirty="0"/>
           </a:p>
@@ -14480,7 +14480,7 @@
                           <a:ea typeface="Arial" pitchFamily="34" charset="-122"/>
                           <a:cs typeface="Arial" pitchFamily="34" charset="-120"/>
                         </a:rPr>
-                        <a:t>Direct contact</a:t>
+                        <a:t>Direct client contact</a:t>
                       </a:r>
                       <a:endParaRPr lang="en-US" sz="800" dirty="0">
                         <a:latin typeface="Arial" charset="0"/>
@@ -14616,7 +14616,7 @@
                           <a:ea typeface="Arial" pitchFamily="34" charset="-122"/>
                           <a:cs typeface="Arial" pitchFamily="34" charset="-120"/>
                         </a:rPr>
-                        <a:t>Product pages</a:t>
+                        <a:t>Direct website</a:t>
                       </a:r>
                       <a:endParaRPr lang="en-US" sz="800" dirty="0">
                         <a:latin typeface="Arial" charset="0"/>
@@ -15164,7 +15164,7 @@
                           <a:ea typeface="Arial" pitchFamily="34" charset="-122"/>
                           <a:cs typeface="Arial" pitchFamily="34" charset="-120"/>
                         </a:rPr>
-                        <a:t>500+ trademark applications and registrations credited</a:t>
+                        <a:t>500+ trademark applications and registrations completed</a:t>
                       </a:r>
                       <a:endParaRPr lang="en-US" sz="800" dirty="0">
                         <a:latin typeface="Arial" charset="0"/>
@@ -15300,7 +15300,7 @@
                           <a:ea typeface="Arial" pitchFamily="34" charset="-122"/>
                           <a:cs typeface="Arial" pitchFamily="34" charset="-120"/>
                         </a:rPr>
-                        <a:t>Long-standing customer relationships</a:t>
+                        <a:t>50+ years developing hot runner technology</a:t>
                       </a:r>
                       <a:endParaRPr lang="en-US" sz="800" dirty="0">
                         <a:latin typeface="Arial" charset="0"/>
@@ -16190,7 +16190,7 @@
                           <a:ea typeface="Arial" pitchFamily="34" charset="-122"/>
                           <a:cs typeface="Arial" pitchFamily="34" charset="-120"/>
                         </a:rPr>
-                        <a:t>Entertainment producers</a:t>
+                        <a:t>Entertainment industry professionals</a:t>
                       </a:r>
                       <a:endParaRPr lang="en-US" sz="800" dirty="0">
                         <a:latin typeface="Arial" charset="0"/>
@@ -16258,7 +16258,7 @@
                           <a:ea typeface="Arial" pitchFamily="34" charset="-122"/>
                           <a:cs typeface="Arial" pitchFamily="34" charset="-120"/>
                         </a:rPr>
-                        <a:t>Industrial manufacturers requiring force and acceleration measurement</a:t>
+                        <a:t>Industrial manufacturers requiring force</a:t>
                       </a:r>
                       <a:endParaRPr lang="en-US" sz="800" dirty="0">
                         <a:latin typeface="Arial" charset="0"/>
@@ -16326,7 +16326,7 @@
                           <a:ea typeface="Arial" pitchFamily="34" charset="-122"/>
                           <a:cs typeface="Arial" pitchFamily="34" charset="-120"/>
                         </a:rPr>
-                        <a:t>Plastics injection molding manufacturers seeking efficiency gains</a:t>
+                        <a:t>Injection molding manufacturers seeking efficiency and quality improvements</a:t>
                       </a:r>
                       <a:endParaRPr lang="en-US" sz="800" dirty="0">
                         <a:latin typeface="Arial" charset="0"/>
@@ -16532,7 +16532,7 @@
                           <a:ea typeface="Arial" pitchFamily="34" charset="-122"/>
                           <a:cs typeface="Arial" pitchFamily="34" charset="-120"/>
                         </a:rPr>
-                        <a:t>Intellectual property and entertainment law expertise</a:t>
+                        <a:t>Intellectual property and entertainment law expertise with 500+ trademark registrations</a:t>
                       </a:r>
                       <a:endParaRPr lang="en-US" sz="800" dirty="0">
                         <a:latin typeface="Arial" charset="0"/>
@@ -16600,7 +16600,7 @@
                           <a:ea typeface="Arial" pitchFamily="34" charset="-122"/>
                           <a:cs typeface="Arial" pitchFamily="34" charset="-120"/>
                         </a:rPr>
-                        <a:t>Precision measurement technology for industrial applications</a:t>
+                        <a:t>Precision measurement technology for industrial applications with integrated electronics</a:t>
                       </a:r>
                       <a:endParaRPr lang="en-US" sz="800" dirty="0">
                         <a:latin typeface="Arial" charset="0"/>
@@ -16668,7 +16668,7 @@
                           <a:ea typeface="Arial" pitchFamily="34" charset="-122"/>
                           <a:cs typeface="Arial" pitchFamily="34" charset="-120"/>
                         </a:rPr>
-                        <a:t>Advanced hot runner solutions to improve injection molding productivity</a:t>
+                        <a:t>World-leading hot runner systems enabling material savings and cycle time reduction</a:t>
                       </a:r>
                       <a:endParaRPr lang="en-US" sz="800" dirty="0">
                         <a:latin typeface="Arial" charset="0"/>
@@ -16942,7 +16942,7 @@
                           <a:ea typeface="Arial" pitchFamily="34" charset="-122"/>
                           <a:cs typeface="Arial" pitchFamily="34" charset="-120"/>
                         </a:rPr>
-                        <a:t>Acquired eso GmbH in 2017; merged with Kistler Instrumente GmbH in March 2021</a:t>
+                        <a:t>eso GmbH fully merged with Kistler Instrumente GmbH in March 2021</a:t>
                       </a:r>
                       <a:endParaRPr lang="en-US" sz="800" dirty="0">
                         <a:latin typeface="Arial" charset="0"/>
@@ -17010,7 +17010,7 @@
                           <a:ea typeface="Arial" pitchFamily="34" charset="-122"/>
                           <a:cs typeface="Arial" pitchFamily="34" charset="-120"/>
                         </a:rPr>
-                        <a:t>Launched new IntelliGate Hot Runner with digital sensor technology</a:t>
+                        <a:t>Launched NEW IntelliGate Hot Runner with digital sensor technology</a:t>
                       </a:r>
                       <a:endParaRPr lang="en-US" sz="800" dirty="0">
                         <a:latin typeface="Arial" charset="0"/>

--- a/mesh_bioplastics_CI_Report.pptx
+++ b/mesh_bioplastics_CI_Report.pptx
@@ -4909,7 +4909,7 @@
                 <a:ea typeface="Arial" pitchFamily="34" charset="-122"/>
                 <a:cs typeface="Arial" pitchFamily="34" charset="-120"/>
               </a:rPr>
-              <a:t>Material Science Innovation vs. Process Equipment Focus</a:t>
+              <a:t>Material Sustainability Integration</a:t>
             </a:r>
             <a:endParaRPr lang="en-US" sz="900" dirty="0"/>
           </a:p>
@@ -4987,7 +4987,7 @@
                 <a:ea typeface="Arial" pitchFamily="34" charset="-122"/>
                 <a:cs typeface="Arial" pitchFamily="34" charset="-120"/>
               </a:rPr>
-              <a:t>Integrated AI Automation vs. Standalone Sensor/Monitoring</a:t>
+              <a:t>Process Intelligence Automation</a:t>
             </a:r>
             <a:endParaRPr lang="en-US" sz="900" dirty="0"/>
           </a:p>
@@ -8888,7 +8888,7 @@
                 <a:ea typeface="Arial" pitchFamily="34" charset="-122"/>
                 <a:cs typeface="Arial" pitchFamily="34" charset="-120"/>
               </a:rPr>
-              <a:t>Direct client contact, referrals from other attorneys</a:t>
+              <a:t>Direct client relationships, referrals from attorneys</a:t>
             </a:r>
             <a:endParaRPr lang="en-US" sz="900" dirty="0"/>
           </a:p>
@@ -8991,7 +8991,7 @@
                 <a:ea typeface="Arial" pitchFamily="34" charset="-122"/>
                 <a:cs typeface="Arial" pitchFamily="34" charset="-120"/>
               </a:rPr>
-              <a:t>Trademark applications, copyright, entertainment law practice expertise</a:t>
+              <a:t>Trademark, copyright, entertainment law expertise, 500+ applications managed</a:t>
             </a:r>
             <a:endParaRPr lang="en-US" sz="900" dirty="0"/>
           </a:p>
@@ -9094,7 +9094,7 @@
                 <a:ea typeface="Arial" pitchFamily="34" charset="-122"/>
                 <a:cs typeface="Arial" pitchFamily="34" charset="-120"/>
               </a:rPr>
-              <a:t>500+ trademark applications and registrations completed</a:t>
+              <a:t>Avvo 10.0 rating, Martindale-Hubbell AV Preeminent recognition</a:t>
             </a:r>
             <a:endParaRPr lang="en-US" sz="900" dirty="0"/>
           </a:p>
@@ -9403,7 +9403,7 @@
                 <a:ea typeface="Arial" pitchFamily="34" charset="-122"/>
                 <a:cs typeface="Arial" pitchFamily="34" charset="-120"/>
               </a:rPr>
-              <a:t>Entertainment industry professionals, trademark applicants, copyright holders</a:t>
+              <a:t>Entertainment producers, directors, actors, musicians, trademark applicants</a:t>
             </a:r>
             <a:endParaRPr lang="en-US" sz="900" dirty="0"/>
           </a:p>
@@ -9506,7 +9506,7 @@
                 <a:ea typeface="Arial" pitchFamily="34" charset="-122"/>
                 <a:cs typeface="Arial" pitchFamily="34" charset="-120"/>
               </a:rPr>
-              <a:t>Intellectual property and entertainment law expertise with 500+ trademark registrations</a:t>
+              <a:t>Intellectual property and entertainment law services expertise</a:t>
             </a:r>
             <a:endParaRPr lang="en-US" sz="900" dirty="0"/>
           </a:p>
@@ -9847,7 +9847,7 @@
                 <a:ea typeface="Arial" pitchFamily="34" charset="-122"/>
                 <a:cs typeface="Arial" pitchFamily="34" charset="-120"/>
               </a:rPr>
-              <a:t>Unknown | https://www.kistler.com</a:t>
+              <a:t>Sindelfingen, Germany | https://www.kistler.com</a:t>
             </a:r>
             <a:endParaRPr lang="en-US" sz="900" dirty="0"/>
           </a:p>
@@ -10465,7 +10465,7 @@
                 <a:ea typeface="Arial" pitchFamily="34" charset="-122"/>
                 <a:cs typeface="Arial" pitchFamily="34" charset="-120"/>
               </a:rPr>
-              <a:t>Product finder, direct website navigation</a:t>
+              <a:t>Product finder, industry technical content, glossary resources</a:t>
             </a:r>
             <a:endParaRPr lang="en-US" sz="900" dirty="0"/>
           </a:p>
@@ -10568,7 +10568,7 @@
                 <a:ea typeface="Arial" pitchFamily="34" charset="-122"/>
                 <a:cs typeface="Arial" pitchFamily="34" charset="-120"/>
               </a:rPr>
-              <a:t>IEPE piezoelectric sensors, force sensors, accelerometers for industrial measurement</a:t>
+              <a:t>Piezoelectric sensors IEPE/ICP, force sensors, accelerometers, vibration measurement</a:t>
             </a:r>
             <a:endParaRPr lang="en-US" sz="900" dirty="0"/>
           </a:p>
@@ -10671,7 +10671,7 @@
                 <a:ea typeface="Arial" pitchFamily="34" charset="-122"/>
                 <a:cs typeface="Arial" pitchFamily="34" charset="-120"/>
               </a:rPr>
-              <a:t>Unknown</a:t>
+              <a:t>Acquired eso GmbH in 2017, merged March 2021, global expansion</a:t>
             </a:r>
             <a:endParaRPr lang="en-US" sz="900" dirty="0"/>
           </a:p>
@@ -10980,7 +10980,7 @@
                 <a:ea typeface="Arial" pitchFamily="34" charset="-122"/>
                 <a:cs typeface="Arial" pitchFamily="34" charset="-120"/>
               </a:rPr>
-              <a:t>Industrial manufacturers requiring force, pressure, acceleration measurement solutions</a:t>
+              <a:t>Industrial manufacturers, road safety monitoring, measurement technology sectors</a:t>
             </a:r>
             <a:endParaRPr lang="en-US" sz="900" dirty="0"/>
           </a:p>
@@ -11083,7 +11083,7 @@
                 <a:ea typeface="Arial" pitchFamily="34" charset="-122"/>
                 <a:cs typeface="Arial" pitchFamily="34" charset="-120"/>
               </a:rPr>
-              <a:t>Precision measurement technology for industrial applications with integrated electronics</a:t>
+              <a:t>Precision measurement technology for industrial applications</a:t>
             </a:r>
             <a:endParaRPr lang="en-US" sz="900" dirty="0"/>
           </a:p>
@@ -12042,7 +12042,7 @@
                 <a:ea typeface="Arial" pitchFamily="34" charset="-122"/>
                 <a:cs typeface="Arial" pitchFamily="34" charset="-120"/>
               </a:rPr>
-              <a:t>Direct website, product pages, learning resources</a:t>
+              <a:t>Product landing pages, case studies, consultative sales approach</a:t>
             </a:r>
             <a:endParaRPr lang="en-US" sz="900" dirty="0"/>
           </a:p>
@@ -12145,7 +12145,7 @@
                 <a:ea typeface="Arial" pitchFamily="34" charset="-122"/>
                 <a:cs typeface="Arial" pitchFamily="34" charset="-120"/>
               </a:rPr>
-              <a:t>Hot runner systems, IntelliGate intelligent hot runners, flow control technology</a:t>
+              <a:t>Hot runner systems, IntelliGate with digital sensors, flow control technology</a:t>
             </a:r>
             <a:endParaRPr lang="en-US" sz="900" dirty="0"/>
           </a:p>
@@ -12248,7 +12248,7 @@
                 <a:ea typeface="Arial" pitchFamily="34" charset="-122"/>
                 <a:cs typeface="Arial" pitchFamily="34" charset="-120"/>
               </a:rPr>
-              <a:t>50+ years developing hot runner technology, long-standing customer relationships</a:t>
+              <a:t>50+ years innovation history, long-standing customer relationships</a:t>
             </a:r>
             <a:endParaRPr lang="en-US" sz="900" dirty="0"/>
           </a:p>
@@ -12557,7 +12557,7 @@
                 <a:ea typeface="Arial" pitchFamily="34" charset="-122"/>
                 <a:cs typeface="Arial" pitchFamily="34" charset="-120"/>
               </a:rPr>
-              <a:t>Injection molding manufacturers seeking efficiency and quality improvements</a:t>
+              <a:t>Injection molding manufacturers, plastic processing, multi-component applications</a:t>
             </a:r>
             <a:endParaRPr lang="en-US" sz="900" dirty="0"/>
           </a:p>
@@ -12660,7 +12660,7 @@
                 <a:ea typeface="Arial" pitchFamily="34" charset="-122"/>
                 <a:cs typeface="Arial" pitchFamily="34" charset="-120"/>
               </a:rPr>
-              <a:t>World-leading hot runner systems enabling material savings and cycle time reduction</a:t>
+              <a:t>Advanced hot runner systems enabling efficient injection molding</a:t>
             </a:r>
             <a:endParaRPr lang="en-US" sz="900" dirty="0"/>
           </a:p>
@@ -14480,7 +14480,7 @@
                           <a:ea typeface="Arial" pitchFamily="34" charset="-122"/>
                           <a:cs typeface="Arial" pitchFamily="34" charset="-120"/>
                         </a:rPr>
-                        <a:t>Direct client contact</a:t>
+                        <a:t>Direct client relationships</a:t>
                       </a:r>
                       <a:endParaRPr lang="en-US" sz="800" dirty="0">
                         <a:latin typeface="Arial" charset="0"/>
@@ -14616,7 +14616,7 @@
                           <a:ea typeface="Arial" pitchFamily="34" charset="-122"/>
                           <a:cs typeface="Arial" pitchFamily="34" charset="-120"/>
                         </a:rPr>
-                        <a:t>Direct website</a:t>
+                        <a:t>Product landing pages</a:t>
                       </a:r>
                       <a:endParaRPr lang="en-US" sz="800" dirty="0">
                         <a:latin typeface="Arial" charset="0"/>
@@ -14822,7 +14822,7 @@
                           <a:ea typeface="Arial" pitchFamily="34" charset="-122"/>
                           <a:cs typeface="Arial" pitchFamily="34" charset="-120"/>
                         </a:rPr>
-                        <a:t>Trademark applications</a:t>
+                        <a:t>Trademark</a:t>
                       </a:r>
                       <a:endParaRPr lang="en-US" sz="800" dirty="0">
                         <a:latin typeface="Arial" charset="0"/>
@@ -14890,7 +14890,7 @@
                           <a:ea typeface="Arial" pitchFamily="34" charset="-122"/>
                           <a:cs typeface="Arial" pitchFamily="34" charset="-120"/>
                         </a:rPr>
-                        <a:t>IEPE piezoelectric sensors</a:t>
+                        <a:t>Piezoelectric sensors IEPE/ICP</a:t>
                       </a:r>
                       <a:endParaRPr lang="en-US" sz="800" dirty="0">
                         <a:latin typeface="Arial" charset="0"/>
@@ -15164,7 +15164,7 @@
                           <a:ea typeface="Arial" pitchFamily="34" charset="-122"/>
                           <a:cs typeface="Arial" pitchFamily="34" charset="-120"/>
                         </a:rPr>
-                        <a:t>500+ trademark applications and registrations completed</a:t>
+                        <a:t>Avvo 10.0 rating</a:t>
                       </a:r>
                       <a:endParaRPr lang="en-US" sz="800" dirty="0">
                         <a:latin typeface="Arial" charset="0"/>
@@ -15232,7 +15232,7 @@
                           <a:ea typeface="Arial" pitchFamily="34" charset="-122"/>
                           <a:cs typeface="Arial" pitchFamily="34" charset="-120"/>
                         </a:rPr>
-                        <a:t>Unknown</a:t>
+                        <a:t>Acquired eso GmbH in 2017</a:t>
                       </a:r>
                       <a:endParaRPr lang="en-US" sz="800" dirty="0">
                         <a:latin typeface="Arial" charset="0"/>
@@ -15300,7 +15300,7 @@
                           <a:ea typeface="Arial" pitchFamily="34" charset="-122"/>
                           <a:cs typeface="Arial" pitchFamily="34" charset="-120"/>
                         </a:rPr>
-                        <a:t>50+ years developing hot runner technology</a:t>
+                        <a:t>50+ years innovation history</a:t>
                       </a:r>
                       <a:endParaRPr lang="en-US" sz="800" dirty="0">
                         <a:latin typeface="Arial" charset="0"/>
@@ -16190,7 +16190,7 @@
                           <a:ea typeface="Arial" pitchFamily="34" charset="-122"/>
                           <a:cs typeface="Arial" pitchFamily="34" charset="-120"/>
                         </a:rPr>
-                        <a:t>Entertainment industry professionals</a:t>
+                        <a:t>Entertainment producers</a:t>
                       </a:r>
                       <a:endParaRPr lang="en-US" sz="800" dirty="0">
                         <a:latin typeface="Arial" charset="0"/>
@@ -16258,7 +16258,7 @@
                           <a:ea typeface="Arial" pitchFamily="34" charset="-122"/>
                           <a:cs typeface="Arial" pitchFamily="34" charset="-120"/>
                         </a:rPr>
-                        <a:t>Industrial manufacturers requiring force</a:t>
+                        <a:t>Industrial manufacturers</a:t>
                       </a:r>
                       <a:endParaRPr lang="en-US" sz="800" dirty="0">
                         <a:latin typeface="Arial" charset="0"/>
@@ -16326,7 +16326,7 @@
                           <a:ea typeface="Arial" pitchFamily="34" charset="-122"/>
                           <a:cs typeface="Arial" pitchFamily="34" charset="-120"/>
                         </a:rPr>
-                        <a:t>Injection molding manufacturers seeking efficiency and quality improvements</a:t>
+                        <a:t>Injection molding manufacturers</a:t>
                       </a:r>
                       <a:endParaRPr lang="en-US" sz="800" dirty="0">
                         <a:latin typeface="Arial" charset="0"/>
@@ -16532,7 +16532,7 @@
                           <a:ea typeface="Arial" pitchFamily="34" charset="-122"/>
                           <a:cs typeface="Arial" pitchFamily="34" charset="-120"/>
                         </a:rPr>
-                        <a:t>Intellectual property and entertainment law expertise with 500+ trademark registrations</a:t>
+                        <a:t>Intellectual property and entertainment law services expertise</a:t>
                       </a:r>
                       <a:endParaRPr lang="en-US" sz="800" dirty="0">
                         <a:latin typeface="Arial" charset="0"/>
@@ -16600,7 +16600,7 @@
                           <a:ea typeface="Arial" pitchFamily="34" charset="-122"/>
                           <a:cs typeface="Arial" pitchFamily="34" charset="-120"/>
                         </a:rPr>
-                        <a:t>Precision measurement technology for industrial applications with integrated electronics</a:t>
+                        <a:t>Precision measurement technology for industrial applications</a:t>
                       </a:r>
                       <a:endParaRPr lang="en-US" sz="800" dirty="0">
                         <a:latin typeface="Arial" charset="0"/>
@@ -16668,7 +16668,7 @@
                           <a:ea typeface="Arial" pitchFamily="34" charset="-122"/>
                           <a:cs typeface="Arial" pitchFamily="34" charset="-120"/>
                         </a:rPr>
-                        <a:t>World-leading hot runner systems enabling material savings and cycle time reduction</a:t>
+                        <a:t>Advanced hot runner systems enabling efficient injection molding</a:t>
                       </a:r>
                       <a:endParaRPr lang="en-US" sz="800" dirty="0">
                         <a:latin typeface="Arial" charset="0"/>

--- a/mesh_bioplastics_CI_Report.pptx
+++ b/mesh_bioplastics_CI_Report.pptx
@@ -4909,7 +4909,7 @@
                 <a:ea typeface="Arial" pitchFamily="34" charset="-122"/>
                 <a:cs typeface="Arial" pitchFamily="34" charset="-120"/>
               </a:rPr>
-              <a:t>Material Sustainability Integration</a:t>
+              <a:t>Material Innovation vs. Process Innovation</a:t>
             </a:r>
             <a:endParaRPr lang="en-US" sz="900" dirty="0"/>
           </a:p>
@@ -4987,7 +4987,7 @@
                 <a:ea typeface="Arial" pitchFamily="34" charset="-122"/>
                 <a:cs typeface="Arial" pitchFamily="34" charset="-120"/>
               </a:rPr>
-              <a:t>Process Intelligence Automation</a:t>
+              <a:t>Sustainability Focus vs. Performance Optimization</a:t>
             </a:r>
             <a:endParaRPr lang="en-US" sz="900" dirty="0"/>
           </a:p>
@@ -8888,7 +8888,7 @@
                 <a:ea typeface="Arial" pitchFamily="34" charset="-122"/>
                 <a:cs typeface="Arial" pitchFamily="34" charset="-120"/>
               </a:rPr>
-              <a:t>Direct client relationships, referrals from attorneys</a:t>
+              <a:t>Direct client relationships, referrals from other attorneys</a:t>
             </a:r>
             <a:endParaRPr lang="en-US" sz="900" dirty="0"/>
           </a:p>
@@ -8991,7 +8991,7 @@
                 <a:ea typeface="Arial" pitchFamily="34" charset="-122"/>
                 <a:cs typeface="Arial" pitchFamily="34" charset="-120"/>
               </a:rPr>
-              <a:t>Trademark, copyright, entertainment law expertise, 500+ applications managed</a:t>
+              <a:t>Trademark expertise with 500+ applications and registrations to credit</a:t>
             </a:r>
             <a:endParaRPr lang="en-US" sz="900" dirty="0"/>
           </a:p>
@@ -9094,7 +9094,7 @@
                 <a:ea typeface="Arial" pitchFamily="34" charset="-122"/>
                 <a:cs typeface="Arial" pitchFamily="34" charset="-120"/>
               </a:rPr>
-              <a:t>Avvo 10.0 rating, Martindale-Hubbell AV Preeminent recognition</a:t>
+              <a:t>Unknown</a:t>
             </a:r>
             <a:endParaRPr lang="en-US" sz="900" dirty="0"/>
           </a:p>
@@ -9403,7 +9403,7 @@
                 <a:ea typeface="Arial" pitchFamily="34" charset="-122"/>
                 <a:cs typeface="Arial" pitchFamily="34" charset="-120"/>
               </a:rPr>
-              <a:t>Entertainment producers, directors, actors, musicians, trademark applicants</a:t>
+              <a:t>Entertainment industry professionals, producers, directors, musicians</a:t>
             </a:r>
             <a:endParaRPr lang="en-US" sz="900" dirty="0"/>
           </a:p>
@@ -9506,7 +9506,7 @@
                 <a:ea typeface="Arial" pitchFamily="34" charset="-122"/>
                 <a:cs typeface="Arial" pitchFamily="34" charset="-120"/>
               </a:rPr>
-              <a:t>Intellectual property and entertainment law services expertise</a:t>
+              <a:t>Intellectual property law specializing in trademark and copyright matters</a:t>
             </a:r>
             <a:endParaRPr lang="en-US" sz="900" dirty="0"/>
           </a:p>
@@ -10465,7 +10465,7 @@
                 <a:ea typeface="Arial" pitchFamily="34" charset="-122"/>
                 <a:cs typeface="Arial" pitchFamily="34" charset="-120"/>
               </a:rPr>
-              <a:t>Product finder, industry technical content, glossary resources</a:t>
+              <a:t>Product finder tools, technical documentation, glossary resources</a:t>
             </a:r>
             <a:endParaRPr lang="en-US" sz="900" dirty="0"/>
           </a:p>
@@ -10568,7 +10568,7 @@
                 <a:ea typeface="Arial" pitchFamily="34" charset="-122"/>
                 <a:cs typeface="Arial" pitchFamily="34" charset="-120"/>
               </a:rPr>
-              <a:t>Piezoelectric sensors IEPE/ICP, force sensors, accelerometers, vibration measurement</a:t>
+              <a:t>IEPE piezoelectric sensors, force sensors, accelerometers for industrial measurement</a:t>
             </a:r>
             <a:endParaRPr lang="en-US" sz="900" dirty="0"/>
           </a:p>
@@ -10671,7 +10671,7 @@
                 <a:ea typeface="Arial" pitchFamily="34" charset="-122"/>
                 <a:cs typeface="Arial" pitchFamily="34" charset="-120"/>
               </a:rPr>
-              <a:t>Acquired eso GmbH in 2017, merged March 2021, global expansion</a:t>
+              <a:t>Unknown</a:t>
             </a:r>
             <a:endParaRPr lang="en-US" sz="900" dirty="0"/>
           </a:p>
@@ -10980,7 +10980,7 @@
                 <a:ea typeface="Arial" pitchFamily="34" charset="-122"/>
                 <a:cs typeface="Arial" pitchFamily="34" charset="-120"/>
               </a:rPr>
-              <a:t>Industrial manufacturers, road safety monitoring, measurement technology sectors</a:t>
+              <a:t>Industrial manufacturers requiring precision force pressure acceleration measurement</a:t>
             </a:r>
             <a:endParaRPr lang="en-US" sz="900" dirty="0"/>
           </a:p>
@@ -11083,7 +11083,7 @@
                 <a:ea typeface="Arial" pitchFamily="34" charset="-122"/>
                 <a:cs typeface="Arial" pitchFamily="34" charset="-120"/>
               </a:rPr>
-              <a:t>Precision measurement technology for industrial applications</a:t>
+              <a:t>Advanced measurement technology solutions for industrial applications</a:t>
             </a:r>
             <a:endParaRPr lang="en-US" sz="900" dirty="0"/>
           </a:p>
@@ -11186,7 +11186,7 @@
                 <a:ea typeface="Arial" pitchFamily="34" charset="-122"/>
                 <a:cs typeface="Arial" pitchFamily="34" charset="-120"/>
               </a:rPr>
-              <a:t>eso GmbH fully merged with Kistler Instrumente GmbH in March 2021</a:t>
+              <a:t>eso GmbH merged with Kistler Instrumente GmbH in March 2021</a:t>
             </a:r>
             <a:endParaRPr lang="en-US" sz="900" dirty="0"/>
           </a:p>
@@ -12042,7 +12042,7 @@
                 <a:ea typeface="Arial" pitchFamily="34" charset="-122"/>
                 <a:cs typeface="Arial" pitchFamily="34" charset="-120"/>
               </a:rPr>
-              <a:t>Product landing pages, case studies, consultative sales approach</a:t>
+              <a:t>Product pages, technical learning resources, consultative approach</a:t>
             </a:r>
             <a:endParaRPr lang="en-US" sz="900" dirty="0"/>
           </a:p>
@@ -12145,7 +12145,7 @@
                 <a:ea typeface="Arial" pitchFamily="34" charset="-122"/>
                 <a:cs typeface="Arial" pitchFamily="34" charset="-120"/>
               </a:rPr>
-              <a:t>Hot runner systems, IntelliGate with digital sensors, flow control technology</a:t>
+              <a:t>Hot runner systems, flow control technology, IntelliGate digital sensor integration</a:t>
             </a:r>
             <a:endParaRPr lang="en-US" sz="900" dirty="0"/>
           </a:p>
@@ -12248,7 +12248,7 @@
                 <a:ea typeface="Arial" pitchFamily="34" charset="-122"/>
                 <a:cs typeface="Arial" pitchFamily="34" charset="-120"/>
               </a:rPr>
-              <a:t>50+ years innovation history, long-standing customer relationships</a:t>
+              <a:t>Unknown</a:t>
             </a:r>
             <a:endParaRPr lang="en-US" sz="900" dirty="0"/>
           </a:p>
@@ -12557,7 +12557,7 @@
                 <a:ea typeface="Arial" pitchFamily="34" charset="-122"/>
                 <a:cs typeface="Arial" pitchFamily="34" charset="-120"/>
               </a:rPr>
-              <a:t>Injection molding manufacturers, plastic processing, multi-component applications</a:t>
+              <a:t>Plastic injection molding manufacturers seeking efficiency and quality</a:t>
             </a:r>
             <a:endParaRPr lang="en-US" sz="900" dirty="0"/>
           </a:p>
@@ -12660,7 +12660,7 @@
                 <a:ea typeface="Arial" pitchFamily="34" charset="-122"/>
                 <a:cs typeface="Arial" pitchFamily="34" charset="-120"/>
               </a:rPr>
-              <a:t>Advanced hot runner systems enabling efficient injection molding</a:t>
+              <a:t>Advanced hot runner solutions improving injection molding efficiency and profitability</a:t>
             </a:r>
             <a:endParaRPr lang="en-US" sz="900" dirty="0"/>
           </a:p>
@@ -12763,7 +12763,7 @@
                 <a:ea typeface="Arial" pitchFamily="34" charset="-122"/>
                 <a:cs typeface="Arial" pitchFamily="34" charset="-120"/>
               </a:rPr>
-              <a:t>Launched NEW IntelliGate Hot Runner with digital sensor technology</a:t>
+              <a:t>Launch of new IntelliGate Hot Runner with digital sensor technology</a:t>
             </a:r>
             <a:endParaRPr lang="en-US" sz="900" dirty="0"/>
           </a:p>
@@ -14548,7 +14548,7 @@
                           <a:ea typeface="Arial" pitchFamily="34" charset="-122"/>
                           <a:cs typeface="Arial" pitchFamily="34" charset="-120"/>
                         </a:rPr>
-                        <a:t>Product finder</a:t>
+                        <a:t>Product finder tools</a:t>
                       </a:r>
                       <a:endParaRPr lang="en-US" sz="800" dirty="0">
                         <a:latin typeface="Arial" charset="0"/>
@@ -14616,7 +14616,7 @@
                           <a:ea typeface="Arial" pitchFamily="34" charset="-122"/>
                           <a:cs typeface="Arial" pitchFamily="34" charset="-120"/>
                         </a:rPr>
-                        <a:t>Product landing pages</a:t>
+                        <a:t>Product pages</a:t>
                       </a:r>
                       <a:endParaRPr lang="en-US" sz="800" dirty="0">
                         <a:latin typeface="Arial" charset="0"/>
@@ -14822,7 +14822,7 @@
                           <a:ea typeface="Arial" pitchFamily="34" charset="-122"/>
                           <a:cs typeface="Arial" pitchFamily="34" charset="-120"/>
                         </a:rPr>
-                        <a:t>Trademark</a:t>
+                        <a:t>Trademark expertise with 500+ applications and registrations to credit</a:t>
                       </a:r>
                       <a:endParaRPr lang="en-US" sz="800" dirty="0">
                         <a:latin typeface="Arial" charset="0"/>
@@ -14890,7 +14890,7 @@
                           <a:ea typeface="Arial" pitchFamily="34" charset="-122"/>
                           <a:cs typeface="Arial" pitchFamily="34" charset="-120"/>
                         </a:rPr>
-                        <a:t>Piezoelectric sensors IEPE/ICP</a:t>
+                        <a:t>IEPE piezoelectric sensors</a:t>
                       </a:r>
                       <a:endParaRPr lang="en-US" sz="800" dirty="0">
                         <a:latin typeface="Arial" charset="0"/>
@@ -15164,7 +15164,7 @@
                           <a:ea typeface="Arial" pitchFamily="34" charset="-122"/>
                           <a:cs typeface="Arial" pitchFamily="34" charset="-120"/>
                         </a:rPr>
-                        <a:t>Avvo 10.0 rating</a:t>
+                        <a:t>Unknown</a:t>
                       </a:r>
                       <a:endParaRPr lang="en-US" sz="800" dirty="0">
                         <a:latin typeface="Arial" charset="0"/>
@@ -15232,7 +15232,7 @@
                           <a:ea typeface="Arial" pitchFamily="34" charset="-122"/>
                           <a:cs typeface="Arial" pitchFamily="34" charset="-120"/>
                         </a:rPr>
-                        <a:t>Acquired eso GmbH in 2017</a:t>
+                        <a:t>Unknown</a:t>
                       </a:r>
                       <a:endParaRPr lang="en-US" sz="800" dirty="0">
                         <a:latin typeface="Arial" charset="0"/>
@@ -15300,7 +15300,7 @@
                           <a:ea typeface="Arial" pitchFamily="34" charset="-122"/>
                           <a:cs typeface="Arial" pitchFamily="34" charset="-120"/>
                         </a:rPr>
-                        <a:t>50+ years innovation history</a:t>
+                        <a:t>Unknown</a:t>
                       </a:r>
                       <a:endParaRPr lang="en-US" sz="800" dirty="0">
                         <a:latin typeface="Arial" charset="0"/>
@@ -16190,7 +16190,7 @@
                           <a:ea typeface="Arial" pitchFamily="34" charset="-122"/>
                           <a:cs typeface="Arial" pitchFamily="34" charset="-120"/>
                         </a:rPr>
-                        <a:t>Entertainment producers</a:t>
+                        <a:t>Entertainment industry professionals</a:t>
                       </a:r>
                       <a:endParaRPr lang="en-US" sz="800" dirty="0">
                         <a:latin typeface="Arial" charset="0"/>
@@ -16258,7 +16258,7 @@
                           <a:ea typeface="Arial" pitchFamily="34" charset="-122"/>
                           <a:cs typeface="Arial" pitchFamily="34" charset="-120"/>
                         </a:rPr>
-                        <a:t>Industrial manufacturers</a:t>
+                        <a:t>Industrial manufacturers requiring precision force pressure acceleration measurement</a:t>
                       </a:r>
                       <a:endParaRPr lang="en-US" sz="800" dirty="0">
                         <a:latin typeface="Arial" charset="0"/>
@@ -16326,7 +16326,7 @@
                           <a:ea typeface="Arial" pitchFamily="34" charset="-122"/>
                           <a:cs typeface="Arial" pitchFamily="34" charset="-120"/>
                         </a:rPr>
-                        <a:t>Injection molding manufacturers</a:t>
+                        <a:t>Plastic injection molding manufacturers seeking efficiency and quality</a:t>
                       </a:r>
                       <a:endParaRPr lang="en-US" sz="800" dirty="0">
                         <a:latin typeface="Arial" charset="0"/>
@@ -16532,7 +16532,7 @@
                           <a:ea typeface="Arial" pitchFamily="34" charset="-122"/>
                           <a:cs typeface="Arial" pitchFamily="34" charset="-120"/>
                         </a:rPr>
-                        <a:t>Intellectual property and entertainment law services expertise</a:t>
+                        <a:t>Intellectual property law specializing in trademark and copyright matters</a:t>
                       </a:r>
                       <a:endParaRPr lang="en-US" sz="800" dirty="0">
                         <a:latin typeface="Arial" charset="0"/>
@@ -16600,7 +16600,7 @@
                           <a:ea typeface="Arial" pitchFamily="34" charset="-122"/>
                           <a:cs typeface="Arial" pitchFamily="34" charset="-120"/>
                         </a:rPr>
-                        <a:t>Precision measurement technology for industrial applications</a:t>
+                        <a:t>Advanced measurement technology solutions for industrial applications</a:t>
                       </a:r>
                       <a:endParaRPr lang="en-US" sz="800" dirty="0">
                         <a:latin typeface="Arial" charset="0"/>
@@ -16668,7 +16668,7 @@
                           <a:ea typeface="Arial" pitchFamily="34" charset="-122"/>
                           <a:cs typeface="Arial" pitchFamily="34" charset="-120"/>
                         </a:rPr>
-                        <a:t>Advanced hot runner systems enabling efficient injection molding</a:t>
+                        <a:t>Advanced hot runner solutions improving injection molding efficiency and profitability</a:t>
                       </a:r>
                       <a:endParaRPr lang="en-US" sz="800" dirty="0">
                         <a:latin typeface="Arial" charset="0"/>
@@ -16942,7 +16942,7 @@
                           <a:ea typeface="Arial" pitchFamily="34" charset="-122"/>
                           <a:cs typeface="Arial" pitchFamily="34" charset="-120"/>
                         </a:rPr>
-                        <a:t>eso GmbH fully merged with Kistler Instrumente GmbH in March 2021</a:t>
+                        <a:t>eso GmbH merged with Kistler Instrumente GmbH in March 2021</a:t>
                       </a:r>
                       <a:endParaRPr lang="en-US" sz="800" dirty="0">
                         <a:latin typeface="Arial" charset="0"/>
@@ -17010,7 +17010,7 @@
                           <a:ea typeface="Arial" pitchFamily="34" charset="-122"/>
                           <a:cs typeface="Arial" pitchFamily="34" charset="-120"/>
                         </a:rPr>
-                        <a:t>Launched NEW IntelliGate Hot Runner with digital sensor technology</a:t>
+                        <a:t>Launch of new IntelliGate Hot Runner with digital sensor technology</a:t>
                       </a:r>
                       <a:endParaRPr lang="en-US" sz="800" dirty="0">
                         <a:latin typeface="Arial" charset="0"/>

--- a/mesh_bioplastics_CI_Report.pptx
+++ b/mesh_bioplastics_CI_Report.pptx
@@ -4909,7 +4909,7 @@
                 <a:ea typeface="Arial" pitchFamily="34" charset="-122"/>
                 <a:cs typeface="Arial" pitchFamily="34" charset="-120"/>
               </a:rPr>
-              <a:t>Material Innovation vs. Process Innovation</a:t>
+              <a:t>Material Innovation vs. Process Optimization Focus</a:t>
             </a:r>
             <a:endParaRPr lang="en-US" sz="900" dirty="0"/>
           </a:p>
@@ -4987,7 +4987,7 @@
                 <a:ea typeface="Arial" pitchFamily="34" charset="-122"/>
                 <a:cs typeface="Arial" pitchFamily="34" charset="-120"/>
               </a:rPr>
-              <a:t>Sustainability Focus vs. Performance Optimization</a:t>
+              <a:t>End-to-End Integration vs. Point Solution Specialization</a:t>
             </a:r>
             <a:endParaRPr lang="en-US" sz="900" dirty="0"/>
           </a:p>
@@ -7737,7 +7737,7 @@
                 <a:ea typeface="Arial" pitchFamily="34" charset="-122"/>
                 <a:cs typeface="Arial" pitchFamily="34" charset="-120"/>
               </a:rPr>
-              <a:t>rjg.com</a:t>
+              <a:t>rjginc.com</a:t>
             </a:r>
             <a:endParaRPr lang="en-US" sz="800" dirty="0"/>
           </a:p>
@@ -8231,7 +8231,7 @@
                 <a:ea typeface="Arial" pitchFamily="34" charset="-122"/>
                 <a:cs typeface="Arial" pitchFamily="34" charset="-120"/>
               </a:rPr>
-              <a:t>rjg.com</a:t>
+              <a:t>rjginc.com</a:t>
             </a:r>
             <a:endParaRPr lang="en-US" sz="1800" dirty="0"/>
           </a:p>
@@ -8270,7 +8270,7 @@
                 <a:ea typeface="Arial" pitchFamily="34" charset="-122"/>
                 <a:cs typeface="Arial" pitchFamily="34" charset="-120"/>
               </a:rPr>
-              <a:t>Emeryville, California, United States | https://www.rjg.com</a:t>
+              <a:t>Unknown | https://www.rjginc.com</a:t>
             </a:r>
             <a:endParaRPr lang="en-US" sz="900" dirty="0"/>
           </a:p>
@@ -8888,7 +8888,7 @@
                 <a:ea typeface="Arial" pitchFamily="34" charset="-122"/>
                 <a:cs typeface="Arial" pitchFamily="34" charset="-120"/>
               </a:rPr>
-              <a:t>Direct client relationships, referrals from other attorneys</a:t>
+              <a:t>Google Analytics, Google Tag Manager, organic search</a:t>
             </a:r>
             <a:endParaRPr lang="en-US" sz="900" dirty="0"/>
           </a:p>
@@ -8991,7 +8991,7 @@
                 <a:ea typeface="Arial" pitchFamily="34" charset="-122"/>
                 <a:cs typeface="Arial" pitchFamily="34" charset="-120"/>
               </a:rPr>
-              <a:t>Trademark expertise with 500+ applications and registrations to credit</a:t>
+              <a:t>Unknown</a:t>
             </a:r>
             <a:endParaRPr lang="en-US" sz="900" dirty="0"/>
           </a:p>
@@ -9300,7 +9300,7 @@
                 <a:ea typeface="Arial" pitchFamily="34" charset="-122"/>
                 <a:cs typeface="Arial" pitchFamily="34" charset="-120"/>
               </a:rPr>
-              <a:t>Private</a:t>
+              <a:t>Unknown</a:t>
             </a:r>
             <a:endParaRPr lang="en-US" sz="900" dirty="0"/>
           </a:p>
@@ -9403,7 +9403,7 @@
                 <a:ea typeface="Arial" pitchFamily="34" charset="-122"/>
                 <a:cs typeface="Arial" pitchFamily="34" charset="-120"/>
               </a:rPr>
-              <a:t>Entertainment industry professionals, producers, directors, musicians</a:t>
+              <a:t>Unknown</a:t>
             </a:r>
             <a:endParaRPr lang="en-US" sz="900" dirty="0"/>
           </a:p>
@@ -9506,7 +9506,7 @@
                 <a:ea typeface="Arial" pitchFamily="34" charset="-122"/>
                 <a:cs typeface="Arial" pitchFamily="34" charset="-120"/>
               </a:rPr>
-              <a:t>Intellectual property law specializing in trademark and copyright matters</a:t>
+              <a:t>Unknown</a:t>
             </a:r>
             <a:endParaRPr lang="en-US" sz="900" dirty="0"/>
           </a:p>
@@ -10465,7 +10465,7 @@
                 <a:ea typeface="Arial" pitchFamily="34" charset="-122"/>
                 <a:cs typeface="Arial" pitchFamily="34" charset="-120"/>
               </a:rPr>
-              <a:t>Product finder tools, technical documentation, glossary resources</a:t>
+              <a:t>Product finder, direct website</a:t>
             </a:r>
             <a:endParaRPr lang="en-US" sz="900" dirty="0"/>
           </a:p>
@@ -10568,7 +10568,7 @@
                 <a:ea typeface="Arial" pitchFamily="34" charset="-122"/>
                 <a:cs typeface="Arial" pitchFamily="34" charset="-120"/>
               </a:rPr>
-              <a:t>IEPE piezoelectric sensors, force sensors, accelerometers for industrial measurement</a:t>
+              <a:t>Piezoelectric sensors, force sensors, accelerometers, IEPE technology</a:t>
             </a:r>
             <a:endParaRPr lang="en-US" sz="900" dirty="0"/>
           </a:p>
@@ -10980,7 +10980,7 @@
                 <a:ea typeface="Arial" pitchFamily="34" charset="-122"/>
                 <a:cs typeface="Arial" pitchFamily="34" charset="-120"/>
               </a:rPr>
-              <a:t>Industrial manufacturers requiring precision force pressure acceleration measurement</a:t>
+              <a:t>Industrial measurement and testing applications</a:t>
             </a:r>
             <a:endParaRPr lang="en-US" sz="900" dirty="0"/>
           </a:p>
@@ -11083,7 +11083,7 @@
                 <a:ea typeface="Arial" pitchFamily="34" charset="-122"/>
                 <a:cs typeface="Arial" pitchFamily="34" charset="-120"/>
               </a:rPr>
-              <a:t>Advanced measurement technology solutions for industrial applications</a:t>
+              <a:t>Advanced measurement technology solutions for industry</a:t>
             </a:r>
             <a:endParaRPr lang="en-US" sz="900" dirty="0"/>
           </a:p>
@@ -11836,7 +11836,7 @@
                 <a:ea typeface="Arial" pitchFamily="34" charset="-122"/>
                 <a:cs typeface="Arial" pitchFamily="34" charset="-120"/>
               </a:rPr>
-              <a:t>World's leading manufacturer of hot runner systems</a:t>
+              <a:t>Unknown</a:t>
             </a:r>
             <a:endParaRPr lang="en-US" sz="900" dirty="0"/>
           </a:p>
@@ -12042,7 +12042,7 @@
                 <a:ea typeface="Arial" pitchFamily="34" charset="-122"/>
                 <a:cs typeface="Arial" pitchFamily="34" charset="-120"/>
               </a:rPr>
-              <a:t>Product pages, technical learning resources, consultative approach</a:t>
+              <a:t>Direct website, product pages, landing pages</a:t>
             </a:r>
             <a:endParaRPr lang="en-US" sz="900" dirty="0"/>
           </a:p>
@@ -12145,7 +12145,7 @@
                 <a:ea typeface="Arial" pitchFamily="34" charset="-122"/>
                 <a:cs typeface="Arial" pitchFamily="34" charset="-120"/>
               </a:rPr>
-              <a:t>Hot runner systems, flow control technology, IntelliGate digital sensor integration</a:t>
+              <a:t>Hot runner systems, pin control technology, IntelliGate digital sensors</a:t>
             </a:r>
             <a:endParaRPr lang="en-US" sz="900" dirty="0"/>
           </a:p>
@@ -12454,7 +12454,7 @@
                 <a:ea typeface="Arial" pitchFamily="34" charset="-122"/>
                 <a:cs typeface="Arial" pitchFamily="34" charset="-120"/>
               </a:rPr>
-              <a:t>Private</a:t>
+              <a:t>Unknown</a:t>
             </a:r>
             <a:endParaRPr lang="en-US" sz="900" dirty="0"/>
           </a:p>
@@ -12557,7 +12557,7 @@
                 <a:ea typeface="Arial" pitchFamily="34" charset="-122"/>
                 <a:cs typeface="Arial" pitchFamily="34" charset="-120"/>
               </a:rPr>
-              <a:t>Plastic injection molding manufacturers seeking efficiency and quality</a:t>
+              <a:t>Injection molding manufacturers and mold designers</a:t>
             </a:r>
             <a:endParaRPr lang="en-US" sz="900" dirty="0"/>
           </a:p>
@@ -12660,7 +12660,7 @@
                 <a:ea typeface="Arial" pitchFamily="34" charset="-122"/>
                 <a:cs typeface="Arial" pitchFamily="34" charset="-120"/>
               </a:rPr>
-              <a:t>Advanced hot runner solutions improving injection molding efficiency and profitability</a:t>
+              <a:t>Mold a better tomorrow with advanced hot runner solutions</a:t>
             </a:r>
             <a:endParaRPr lang="en-US" sz="900" dirty="0"/>
           </a:p>
@@ -12763,7 +12763,7 @@
                 <a:ea typeface="Arial" pitchFamily="34" charset="-122"/>
                 <a:cs typeface="Arial" pitchFamily="34" charset="-120"/>
               </a:rPr>
-              <a:t>Launch of new IntelliGate Hot Runner with digital sensor technology</a:t>
+              <a:t>Launched new IntelliGate Hot Runner with digital sensor technology</a:t>
             </a:r>
             <a:endParaRPr lang="en-US" sz="900" dirty="0"/>
           </a:p>
@@ -13112,7 +13112,7 @@
                           <a:ea typeface="Arial" pitchFamily="34" charset="-122"/>
                           <a:cs typeface="Arial" pitchFamily="34" charset="-120"/>
                         </a:rPr>
-                        <a:t>rjg.com</a:t>
+                        <a:t>rjginc.com</a:t>
                       </a:r>
                       <a:endParaRPr lang="en-US" sz="900" dirty="0">
                         <a:latin typeface="Arial" charset="0"/>
@@ -13932,7 +13932,7 @@
                           <a:ea typeface="Arial" pitchFamily="34" charset="-122"/>
                           <a:cs typeface="Arial" pitchFamily="34" charset="-120"/>
                         </a:rPr>
-                        <a:t>World's leading manufacturer of hot runner systems</a:t>
+                        <a:t>Unknown</a:t>
                       </a:r>
                       <a:endParaRPr lang="en-US" sz="800" dirty="0">
                         <a:latin typeface="Arial" charset="0"/>
@@ -14480,7 +14480,7 @@
                           <a:ea typeface="Arial" pitchFamily="34" charset="-122"/>
                           <a:cs typeface="Arial" pitchFamily="34" charset="-120"/>
                         </a:rPr>
-                        <a:t>Direct client relationships</a:t>
+                        <a:t>Google Analytics</a:t>
                       </a:r>
                       <a:endParaRPr lang="en-US" sz="800" dirty="0">
                         <a:latin typeface="Arial" charset="0"/>
@@ -14548,7 +14548,7 @@
                           <a:ea typeface="Arial" pitchFamily="34" charset="-122"/>
                           <a:cs typeface="Arial" pitchFamily="34" charset="-120"/>
                         </a:rPr>
-                        <a:t>Product finder tools</a:t>
+                        <a:t>Product finder</a:t>
                       </a:r>
                       <a:endParaRPr lang="en-US" sz="800" dirty="0">
                         <a:latin typeface="Arial" charset="0"/>
@@ -14616,7 +14616,7 @@
                           <a:ea typeface="Arial" pitchFamily="34" charset="-122"/>
                           <a:cs typeface="Arial" pitchFamily="34" charset="-120"/>
                         </a:rPr>
-                        <a:t>Product pages</a:t>
+                        <a:t>Direct website</a:t>
                       </a:r>
                       <a:endParaRPr lang="en-US" sz="800" dirty="0">
                         <a:latin typeface="Arial" charset="0"/>
@@ -14822,7 +14822,7 @@
                           <a:ea typeface="Arial" pitchFamily="34" charset="-122"/>
                           <a:cs typeface="Arial" pitchFamily="34" charset="-120"/>
                         </a:rPr>
-                        <a:t>Trademark expertise with 500+ applications and registrations to credit</a:t>
+                        <a:t>Unknown</a:t>
                       </a:r>
                       <a:endParaRPr lang="en-US" sz="800" dirty="0">
                         <a:latin typeface="Arial" charset="0"/>
@@ -14890,7 +14890,7 @@
                           <a:ea typeface="Arial" pitchFamily="34" charset="-122"/>
                           <a:cs typeface="Arial" pitchFamily="34" charset="-120"/>
                         </a:rPr>
-                        <a:t>IEPE piezoelectric sensors</a:t>
+                        <a:t>Piezoelectric sensors</a:t>
                       </a:r>
                       <a:endParaRPr lang="en-US" sz="800" dirty="0">
                         <a:latin typeface="Arial" charset="0"/>
@@ -15848,7 +15848,7 @@
                           <a:ea typeface="Arial" pitchFamily="34" charset="-122"/>
                           <a:cs typeface="Arial" pitchFamily="34" charset="-120"/>
                         </a:rPr>
-                        <a:t>Private</a:t>
+                        <a:t>Unknown</a:t>
                       </a:r>
                       <a:endParaRPr lang="en-US" sz="800" dirty="0">
                         <a:latin typeface="Arial" charset="0"/>
@@ -15984,7 +15984,7 @@
                           <a:ea typeface="Arial" pitchFamily="34" charset="-122"/>
                           <a:cs typeface="Arial" pitchFamily="34" charset="-120"/>
                         </a:rPr>
-                        <a:t>Private</a:t>
+                        <a:t>Unknown</a:t>
                       </a:r>
                       <a:endParaRPr lang="en-US" sz="800" dirty="0">
                         <a:latin typeface="Arial" charset="0"/>
@@ -16190,7 +16190,7 @@
                           <a:ea typeface="Arial" pitchFamily="34" charset="-122"/>
                           <a:cs typeface="Arial" pitchFamily="34" charset="-120"/>
                         </a:rPr>
-                        <a:t>Entertainment industry professionals</a:t>
+                        <a:t>Unknown</a:t>
                       </a:r>
                       <a:endParaRPr lang="en-US" sz="800" dirty="0">
                         <a:latin typeface="Arial" charset="0"/>
@@ -16258,7 +16258,7 @@
                           <a:ea typeface="Arial" pitchFamily="34" charset="-122"/>
                           <a:cs typeface="Arial" pitchFamily="34" charset="-120"/>
                         </a:rPr>
-                        <a:t>Industrial manufacturers requiring precision force pressure acceleration measurement</a:t>
+                        <a:t>Industrial measurement and testing applications</a:t>
                       </a:r>
                       <a:endParaRPr lang="en-US" sz="800" dirty="0">
                         <a:latin typeface="Arial" charset="0"/>
@@ -16326,7 +16326,7 @@
                           <a:ea typeface="Arial" pitchFamily="34" charset="-122"/>
                           <a:cs typeface="Arial" pitchFamily="34" charset="-120"/>
                         </a:rPr>
-                        <a:t>Plastic injection molding manufacturers seeking efficiency and quality</a:t>
+                        <a:t>Injection molding manufacturers and mold designers</a:t>
                       </a:r>
                       <a:endParaRPr lang="en-US" sz="800" dirty="0">
                         <a:latin typeface="Arial" charset="0"/>
@@ -16532,7 +16532,7 @@
                           <a:ea typeface="Arial" pitchFamily="34" charset="-122"/>
                           <a:cs typeface="Arial" pitchFamily="34" charset="-120"/>
                         </a:rPr>
-                        <a:t>Intellectual property law specializing in trademark and copyright matters</a:t>
+                        <a:t>Unknown</a:t>
                       </a:r>
                       <a:endParaRPr lang="en-US" sz="800" dirty="0">
                         <a:latin typeface="Arial" charset="0"/>
@@ -16600,7 +16600,7 @@
                           <a:ea typeface="Arial" pitchFamily="34" charset="-122"/>
                           <a:cs typeface="Arial" pitchFamily="34" charset="-120"/>
                         </a:rPr>
-                        <a:t>Advanced measurement technology solutions for industrial applications</a:t>
+                        <a:t>Advanced measurement technology solutions for industry</a:t>
                       </a:r>
                       <a:endParaRPr lang="en-US" sz="800" dirty="0">
                         <a:latin typeface="Arial" charset="0"/>
@@ -16668,7 +16668,7 @@
                           <a:ea typeface="Arial" pitchFamily="34" charset="-122"/>
                           <a:cs typeface="Arial" pitchFamily="34" charset="-120"/>
                         </a:rPr>
-                        <a:t>Advanced hot runner solutions improving injection molding efficiency and profitability</a:t>
+                        <a:t>Mold a better tomorrow with advanced hot runner solutions</a:t>
                       </a:r>
                       <a:endParaRPr lang="en-US" sz="800" dirty="0">
                         <a:latin typeface="Arial" charset="0"/>
@@ -17010,7 +17010,7 @@
                           <a:ea typeface="Arial" pitchFamily="34" charset="-122"/>
                           <a:cs typeface="Arial" pitchFamily="34" charset="-120"/>
                         </a:rPr>
-                        <a:t>Launch of new IntelliGate Hot Runner with digital sensor technology</a:t>
+                        <a:t>Launched new IntelliGate Hot Runner with digital sensor technology</a:t>
                       </a:r>
                       <a:endParaRPr lang="en-US" sz="800" dirty="0">
                         <a:latin typeface="Arial" charset="0"/>
